--- a/docs/sprint2/CoffeeExport_Manager_Sprint2.pptx
+++ b/docs/sprint2/CoffeeExport_Manager_Sprint2.pptx
@@ -586,7 +586,7 @@
           <a:lstStyle/>
           <a:p>
             <a:r>
-              <a:t>Diapositiva de Juan Jurado. Módulos propuestos: Clientes y Pagos. Esta asignación es una propuesta tentativa basada en el reparto del backlog; el integrante debe completar los marcadores [COMPLETAR] con su trabajo real (commits, pull requests, tareas de Jira y aportes de documentación o pruebas) y ajustar el módulo si difiere. Tiempo: 1 minuto.</a:t>
+              <a:t>Diapositiva de Juan Jurado. Módulos propuestos: Clientes y Pagos. Esta es la responsabilidad planificada por módulo; el integrante debe completar los marcadores [COMPLETAR] con su trabajo real (commits, pull requests, tareas de Jira y aportes de documentación o pruebas) y ajustar el módulo si difiere. Tiempo: 1 minuto.</a:t>
             </a:r>
           </a:p>
         </p:txBody>
@@ -656,7 +656,7 @@
           <a:lstStyle/>
           <a:p>
             <a:r>
-              <a:t>Diapositiva de Nicoll López. Módulos propuestos: Productos y Documentación. Esta asignación es una propuesta tentativa basada en el reparto del backlog; el integrante debe completar los marcadores [COMPLETAR] con su trabajo real (commits, pull requests, tareas de Jira y aportes de documentación o pruebas) y ajustar el módulo si difiere. Tiempo: 1 minuto.</a:t>
+              <a:t>Diapositiva de Nicoll López. Módulos propuestos: Productos y Documentación. Esta es la responsabilidad planificada por módulo; el integrante debe completar los marcadores [COMPLETAR] con su trabajo real (commits, pull requests, tareas de Jira y aportes de documentación o pruebas) y ajustar el módulo si difiere. Tiempo: 1 minuto.</a:t>
             </a:r>
           </a:p>
         </p:txBody>
@@ -726,7 +726,7 @@
           <a:lstStyle/>
           <a:p>
             <a:r>
-              <a:t>Diapositiva de Alexander Rodríguez. Módulos propuestos: Inventario y Exportaciones. Esta asignación es una propuesta tentativa basada en el reparto del backlog; el integrante debe completar los marcadores [COMPLETAR] con su trabajo real (commits, pull requests, tareas de Jira y aportes de documentación o pruebas) y ajustar el módulo si difiere. Tiempo: 1 minuto.</a:t>
+              <a:t>Diapositiva de Alexander Rodríguez. Módulos propuestos: Inventario y Exportaciones. Esta es la responsabilidad planificada por módulo; el integrante debe completar los marcadores [COMPLETAR] con su trabajo real (commits, pull requests, tareas de Jira y aportes de documentación o pruebas) y ajustar el módulo si difiere. Tiempo: 1 minuto.</a:t>
             </a:r>
           </a:p>
         </p:txBody>
@@ -796,7 +796,7 @@
           <a:lstStyle/>
           <a:p>
             <a:r>
-              <a:t>Diapositiva de Mario Zambrano. Módulos propuestos: Reportes y pruebas de seguridad transversales. Esta asignación es una propuesta tentativa basada en el reparto del backlog; el integrante debe completar los marcadores [COMPLETAR] con su trabajo real (commits, pull requests, tareas de Jira y aportes de documentación o pruebas) y ajustar el módulo si difiere. Tiempo: 1 minuto.</a:t>
+              <a:t>Diapositiva de Mario Zambrano. Módulos propuestos: Reportes y pruebas de seguridad transversales. Esta es la responsabilidad planificada por módulo; el integrante debe completar los marcadores [COMPLETAR] con su trabajo real (commits, pull requests, tareas de Jira y aportes de documentación o pruebas) y ajustar el módulo si difiere. Tiempo: 1 minuto.</a:t>
             </a:r>
           </a:p>
         </p:txBody>
@@ -866,7 +866,7 @@
           <a:lstStyle/>
           <a:p>
             <a:r>
-              <a:t>GUION DE LA DEMO (aprox. 2 minutos). Aclarar antes de iniciar qué pantallas son funcionales y cuáles son mockups [COMPLETAR].</a:t>
+              <a:t>GUION DE LA DEMO (aprox. 2 minutos). Aclarar al inicio que se muestra el prototipo de frontend (carpeta frontend/ del repositorio): las 9 pantallas funcionan con datos de demostración guardados en el navegador; el backend Spring Boot y MySQL aún no está conectado. Cuentas de demo: botones en la pantalla de Login.</a:t>
             </a:r>
           </a:p>
           <a:p>
@@ -876,7 +876,7 @@
           </a:p>
           <a:p>
             <a:r>
-              <a:t>2) Dashboard: mostrar los KPIs (total de exportaciones, clientes activos, inventario en kg, ventas del mes en USD), la gráfica de exportaciones por país, productos más vendidos y las últimas exportaciones. Indicar si los datos son reales o de ejemplo [COMPLETAR].</a:t>
+              <a:t>2) Dashboard: mostrar los KPIs (total de exportaciones, clientes activos, inventario en kg, ventas del mes en USD), la gráfica de exportaciones por país, productos más vendidos y las últimas exportaciones. Los datos son de demostración.</a:t>
             </a:r>
           </a:p>
           <a:p>
@@ -886,7 +886,7 @@
           </a:p>
           <a:p>
             <a:r>
-              <a:t>4) Nueva Exportación: recorrer el asistente de 4 pasos: información básica; cliente y destino con puerto de salida, puerto de llegada y fecha de envío; productos y cantidades; documentos. Aclarar que este módulo se implementa en el Sprint 3 [COMPLETAR si es solo mockup].</a:t>
+              <a:t>4) Nueva Exportación: recorrer el asistente de 4 pasos: información básica; cliente y destino con puerto de salida, puerto de llegada y fecha de envío; productos y cantidades; documentos. En el prototipo el asistente ya funciona completo (valida stock y descuenta inventario); la persistencia real llegará con el backend en el Sprint 3.</a:t>
             </a:r>
           </a:p>
           <a:p>
@@ -1526,7 +1526,7 @@
           <a:lstStyle/>
           <a:p>
             <a:r>
-              <a:t>Diapositiva de Brayan Guerrero. Módulos propuestos: Usuarios / Autenticación y Dashboard. Esta asignación es una propuesta tentativa basada en el reparto del backlog; el integrante debe completar los marcadores [COMPLETAR] con su trabajo real (commits, pull requests, tareas de Jira y aportes de documentación o pruebas) y ajustar el módulo si difiere. Tiempo: 1 minuto.</a:t>
+              <a:t>Diapositiva de Brayan Guerrero. Módulos propuestos: Usuarios / Autenticación y Dashboard. Esta es la responsabilidad planificada por módulo; el integrante debe completar los marcadores [COMPLETAR] con su trabajo real (commits, pull requests, tareas de Jira y aportes de documentación o pruebas) y ajustar el módulo si difiere. Tiempo: 1 minuto.</a:t>
             </a:r>
           </a:p>
         </p:txBody>
@@ -4973,7 +4973,7 @@
                 </a:solidFill>
                 <a:latin typeface="Calibri"/>
               </a:rPr>
-              <a:t>Trabajo individual y contribuciones · asignación propuesta, por validar</a:t>
+              <a:t>Responsabilidades planificadas y contribuciones</a:t>
             </a:r>
           </a:p>
         </p:txBody>
@@ -5124,7 +5124,7 @@
                 </a:solidFill>
                 <a:latin typeface="Calibri"/>
               </a:rPr>
-              <a:t>Módulos / áreas (propuesta)</a:t>
+              <a:t>Módulos / áreas planificados</a:t>
             </a:r>
           </a:p>
         </p:txBody>
@@ -5323,7 +5323,7 @@
                 </a:solidFill>
                 <a:latin typeface="Calibri"/>
               </a:rPr>
-              <a:t>Casos asignados (propuesta): </a:t>
+              <a:t>Casos asignados: </a:t>
             </a:r>
             <a:r>
               <a:rPr sz="1300">
@@ -5848,7 +5848,7 @@
                 </a:solidFill>
                 <a:latin typeface="Calibri"/>
               </a:rPr>
-              <a:t>Trabajo individual y contribuciones · asignación propuesta, por validar</a:t>
+              <a:t>Responsabilidades planificadas y contribuciones</a:t>
             </a:r>
           </a:p>
         </p:txBody>
@@ -5999,7 +5999,7 @@
                 </a:solidFill>
                 <a:latin typeface="Calibri"/>
               </a:rPr>
-              <a:t>Módulos / áreas (propuesta)</a:t>
+              <a:t>Módulos / áreas planificados</a:t>
             </a:r>
           </a:p>
         </p:txBody>
@@ -6198,7 +6198,7 @@
                 </a:solidFill>
                 <a:latin typeface="Calibri"/>
               </a:rPr>
-              <a:t>Casos asignados (propuesta): </a:t>
+              <a:t>Casos asignados: </a:t>
             </a:r>
             <a:r>
               <a:rPr sz="1300">
@@ -6723,7 +6723,7 @@
                 </a:solidFill>
                 <a:latin typeface="Calibri"/>
               </a:rPr>
-              <a:t>Trabajo individual y contribuciones · asignación propuesta, por validar</a:t>
+              <a:t>Responsabilidades planificadas y contribuciones</a:t>
             </a:r>
           </a:p>
         </p:txBody>
@@ -6874,7 +6874,7 @@
                 </a:solidFill>
                 <a:latin typeface="Calibri"/>
               </a:rPr>
-              <a:t>Módulos / áreas (propuesta)</a:t>
+              <a:t>Módulos / áreas planificados</a:t>
             </a:r>
           </a:p>
         </p:txBody>
@@ -7073,7 +7073,7 @@
                 </a:solidFill>
                 <a:latin typeface="Calibri"/>
               </a:rPr>
-              <a:t>Casos asignados (propuesta): </a:t>
+              <a:t>Casos asignados: </a:t>
             </a:r>
             <a:r>
               <a:rPr sz="1300">
@@ -7598,7 +7598,7 @@
                 </a:solidFill>
                 <a:latin typeface="Calibri"/>
               </a:rPr>
-              <a:t>Trabajo individual y contribuciones · asignación propuesta, por validar</a:t>
+              <a:t>Responsabilidades planificadas y contribuciones</a:t>
             </a:r>
           </a:p>
         </p:txBody>
@@ -7749,7 +7749,7 @@
                 </a:solidFill>
                 <a:latin typeface="Calibri"/>
               </a:rPr>
-              <a:t>Módulos / áreas (propuesta)</a:t>
+              <a:t>Módulos / áreas planificados</a:t>
             </a:r>
           </a:p>
         </p:txBody>
@@ -7948,7 +7948,7 @@
                 </a:solidFill>
                 <a:latin typeface="Calibri"/>
               </a:rPr>
-              <a:t>Casos asignados (propuesta): </a:t>
+              <a:t>Casos asignados: </a:t>
             </a:r>
             <a:r>
               <a:rPr sz="1300">
@@ -10916,7 +10916,7 @@
                 </a:solidFill>
                 <a:latin typeface="Calibri"/>
               </a:rPr>
-              <a:t>Mockups: Login, Dashboard, Nueva Exportación, Reportes</a:t>
+              <a:t>Prototipo de frontend con las 9 pantallas</a:t>
             </a:r>
           </a:p>
           <a:p>
@@ -18545,7 +18545,7 @@
                 </a:solidFill>
                 <a:latin typeface="Calibri"/>
               </a:rPr>
-              <a:t>Trabajo individual y contribuciones · asignación propuesta, por validar</a:t>
+              <a:t>Responsabilidades planificadas y contribuciones</a:t>
             </a:r>
           </a:p>
         </p:txBody>
@@ -18696,7 +18696,7 @@
                 </a:solidFill>
                 <a:latin typeface="Calibri"/>
               </a:rPr>
-              <a:t>Módulos / áreas (propuesta)</a:t>
+              <a:t>Módulos / áreas planificados</a:t>
             </a:r>
           </a:p>
         </p:txBody>
@@ -18895,7 +18895,7 @@
                 </a:solidFill>
                 <a:latin typeface="Calibri"/>
               </a:rPr>
-              <a:t>Casos asignados (propuesta): </a:t>
+              <a:t>Casos asignados: </a:t>
             </a:r>
             <a:r>
               <a:rPr sz="1300">

--- a/docs/sprint2/CoffeeExport_Manager_Sprint2.pptx
+++ b/docs/sprint2/CoffeeExport_Manager_Sprint2.pptx
@@ -586,7 +586,7 @@
           <a:lstStyle/>
           <a:p>
             <a:r>
-              <a:t>Diapositiva de Juan Jurado. Módulos propuestos: Clientes y Pagos. Esta es la responsabilidad planificada por módulo; el integrante debe completar los marcadores [COMPLETAR] con su trabajo real (commits, pull requests, tareas de Jira y aportes de documentación o pruebas) y ajustar el módulo si difiere. Tiempo: 1 minuto.</a:t>
+              <a:t>Diapositiva de Juan Jurado. Módulos propuestos: Clientes y Pagos. Esta es la responsabilidad planificada por módulo; a la derecha están sus historias comprometidas para los Sprints 3 y 4 según el backlog. El integrante debe completar el único marcador [COMPLETAR] con su trabajo real (commits, pull requests, tareas de Jira y aportes de documentación o pruebas) y ajustar el módulo si difiere. Tiempo: 1 minuto.</a:t>
             </a:r>
           </a:p>
         </p:txBody>
@@ -656,7 +656,7 @@
           <a:lstStyle/>
           <a:p>
             <a:r>
-              <a:t>Diapositiva de Nicoll López. Módulos propuestos: Productos y Documentación. Esta es la responsabilidad planificada por módulo; el integrante debe completar los marcadores [COMPLETAR] con su trabajo real (commits, pull requests, tareas de Jira y aportes de documentación o pruebas) y ajustar el módulo si difiere. Tiempo: 1 minuto.</a:t>
+              <a:t>Diapositiva de Nicoll López. Módulos propuestos: Productos y Documentación. Esta es la responsabilidad planificada por módulo; a la derecha están sus historias comprometidas para los Sprints 3 y 4 según el backlog. El integrante debe completar el único marcador [COMPLETAR] con su trabajo real (commits, pull requests, tareas de Jira y aportes de documentación o pruebas) y ajustar el módulo si difiere. Tiempo: 1 minuto.</a:t>
             </a:r>
           </a:p>
         </p:txBody>
@@ -726,7 +726,7 @@
           <a:lstStyle/>
           <a:p>
             <a:r>
-              <a:t>Diapositiva de Alexander Rodríguez. Módulos propuestos: Inventario y Exportaciones. Esta es la responsabilidad planificada por módulo; el integrante debe completar los marcadores [COMPLETAR] con su trabajo real (commits, pull requests, tareas de Jira y aportes de documentación o pruebas) y ajustar el módulo si difiere. Tiempo: 1 minuto.</a:t>
+              <a:t>Diapositiva de Alexander Rodríguez. Módulos propuestos: Inventario y Exportaciones. Esta es la responsabilidad planificada por módulo; a la derecha están sus historias comprometidas para los Sprints 3 y 4 según el backlog. El integrante debe completar el único marcador [COMPLETAR] con su trabajo real (commits, pull requests, tareas de Jira y aportes de documentación o pruebas) y ajustar el módulo si difiere. Tiempo: 1 minuto.</a:t>
             </a:r>
           </a:p>
         </p:txBody>
@@ -796,7 +796,7 @@
           <a:lstStyle/>
           <a:p>
             <a:r>
-              <a:t>Diapositiva de Mario Zambrano. Módulos propuestos: Reportes y pruebas de seguridad transversales. Esta es la responsabilidad planificada por módulo; el integrante debe completar los marcadores [COMPLETAR] con su trabajo real (commits, pull requests, tareas de Jira y aportes de documentación o pruebas) y ajustar el módulo si difiere. Tiempo: 1 minuto.</a:t>
+              <a:t>Diapositiva de Mario Zambrano. Módulos propuestos: Reportes y pruebas de seguridad transversales. Esta es la responsabilidad planificada por módulo; a la derecha están sus historias comprometidas para los Sprints 3 y 4 según el backlog. El integrante debe completar el único marcador [COMPLETAR] con su trabajo real (commits, pull requests, tareas de Jira y aportes de documentación o pruebas) y ajustar el módulo si difiere. Tiempo: 1 minuto.</a:t>
             </a:r>
           </a:p>
         </p:txBody>
@@ -1526,7 +1526,7 @@
           <a:lstStyle/>
           <a:p>
             <a:r>
-              <a:t>Diapositiva de Brayan Guerrero. Módulos propuestos: Usuarios / Autenticación y Dashboard. Esta es la responsabilidad planificada por módulo; el integrante debe completar los marcadores [COMPLETAR] con su trabajo real (commits, pull requests, tareas de Jira y aportes de documentación o pruebas) y ajustar el módulo si difiere. Tiempo: 1 minuto.</a:t>
+              <a:t>Diapositiva de Brayan Guerrero. Módulos propuestos: Usuarios / Autenticación y Dashboard. Esta es la responsabilidad planificada por módulo; a la derecha están sus historias comprometidas para los Sprints 3 y 4 según el backlog. El integrante debe completar el único marcador [COMPLETAR] con su trabajo real (commits, pull requests, tareas de Jira y aportes de documentación o pruebas) y ajustar el módulo si difiere. Tiempo: 1 minuto.</a:t>
             </a:r>
           </a:p>
         </p:txBody>
@@ -5481,7 +5481,7 @@
                 </a:solidFill>
                 <a:latin typeface="Calibri"/>
               </a:rPr>
-              <a:t>Contribuciones</a:t>
+              <a:t>Compromisos y contribuciones</a:t>
             </a:r>
           </a:p>
         </p:txBody>
@@ -5510,11 +5510,11 @@
           <a:p>
             <a:pPr>
               <a:spcAft>
-                <a:spcPts val="1200"/>
+                <a:spcPts val="1000"/>
               </a:spcAft>
             </a:pPr>
             <a:r>
-              <a:rPr sz="1000">
+              <a:rPr sz="900">
                 <a:solidFill>
                   <a:srgbClr val="66BB6A"/>
                 </a:solidFill>
@@ -5523,32 +5523,32 @@
               <a:t>● </a:t>
             </a:r>
             <a:r>
-              <a:rPr b="1" sz="1500">
+              <a:rPr b="1" sz="1400">
                 <a:solidFill>
                   <a:srgbClr val="F3E9E2"/>
                 </a:solidFill>
                 <a:latin typeface="Calibri"/>
               </a:rPr>
-              <a:t>Trabajo realizado: </a:t>
-            </a:r>
-            <a:r>
-              <a:rPr sz="1500">
+              <a:t>HU-07: </a:t>
+            </a:r>
+            <a:r>
+              <a:rPr sz="1400">
                 <a:solidFill>
                   <a:srgbClr val="BCAAA4"/>
                 </a:solidFill>
                 <a:latin typeface="Calibri"/>
               </a:rPr>
-              <a:t>[COMPLETAR]</a:t>
+              <a:t>Búsqueda de clientes · 3 pts · Sprint 3</a:t>
             </a:r>
           </a:p>
           <a:p>
             <a:pPr>
               <a:spcAft>
-                <a:spcPts val="1200"/>
+                <a:spcPts val="1000"/>
               </a:spcAft>
             </a:pPr>
             <a:r>
-              <a:rPr sz="1000">
+              <a:rPr sz="900">
                 <a:solidFill>
                   <a:srgbClr val="66BB6A"/>
                 </a:solidFill>
@@ -5557,32 +5557,32 @@
               <a:t>● </a:t>
             </a:r>
             <a:r>
-              <a:rPr b="1" sz="1500">
+              <a:rPr b="1" sz="1400">
                 <a:solidFill>
                   <a:srgbClr val="F3E9E2"/>
                 </a:solidFill>
                 <a:latin typeface="Calibri"/>
               </a:rPr>
-              <a:t>Commits, ramas y pull requests: </a:t>
-            </a:r>
-            <a:r>
-              <a:rPr sz="1500">
+              <a:t>HU-16: </a:t>
+            </a:r>
+            <a:r>
+              <a:rPr sz="1400">
                 <a:solidFill>
                   <a:srgbClr val="BCAAA4"/>
                 </a:solidFill>
                 <a:latin typeface="Calibri"/>
               </a:rPr>
-              <a:t>[COMPLETAR]</a:t>
+              <a:t>Registrar pago internacional · 5 pts · Sprint 4</a:t>
             </a:r>
           </a:p>
           <a:p>
             <a:pPr>
               <a:spcAft>
-                <a:spcPts val="1200"/>
+                <a:spcPts val="1000"/>
               </a:spcAft>
             </a:pPr>
             <a:r>
-              <a:rPr sz="1000">
+              <a:rPr sz="900">
                 <a:solidFill>
                   <a:srgbClr val="66BB6A"/>
                 </a:solidFill>
@@ -5591,32 +5591,32 @@
               <a:t>● </a:t>
             </a:r>
             <a:r>
-              <a:rPr b="1" sz="1500">
+              <a:rPr b="1" sz="1400">
                 <a:solidFill>
                   <a:srgbClr val="F3E9E2"/>
                 </a:solidFill>
                 <a:latin typeface="Calibri"/>
               </a:rPr>
-              <a:t>Tareas en Jira: </a:t>
-            </a:r>
-            <a:r>
-              <a:rPr sz="1500">
+              <a:t>HU-17: </a:t>
+            </a:r>
+            <a:r>
+              <a:rPr sz="1400">
                 <a:solidFill>
                   <a:srgbClr val="BCAAA4"/>
                 </a:solidFill>
                 <a:latin typeface="Calibri"/>
               </a:rPr>
-              <a:t>[COMPLETAR]</a:t>
+              <a:t>Confirmación de pagos y saldo · 3 pts · Sprint 4</a:t>
             </a:r>
           </a:p>
           <a:p>
             <a:pPr>
               <a:spcAft>
-                <a:spcPts val="1200"/>
+                <a:spcPts val="1000"/>
               </a:spcAft>
             </a:pPr>
             <a:r>
-              <a:rPr sz="1000">
+              <a:rPr sz="900">
                 <a:solidFill>
                   <a:srgbClr val="66BB6A"/>
                 </a:solidFill>
@@ -5625,90 +5625,22 @@
               <a:t>● </a:t>
             </a:r>
             <a:r>
-              <a:rPr b="1" sz="1500">
+              <a:rPr b="1" sz="1400">
                 <a:solidFill>
                   <a:srgbClr val="F3E9E2"/>
                 </a:solidFill>
                 <a:latin typeface="Calibri"/>
               </a:rPr>
-              <a:t>Aporte a documentación: </a:t>
-            </a:r>
-            <a:r>
-              <a:rPr sz="1500">
+              <a:t>Aporte realizado hasta hoy: </a:t>
+            </a:r>
+            <a:r>
+              <a:rPr sz="1400">
                 <a:solidFill>
                   <a:srgbClr val="BCAAA4"/>
                 </a:solidFill>
                 <a:latin typeface="Calibri"/>
               </a:rPr>
-              <a:t>[COMPLETAR]</a:t>
-            </a:r>
-          </a:p>
-          <a:p>
-            <a:pPr>
-              <a:spcAft>
-                <a:spcPts val="1200"/>
-              </a:spcAft>
-            </a:pPr>
-            <a:r>
-              <a:rPr sz="1000">
-                <a:solidFill>
-                  <a:srgbClr val="66BB6A"/>
-                </a:solidFill>
-                <a:latin typeface="Calibri"/>
-              </a:rPr>
-              <a:t>● </a:t>
-            </a:r>
-            <a:r>
-              <a:rPr b="1" sz="1500">
-                <a:solidFill>
-                  <a:srgbClr val="F3E9E2"/>
-                </a:solidFill>
-                <a:latin typeface="Calibri"/>
-              </a:rPr>
-              <a:t>Aporte a pruebas: </a:t>
-            </a:r>
-            <a:r>
-              <a:rPr sz="1500">
-                <a:solidFill>
-                  <a:srgbClr val="BCAAA4"/>
-                </a:solidFill>
-                <a:latin typeface="Calibri"/>
-              </a:rPr>
-              <a:t>[COMPLETAR]</a:t>
-            </a:r>
-          </a:p>
-          <a:p>
-            <a:pPr>
-              <a:spcAft>
-                <a:spcPts val="1200"/>
-              </a:spcAft>
-            </a:pPr>
-            <a:r>
-              <a:rPr sz="1000">
-                <a:solidFill>
-                  <a:srgbClr val="66BB6A"/>
-                </a:solidFill>
-                <a:latin typeface="Calibri"/>
-              </a:rPr>
-              <a:t>● </a:t>
-            </a:r>
-            <a:r>
-              <a:rPr b="1" sz="1500">
-                <a:solidFill>
-                  <a:srgbClr val="F3E9E2"/>
-                </a:solidFill>
-                <a:latin typeface="Calibri"/>
-              </a:rPr>
-              <a:t>Dificultades y aprendizajes: </a:t>
-            </a:r>
-            <a:r>
-              <a:rPr sz="1500">
-                <a:solidFill>
-                  <a:srgbClr val="BCAAA4"/>
-                </a:solidFill>
-                <a:latin typeface="Calibri"/>
-              </a:rPr>
-              <a:t>[COMPLETAR]</a:t>
+              <a:t>[COMPLETAR con Jira/Git]</a:t>
             </a:r>
           </a:p>
         </p:txBody>
@@ -6356,7 +6288,7 @@
                 </a:solidFill>
                 <a:latin typeface="Calibri"/>
               </a:rPr>
-              <a:t>Contribuciones</a:t>
+              <a:t>Compromisos y contribuciones</a:t>
             </a:r>
           </a:p>
         </p:txBody>
@@ -6385,11 +6317,11 @@
           <a:p>
             <a:pPr>
               <a:spcAft>
-                <a:spcPts val="1200"/>
+                <a:spcPts val="1000"/>
               </a:spcAft>
             </a:pPr>
             <a:r>
-              <a:rPr sz="1000">
+              <a:rPr sz="900">
                 <a:solidFill>
                   <a:srgbClr val="66BB6A"/>
                 </a:solidFill>
@@ -6398,32 +6330,32 @@
               <a:t>● </a:t>
             </a:r>
             <a:r>
-              <a:rPr b="1" sz="1500">
+              <a:rPr b="1" sz="1400">
                 <a:solidFill>
                   <a:srgbClr val="F3E9E2"/>
                 </a:solidFill>
                 <a:latin typeface="Calibri"/>
               </a:rPr>
-              <a:t>Trabajo realizado: </a:t>
-            </a:r>
-            <a:r>
-              <a:rPr sz="1500">
+              <a:t>HU-08: </a:t>
+            </a:r>
+            <a:r>
+              <a:rPr sz="1400">
                 <a:solidFill>
                   <a:srgbClr val="BCAAA4"/>
                 </a:solidFill>
                 <a:latin typeface="Calibri"/>
               </a:rPr>
-              <a:t>[COMPLETAR]</a:t>
+              <a:t>Actualización y baja de productos · 3 pts · Sprint 3</a:t>
             </a:r>
           </a:p>
           <a:p>
             <a:pPr>
               <a:spcAft>
-                <a:spcPts val="1200"/>
+                <a:spcPts val="1000"/>
               </a:spcAft>
             </a:pPr>
             <a:r>
-              <a:rPr sz="1000">
+              <a:rPr sz="900">
                 <a:solidFill>
                   <a:srgbClr val="66BB6A"/>
                 </a:solidFill>
@@ -6432,32 +6364,32 @@
               <a:t>● </a:t>
             </a:r>
             <a:r>
-              <a:rPr b="1" sz="1500">
+              <a:rPr b="1" sz="1400">
                 <a:solidFill>
                   <a:srgbClr val="F3E9E2"/>
                 </a:solidFill>
                 <a:latin typeface="Calibri"/>
               </a:rPr>
-              <a:t>Commits, ramas y pull requests: </a:t>
-            </a:r>
-            <a:r>
-              <a:rPr sz="1500">
+              <a:t>HU-14: </a:t>
+            </a:r>
+            <a:r>
+              <a:rPr sz="1400">
                 <a:solidFill>
                   <a:srgbClr val="BCAAA4"/>
                 </a:solidFill>
                 <a:latin typeface="Calibri"/>
               </a:rPr>
-              <a:t>[COMPLETAR]</a:t>
+              <a:t>Adjuntar documentos · 5 pts · Sprint 3</a:t>
             </a:r>
           </a:p>
           <a:p>
             <a:pPr>
               <a:spcAft>
-                <a:spcPts val="1200"/>
+                <a:spcPts val="1000"/>
               </a:spcAft>
             </a:pPr>
             <a:r>
-              <a:rPr sz="1000">
+              <a:rPr sz="900">
                 <a:solidFill>
                   <a:srgbClr val="66BB6A"/>
                 </a:solidFill>
@@ -6466,32 +6398,32 @@
               <a:t>● </a:t>
             </a:r>
             <a:r>
-              <a:rPr b="1" sz="1500">
+              <a:rPr b="1" sz="1400">
                 <a:solidFill>
                   <a:srgbClr val="F3E9E2"/>
                 </a:solidFill>
                 <a:latin typeface="Calibri"/>
               </a:rPr>
-              <a:t>Tareas en Jira: </a:t>
-            </a:r>
-            <a:r>
-              <a:rPr sz="1500">
+              <a:t>HU-15: </a:t>
+            </a:r>
+            <a:r>
+              <a:rPr sz="1400">
                 <a:solidFill>
                   <a:srgbClr val="BCAAA4"/>
                 </a:solidFill>
                 <a:latin typeface="Calibri"/>
               </a:rPr>
-              <a:t>[COMPLETAR]</a:t>
+              <a:t>Verificación de documentos obligatorios · 3 pts · Sprint 3</a:t>
             </a:r>
           </a:p>
           <a:p>
             <a:pPr>
               <a:spcAft>
-                <a:spcPts val="1200"/>
+                <a:spcPts val="1000"/>
               </a:spcAft>
             </a:pPr>
             <a:r>
-              <a:rPr sz="1000">
+              <a:rPr sz="900">
                 <a:solidFill>
                   <a:srgbClr val="66BB6A"/>
                 </a:solidFill>
@@ -6500,90 +6432,22 @@
               <a:t>● </a:t>
             </a:r>
             <a:r>
-              <a:rPr b="1" sz="1500">
+              <a:rPr b="1" sz="1400">
                 <a:solidFill>
                   <a:srgbClr val="F3E9E2"/>
                 </a:solidFill>
                 <a:latin typeface="Calibri"/>
               </a:rPr>
-              <a:t>Aporte a documentación: </a:t>
-            </a:r>
-            <a:r>
-              <a:rPr sz="1500">
+              <a:t>Aporte realizado hasta hoy: </a:t>
+            </a:r>
+            <a:r>
+              <a:rPr sz="1400">
                 <a:solidFill>
                   <a:srgbClr val="BCAAA4"/>
                 </a:solidFill>
                 <a:latin typeface="Calibri"/>
               </a:rPr>
-              <a:t>[COMPLETAR]</a:t>
-            </a:r>
-          </a:p>
-          <a:p>
-            <a:pPr>
-              <a:spcAft>
-                <a:spcPts val="1200"/>
-              </a:spcAft>
-            </a:pPr>
-            <a:r>
-              <a:rPr sz="1000">
-                <a:solidFill>
-                  <a:srgbClr val="66BB6A"/>
-                </a:solidFill>
-                <a:latin typeface="Calibri"/>
-              </a:rPr>
-              <a:t>● </a:t>
-            </a:r>
-            <a:r>
-              <a:rPr b="1" sz="1500">
-                <a:solidFill>
-                  <a:srgbClr val="F3E9E2"/>
-                </a:solidFill>
-                <a:latin typeface="Calibri"/>
-              </a:rPr>
-              <a:t>Aporte a pruebas: </a:t>
-            </a:r>
-            <a:r>
-              <a:rPr sz="1500">
-                <a:solidFill>
-                  <a:srgbClr val="BCAAA4"/>
-                </a:solidFill>
-                <a:latin typeface="Calibri"/>
-              </a:rPr>
-              <a:t>[COMPLETAR]</a:t>
-            </a:r>
-          </a:p>
-          <a:p>
-            <a:pPr>
-              <a:spcAft>
-                <a:spcPts val="1200"/>
-              </a:spcAft>
-            </a:pPr>
-            <a:r>
-              <a:rPr sz="1000">
-                <a:solidFill>
-                  <a:srgbClr val="66BB6A"/>
-                </a:solidFill>
-                <a:latin typeface="Calibri"/>
-              </a:rPr>
-              <a:t>● </a:t>
-            </a:r>
-            <a:r>
-              <a:rPr b="1" sz="1500">
-                <a:solidFill>
-                  <a:srgbClr val="F3E9E2"/>
-                </a:solidFill>
-                <a:latin typeface="Calibri"/>
-              </a:rPr>
-              <a:t>Dificultades y aprendizajes: </a:t>
-            </a:r>
-            <a:r>
-              <a:rPr sz="1500">
-                <a:solidFill>
-                  <a:srgbClr val="BCAAA4"/>
-                </a:solidFill>
-                <a:latin typeface="Calibri"/>
-              </a:rPr>
-              <a:t>[COMPLETAR]</a:t>
+              <a:t>[COMPLETAR con Jira/Git]</a:t>
             </a:r>
           </a:p>
         </p:txBody>
@@ -7231,7 +7095,7 @@
                 </a:solidFill>
                 <a:latin typeface="Calibri"/>
               </a:rPr>
-              <a:t>Contribuciones</a:t>
+              <a:t>Compromisos y contribuciones</a:t>
             </a:r>
           </a:p>
         </p:txBody>
@@ -7260,11 +7124,11 @@
           <a:p>
             <a:pPr>
               <a:spcAft>
-                <a:spcPts val="1200"/>
+                <a:spcPts val="1000"/>
               </a:spcAft>
             </a:pPr>
             <a:r>
-              <a:rPr sz="1000">
+              <a:rPr sz="900">
                 <a:solidFill>
                   <a:srgbClr val="66BB6A"/>
                 </a:solidFill>
@@ -7273,32 +7137,32 @@
               <a:t>● </a:t>
             </a:r>
             <a:r>
-              <a:rPr b="1" sz="1500">
+              <a:rPr b="1" sz="1400">
                 <a:solidFill>
                   <a:srgbClr val="F3E9E2"/>
                 </a:solidFill>
                 <a:latin typeface="Calibri"/>
               </a:rPr>
-              <a:t>Trabajo realizado: </a:t>
-            </a:r>
-            <a:r>
-              <a:rPr sz="1500">
+              <a:t>HU-09: </a:t>
+            </a:r>
+            <a:r>
+              <a:rPr sz="1400">
                 <a:solidFill>
                   <a:srgbClr val="BCAAA4"/>
                 </a:solidFill>
                 <a:latin typeface="Calibri"/>
               </a:rPr>
-              <a:t>[COMPLETAR]</a:t>
+              <a:t>Alerta de stock mínimo · 3 pts · Sprint 3</a:t>
             </a:r>
           </a:p>
           <a:p>
             <a:pPr>
               <a:spcAft>
-                <a:spcPts val="1200"/>
+                <a:spcPts val="1000"/>
               </a:spcAft>
             </a:pPr>
             <a:r>
-              <a:rPr sz="1000">
+              <a:rPr sz="900">
                 <a:solidFill>
                   <a:srgbClr val="66BB6A"/>
                 </a:solidFill>
@@ -7307,32 +7171,32 @@
               <a:t>● </a:t>
             </a:r>
             <a:r>
-              <a:rPr b="1" sz="1500">
+              <a:rPr b="1" sz="1400">
                 <a:solidFill>
                   <a:srgbClr val="F3E9E2"/>
                 </a:solidFill>
                 <a:latin typeface="Calibri"/>
               </a:rPr>
-              <a:t>Commits, ramas y pull requests: </a:t>
-            </a:r>
-            <a:r>
-              <a:rPr sz="1500">
+              <a:t>HU-11: </a:t>
+            </a:r>
+            <a:r>
+              <a:rPr sz="1400">
                 <a:solidFill>
                   <a:srgbClr val="BCAAA4"/>
                 </a:solidFill>
                 <a:latin typeface="Calibri"/>
               </a:rPr>
-              <a:t>[COMPLETAR]</a:t>
+              <a:t>Crear exportación · 8 pts · Sprint 3</a:t>
             </a:r>
           </a:p>
           <a:p>
             <a:pPr>
               <a:spcAft>
-                <a:spcPts val="1200"/>
+                <a:spcPts val="1000"/>
               </a:spcAft>
             </a:pPr>
             <a:r>
-              <a:rPr sz="1000">
+              <a:rPr sz="900">
                 <a:solidFill>
                   <a:srgbClr val="66BB6A"/>
                 </a:solidFill>
@@ -7341,32 +7205,32 @@
               <a:t>● </a:t>
             </a:r>
             <a:r>
-              <a:rPr b="1" sz="1500">
+              <a:rPr b="1" sz="1400">
                 <a:solidFill>
                   <a:srgbClr val="F3E9E2"/>
                 </a:solidFill>
                 <a:latin typeface="Calibri"/>
               </a:rPr>
-              <a:t>Tareas en Jira: </a:t>
-            </a:r>
-            <a:r>
-              <a:rPr sz="1500">
+              <a:t>HU-12: </a:t>
+            </a:r>
+            <a:r>
+              <a:rPr sz="1400">
                 <a:solidFill>
                   <a:srgbClr val="BCAAA4"/>
                 </a:solidFill>
                 <a:latin typeface="Calibri"/>
               </a:rPr>
-              <a:t>[COMPLETAR]</a:t>
+              <a:t>Seguimiento del estado de la exportación · 5 pts · Sprint 3</a:t>
             </a:r>
           </a:p>
           <a:p>
             <a:pPr>
               <a:spcAft>
-                <a:spcPts val="1200"/>
+                <a:spcPts val="1000"/>
               </a:spcAft>
             </a:pPr>
             <a:r>
-              <a:rPr sz="1000">
+              <a:rPr sz="900">
                 <a:solidFill>
                   <a:srgbClr val="66BB6A"/>
                 </a:solidFill>
@@ -7375,32 +7239,32 @@
               <a:t>● </a:t>
             </a:r>
             <a:r>
-              <a:rPr b="1" sz="1500">
+              <a:rPr b="1" sz="1400">
                 <a:solidFill>
                   <a:srgbClr val="F3E9E2"/>
                 </a:solidFill>
                 <a:latin typeface="Calibri"/>
               </a:rPr>
-              <a:t>Aporte a documentación: </a:t>
-            </a:r>
-            <a:r>
-              <a:rPr sz="1500">
+              <a:t>HU-10: </a:t>
+            </a:r>
+            <a:r>
+              <a:rPr sz="1400">
                 <a:solidFill>
                   <a:srgbClr val="BCAAA4"/>
                 </a:solidFill>
                 <a:latin typeface="Calibri"/>
               </a:rPr>
-              <a:t>[COMPLETAR]</a:t>
+              <a:t>Historial de movimientos · 3 pts · Sprint 4</a:t>
             </a:r>
           </a:p>
           <a:p>
             <a:pPr>
               <a:spcAft>
-                <a:spcPts val="1200"/>
+                <a:spcPts val="1000"/>
               </a:spcAft>
             </a:pPr>
             <a:r>
-              <a:rPr sz="1000">
+              <a:rPr sz="900">
                 <a:solidFill>
                   <a:srgbClr val="66BB6A"/>
                 </a:solidFill>
@@ -7409,32 +7273,32 @@
               <a:t>● </a:t>
             </a:r>
             <a:r>
-              <a:rPr b="1" sz="1500">
+              <a:rPr b="1" sz="1400">
                 <a:solidFill>
                   <a:srgbClr val="F3E9E2"/>
                 </a:solidFill>
                 <a:latin typeface="Calibri"/>
               </a:rPr>
-              <a:t>Aporte a pruebas: </a:t>
-            </a:r>
-            <a:r>
-              <a:rPr sz="1500">
+              <a:t>HU-13: </a:t>
+            </a:r>
+            <a:r>
+              <a:rPr sz="1400">
                 <a:solidFill>
                   <a:srgbClr val="BCAAA4"/>
                 </a:solidFill>
                 <a:latin typeface="Calibri"/>
               </a:rPr>
-              <a:t>[COMPLETAR]</a:t>
+              <a:t>Listado de exportaciones · 3 pts · Sprint 4</a:t>
             </a:r>
           </a:p>
           <a:p>
             <a:pPr>
               <a:spcAft>
-                <a:spcPts val="1200"/>
+                <a:spcPts val="1000"/>
               </a:spcAft>
             </a:pPr>
             <a:r>
-              <a:rPr sz="1000">
+              <a:rPr sz="900">
                 <a:solidFill>
                   <a:srgbClr val="66BB6A"/>
                 </a:solidFill>
@@ -7443,22 +7307,22 @@
               <a:t>● </a:t>
             </a:r>
             <a:r>
-              <a:rPr b="1" sz="1500">
+              <a:rPr b="1" sz="1400">
                 <a:solidFill>
                   <a:srgbClr val="F3E9E2"/>
                 </a:solidFill>
                 <a:latin typeface="Calibri"/>
               </a:rPr>
-              <a:t>Dificultades y aprendizajes: </a:t>
-            </a:r>
-            <a:r>
-              <a:rPr sz="1500">
+              <a:t>Aporte realizado hasta hoy: </a:t>
+            </a:r>
+            <a:r>
+              <a:rPr sz="1400">
                 <a:solidFill>
                   <a:srgbClr val="BCAAA4"/>
                 </a:solidFill>
                 <a:latin typeface="Calibri"/>
               </a:rPr>
-              <a:t>[COMPLETAR]</a:t>
+              <a:t>[COMPLETAR con Jira/Git]</a:t>
             </a:r>
           </a:p>
         </p:txBody>
@@ -8106,7 +7970,7 @@
                 </a:solidFill>
                 <a:latin typeface="Calibri"/>
               </a:rPr>
-              <a:t>Contribuciones</a:t>
+              <a:t>Compromisos y contribuciones</a:t>
             </a:r>
           </a:p>
         </p:txBody>
@@ -8135,11 +7999,11 @@
           <a:p>
             <a:pPr>
               <a:spcAft>
-                <a:spcPts val="1200"/>
+                <a:spcPts val="1000"/>
               </a:spcAft>
             </a:pPr>
             <a:r>
-              <a:rPr sz="1000">
+              <a:rPr sz="900">
                 <a:solidFill>
                   <a:srgbClr val="66BB6A"/>
                 </a:solidFill>
@@ -8148,32 +8012,32 @@
               <a:t>● </a:t>
             </a:r>
             <a:r>
-              <a:rPr b="1" sz="1500">
+              <a:rPr b="1" sz="1400">
                 <a:solidFill>
                   <a:srgbClr val="F3E9E2"/>
                 </a:solidFill>
                 <a:latin typeface="Calibri"/>
               </a:rPr>
-              <a:t>Trabajo realizado: </a:t>
-            </a:r>
-            <a:r>
-              <a:rPr sz="1500">
+              <a:t>HU-18: </a:t>
+            </a:r>
+            <a:r>
+              <a:rPr sz="1400">
                 <a:solidFill>
                   <a:srgbClr val="BCAAA4"/>
                 </a:solidFill>
                 <a:latin typeface="Calibri"/>
               </a:rPr>
-              <a:t>[COMPLETAR]</a:t>
+              <a:t>Reporte de exportaciones por fechas · 5 pts · Sprint 4</a:t>
             </a:r>
           </a:p>
           <a:p>
             <a:pPr>
               <a:spcAft>
-                <a:spcPts val="1200"/>
+                <a:spcPts val="1000"/>
               </a:spcAft>
             </a:pPr>
             <a:r>
-              <a:rPr sz="1000">
+              <a:rPr sz="900">
                 <a:solidFill>
                   <a:srgbClr val="66BB6A"/>
                 </a:solidFill>
@@ -8182,32 +8046,32 @@
               <a:t>● </a:t>
             </a:r>
             <a:r>
-              <a:rPr b="1" sz="1500">
+              <a:rPr b="1" sz="1400">
                 <a:solidFill>
                   <a:srgbClr val="F3E9E2"/>
                 </a:solidFill>
                 <a:latin typeface="Calibri"/>
               </a:rPr>
-              <a:t>Commits, ramas y pull requests: </a:t>
-            </a:r>
-            <a:r>
-              <a:rPr sz="1500">
+              <a:t>HU-19: </a:t>
+            </a:r>
+            <a:r>
+              <a:rPr sz="1400">
                 <a:solidFill>
                   <a:srgbClr val="BCAAA4"/>
                 </a:solidFill>
                 <a:latin typeface="Calibri"/>
               </a:rPr>
-              <a:t>[COMPLETAR]</a:t>
+              <a:t>Exportar reportes a PDF y Excel · 3 pts · Sprint 4</a:t>
             </a:r>
           </a:p>
           <a:p>
             <a:pPr>
               <a:spcAft>
-                <a:spcPts val="1200"/>
+                <a:spcPts val="1000"/>
               </a:spcAft>
             </a:pPr>
             <a:r>
-              <a:rPr sz="1000">
+              <a:rPr sz="900">
                 <a:solidFill>
                   <a:srgbClr val="66BB6A"/>
                 </a:solidFill>
@@ -8216,124 +8080,22 @@
               <a:t>● </a:t>
             </a:r>
             <a:r>
-              <a:rPr b="1" sz="1500">
+              <a:rPr b="1" sz="1400">
                 <a:solidFill>
                   <a:srgbClr val="F3E9E2"/>
                 </a:solidFill>
                 <a:latin typeface="Calibri"/>
               </a:rPr>
-              <a:t>Tareas en Jira: </a:t>
-            </a:r>
-            <a:r>
-              <a:rPr sz="1500">
+              <a:t>Aporte realizado hasta hoy: </a:t>
+            </a:r>
+            <a:r>
+              <a:rPr sz="1400">
                 <a:solidFill>
                   <a:srgbClr val="BCAAA4"/>
                 </a:solidFill>
                 <a:latin typeface="Calibri"/>
               </a:rPr>
-              <a:t>[COMPLETAR]</a:t>
-            </a:r>
-          </a:p>
-          <a:p>
-            <a:pPr>
-              <a:spcAft>
-                <a:spcPts val="1200"/>
-              </a:spcAft>
-            </a:pPr>
-            <a:r>
-              <a:rPr sz="1000">
-                <a:solidFill>
-                  <a:srgbClr val="66BB6A"/>
-                </a:solidFill>
-                <a:latin typeface="Calibri"/>
-              </a:rPr>
-              <a:t>● </a:t>
-            </a:r>
-            <a:r>
-              <a:rPr b="1" sz="1500">
-                <a:solidFill>
-                  <a:srgbClr val="F3E9E2"/>
-                </a:solidFill>
-                <a:latin typeface="Calibri"/>
-              </a:rPr>
-              <a:t>Aporte a documentación: </a:t>
-            </a:r>
-            <a:r>
-              <a:rPr sz="1500">
-                <a:solidFill>
-                  <a:srgbClr val="BCAAA4"/>
-                </a:solidFill>
-                <a:latin typeface="Calibri"/>
-              </a:rPr>
-              <a:t>[COMPLETAR]</a:t>
-            </a:r>
-          </a:p>
-          <a:p>
-            <a:pPr>
-              <a:spcAft>
-                <a:spcPts val="1200"/>
-              </a:spcAft>
-            </a:pPr>
-            <a:r>
-              <a:rPr sz="1000">
-                <a:solidFill>
-                  <a:srgbClr val="66BB6A"/>
-                </a:solidFill>
-                <a:latin typeface="Calibri"/>
-              </a:rPr>
-              <a:t>● </a:t>
-            </a:r>
-            <a:r>
-              <a:rPr b="1" sz="1500">
-                <a:solidFill>
-                  <a:srgbClr val="F3E9E2"/>
-                </a:solidFill>
-                <a:latin typeface="Calibri"/>
-              </a:rPr>
-              <a:t>Aporte a pruebas: </a:t>
-            </a:r>
-            <a:r>
-              <a:rPr sz="1500">
-                <a:solidFill>
-                  <a:srgbClr val="BCAAA4"/>
-                </a:solidFill>
-                <a:latin typeface="Calibri"/>
-              </a:rPr>
-              <a:t>[COMPLETAR]</a:t>
-            </a:r>
-          </a:p>
-          <a:p>
-            <a:pPr>
-              <a:spcAft>
-                <a:spcPts val="1200"/>
-              </a:spcAft>
-            </a:pPr>
-            <a:r>
-              <a:rPr sz="1000">
-                <a:solidFill>
-                  <a:srgbClr val="66BB6A"/>
-                </a:solidFill>
-                <a:latin typeface="Calibri"/>
-              </a:rPr>
-              <a:t>● </a:t>
-            </a:r>
-            <a:r>
-              <a:rPr b="1" sz="1500">
-                <a:solidFill>
-                  <a:srgbClr val="F3E9E2"/>
-                </a:solidFill>
-                <a:latin typeface="Calibri"/>
-              </a:rPr>
-              <a:t>Dificultades y aprendizajes: </a:t>
-            </a:r>
-            <a:r>
-              <a:rPr sz="1500">
-                <a:solidFill>
-                  <a:srgbClr val="BCAAA4"/>
-                </a:solidFill>
-                <a:latin typeface="Calibri"/>
-              </a:rPr>
-              <a:t>[COMPLETAR]</a:t>
+              <a:t>[COMPLETAR con Jira/Git]</a:t>
             </a:r>
           </a:p>
         </p:txBody>
@@ -19053,7 +18815,7 @@
                 </a:solidFill>
                 <a:latin typeface="Calibri"/>
               </a:rPr>
-              <a:t>Contribuciones</a:t>
+              <a:t>Compromisos y contribuciones</a:t>
             </a:r>
           </a:p>
         </p:txBody>
@@ -19082,11 +18844,11 @@
           <a:p>
             <a:pPr>
               <a:spcAft>
-                <a:spcPts val="1200"/>
+                <a:spcPts val="1000"/>
               </a:spcAft>
             </a:pPr>
             <a:r>
-              <a:rPr sz="1000">
+              <a:rPr sz="900">
                 <a:solidFill>
                   <a:srgbClr val="66BB6A"/>
                 </a:solidFill>
@@ -19095,32 +18857,32 @@
               <a:t>● </a:t>
             </a:r>
             <a:r>
-              <a:rPr b="1" sz="1500">
+              <a:rPr b="1" sz="1400">
                 <a:solidFill>
                   <a:srgbClr val="F3E9E2"/>
                 </a:solidFill>
                 <a:latin typeface="Calibri"/>
               </a:rPr>
-              <a:t>Trabajo realizado: </a:t>
-            </a:r>
-            <a:r>
-              <a:rPr sz="1500">
+              <a:t>HU-05: </a:t>
+            </a:r>
+            <a:r>
+              <a:rPr sz="1400">
                 <a:solidFill>
                   <a:srgbClr val="BCAAA4"/>
                 </a:solidFill>
                 <a:latin typeface="Calibri"/>
               </a:rPr>
-              <a:t>[COMPLETAR]</a:t>
+              <a:t>Gestión de usuarios y roles · 5 pts · Sprint 3</a:t>
             </a:r>
           </a:p>
           <a:p>
             <a:pPr>
               <a:spcAft>
-                <a:spcPts val="1200"/>
+                <a:spcPts val="1000"/>
               </a:spcAft>
             </a:pPr>
             <a:r>
-              <a:rPr sz="1000">
+              <a:rPr sz="900">
                 <a:solidFill>
                   <a:srgbClr val="66BB6A"/>
                 </a:solidFill>
@@ -19129,32 +18891,32 @@
               <a:t>● </a:t>
             </a:r>
             <a:r>
-              <a:rPr b="1" sz="1500">
+              <a:rPr b="1" sz="1400">
                 <a:solidFill>
                   <a:srgbClr val="F3E9E2"/>
                 </a:solidFill>
                 <a:latin typeface="Calibri"/>
               </a:rPr>
-              <a:t>Commits, ramas y pull requests: </a:t>
-            </a:r>
-            <a:r>
-              <a:rPr sz="1500">
+              <a:t>HU-06: </a:t>
+            </a:r>
+            <a:r>
+              <a:rPr sz="1400">
                 <a:solidFill>
                   <a:srgbClr val="BCAAA4"/>
                 </a:solidFill>
                 <a:latin typeface="Calibri"/>
               </a:rPr>
-              <a:t>[COMPLETAR]</a:t>
+              <a:t>Control de acceso por rol · 3 pts · Sprint 3</a:t>
             </a:r>
           </a:p>
           <a:p>
             <a:pPr>
               <a:spcAft>
-                <a:spcPts val="1200"/>
+                <a:spcPts val="1000"/>
               </a:spcAft>
             </a:pPr>
             <a:r>
-              <a:rPr sz="1000">
+              <a:rPr sz="900">
                 <a:solidFill>
                   <a:srgbClr val="66BB6A"/>
                 </a:solidFill>
@@ -19163,32 +18925,32 @@
               <a:t>● </a:t>
             </a:r>
             <a:r>
-              <a:rPr b="1" sz="1500">
+              <a:rPr b="1" sz="1400">
                 <a:solidFill>
                   <a:srgbClr val="F3E9E2"/>
                 </a:solidFill>
                 <a:latin typeface="Calibri"/>
               </a:rPr>
-              <a:t>Tareas en Jira: </a:t>
-            </a:r>
-            <a:r>
-              <a:rPr sz="1500">
+              <a:t>HU-20: </a:t>
+            </a:r>
+            <a:r>
+              <a:rPr sz="1400">
                 <a:solidFill>
                   <a:srgbClr val="BCAAA4"/>
                 </a:solidFill>
                 <a:latin typeface="Calibri"/>
               </a:rPr>
-              <a:t>[COMPLETAR]</a:t>
+              <a:t>KPIs del dashboard · 5 pts · Sprint 4</a:t>
             </a:r>
           </a:p>
           <a:p>
             <a:pPr>
               <a:spcAft>
-                <a:spcPts val="1200"/>
+                <a:spcPts val="1000"/>
               </a:spcAft>
             </a:pPr>
             <a:r>
-              <a:rPr sz="1000">
+              <a:rPr sz="900">
                 <a:solidFill>
                   <a:srgbClr val="66BB6A"/>
                 </a:solidFill>
@@ -19197,32 +18959,32 @@
               <a:t>● </a:t>
             </a:r>
             <a:r>
-              <a:rPr b="1" sz="1500">
+              <a:rPr b="1" sz="1400">
                 <a:solidFill>
                   <a:srgbClr val="F3E9E2"/>
                 </a:solidFill>
                 <a:latin typeface="Calibri"/>
               </a:rPr>
-              <a:t>Aporte a documentación: </a:t>
-            </a:r>
-            <a:r>
-              <a:rPr sz="1500">
+              <a:t>HU-21: </a:t>
+            </a:r>
+            <a:r>
+              <a:rPr sz="1400">
                 <a:solidFill>
                   <a:srgbClr val="BCAAA4"/>
                 </a:solidFill>
                 <a:latin typeface="Calibri"/>
               </a:rPr>
-              <a:t>[COMPLETAR]</a:t>
+              <a:t>Gráficas y últimas exportaciones · 5 pts · Sprint 4</a:t>
             </a:r>
           </a:p>
           <a:p>
             <a:pPr>
               <a:spcAft>
-                <a:spcPts val="1200"/>
+                <a:spcPts val="1000"/>
               </a:spcAft>
             </a:pPr>
             <a:r>
-              <a:rPr sz="1000">
+              <a:rPr sz="900">
                 <a:solidFill>
                   <a:srgbClr val="66BB6A"/>
                 </a:solidFill>
@@ -19231,56 +18993,22 @@
               <a:t>● </a:t>
             </a:r>
             <a:r>
-              <a:rPr b="1" sz="1500">
+              <a:rPr b="1" sz="1400">
                 <a:solidFill>
                   <a:srgbClr val="F3E9E2"/>
                 </a:solidFill>
                 <a:latin typeface="Calibri"/>
               </a:rPr>
-              <a:t>Aporte a pruebas: </a:t>
-            </a:r>
-            <a:r>
-              <a:rPr sz="1500">
+              <a:t>Aporte realizado hasta hoy: </a:t>
+            </a:r>
+            <a:r>
+              <a:rPr sz="1400">
                 <a:solidFill>
                   <a:srgbClr val="BCAAA4"/>
                 </a:solidFill>
                 <a:latin typeface="Calibri"/>
               </a:rPr>
-              <a:t>[COMPLETAR]</a:t>
-            </a:r>
-          </a:p>
-          <a:p>
-            <a:pPr>
-              <a:spcAft>
-                <a:spcPts val="1200"/>
-              </a:spcAft>
-            </a:pPr>
-            <a:r>
-              <a:rPr sz="1000">
-                <a:solidFill>
-                  <a:srgbClr val="66BB6A"/>
-                </a:solidFill>
-                <a:latin typeface="Calibri"/>
-              </a:rPr>
-              <a:t>● </a:t>
-            </a:r>
-            <a:r>
-              <a:rPr b="1" sz="1500">
-                <a:solidFill>
-                  <a:srgbClr val="F3E9E2"/>
-                </a:solidFill>
-                <a:latin typeface="Calibri"/>
-              </a:rPr>
-              <a:t>Dificultades y aprendizajes: </a:t>
-            </a:r>
-            <a:r>
-              <a:rPr sz="1500">
-                <a:solidFill>
-                  <a:srgbClr val="BCAAA4"/>
-                </a:solidFill>
-                <a:latin typeface="Calibri"/>
-              </a:rPr>
-              <a:t>[COMPLETAR]</a:t>
+              <a:t>[COMPLETAR con Jira/Git]</a:t>
             </a:r>
           </a:p>
         </p:txBody>

--- a/docs/sprint2/CoffeeExport_Manager_Sprint2.pptx
+++ b/docs/sprint2/CoffeeExport_Manager_Sprint2.pptx
@@ -15,11 +15,6 @@
     <p:sldId id="263" r:id="rId15"/>
     <p:sldId id="264" r:id="rId16"/>
     <p:sldId id="265" r:id="rId17"/>
-    <p:sldId id="266" r:id="rId18"/>
-    <p:sldId id="267" r:id="rId19"/>
-    <p:sldId id="268" r:id="rId20"/>
-    <p:sldId id="269" r:id="rId21"/>
-    <p:sldId id="270" r:id="rId22"/>
   </p:sldIdLst>
   <p:sldSz cx="12191695" cy="6858000" type="screen4x3"/>
   <p:notesSz cx="6858000" cy="9144000"/>
@@ -586,386 +581,6 @@
           <a:lstStyle/>
           <a:p>
             <a:r>
-              <a:t>Diapositiva de Juan Jurado. Módulos propuestos: Clientes y Pagos. Esta es la responsabilidad planificada por módulo; a la derecha están sus historias comprometidas para los Sprints 3 y 4 según el backlog. El integrante debe completar el único marcador [COMPLETAR] con su trabajo real (commits, pull requests, tareas de Jira y aportes de documentación o pruebas) y ajustar el módulo si difiere. Tiempo: 1 minuto.</a:t>
-            </a:r>
-          </a:p>
-        </p:txBody>
-      </p:sp>
-      <p:sp>
-        <p:nvSpPr>
-          <p:cNvPr id="4" name="Slide Number Placeholder 3"/>
-          <p:cNvSpPr>
-            <a:spLocks noGrp="1"/>
-          </p:cNvSpPr>
-          <p:nvPr>
-            <p:ph type="sldNum" idx="5" sz="quarter"/>
-          </p:nvPr>
-        </p:nvSpPr>
-        <p:spPr/>
-      </p:sp>
-    </p:spTree>
-  </p:cSld>
-  <p:clrMapOvr>
-    <a:masterClrMapping/>
-  </p:clrMapOvr>
-</p:notes>
-</file>
-
-<file path=ppt/notesSlides/notesSlide11.xml><?xml version="1.0" encoding="utf-8"?>
-<p:notes xmlns:a="http://schemas.openxmlformats.org/drawingml/2006/main" xmlns:p="http://schemas.openxmlformats.org/presentationml/2006/main" xmlns:r="http://schemas.openxmlformats.org/officeDocument/2006/relationships">
-  <p:cSld>
-    <p:spTree>
-      <p:nvGrpSpPr>
-        <p:cNvPr id="1" name=""/>
-        <p:cNvGrpSpPr/>
-        <p:nvPr/>
-      </p:nvGrpSpPr>
-      <p:grpSpPr>
-        <a:xfrm>
-          <a:off x="0" y="0"/>
-          <a:ext cx="0" cy="0"/>
-          <a:chOff x="0" y="0"/>
-          <a:chExt cx="0" cy="0"/>
-        </a:xfrm>
-      </p:grpSpPr>
-      <p:sp>
-        <p:nvSpPr>
-          <p:cNvPr id="2" name="Slide Image Placeholder 1"/>
-          <p:cNvSpPr>
-            <a:spLocks noGrp="1"/>
-          </p:cNvSpPr>
-          <p:nvPr>
-            <p:ph type="sldImg" idx="2"/>
-          </p:nvPr>
-        </p:nvSpPr>
-        <p:spPr/>
-      </p:sp>
-      <p:sp>
-        <p:nvSpPr>
-          <p:cNvPr id="3" name="Notes Placeholder 2"/>
-          <p:cNvSpPr>
-            <a:spLocks noGrp="1"/>
-          </p:cNvSpPr>
-          <p:nvPr>
-            <p:ph type="body" idx="3" sz="quarter"/>
-          </p:nvPr>
-        </p:nvSpPr>
-        <p:spPr/>
-        <p:txBody>
-          <a:bodyPr/>
-          <a:lstStyle/>
-          <a:p>
-            <a:r>
-              <a:t>Diapositiva de Nicoll López. Módulos propuestos: Productos y Documentación. Esta es la responsabilidad planificada por módulo; a la derecha están sus historias comprometidas para los Sprints 3 y 4 según el backlog. El integrante debe completar el único marcador [COMPLETAR] con su trabajo real (commits, pull requests, tareas de Jira y aportes de documentación o pruebas) y ajustar el módulo si difiere. Tiempo: 1 minuto.</a:t>
-            </a:r>
-          </a:p>
-        </p:txBody>
-      </p:sp>
-      <p:sp>
-        <p:nvSpPr>
-          <p:cNvPr id="4" name="Slide Number Placeholder 3"/>
-          <p:cNvSpPr>
-            <a:spLocks noGrp="1"/>
-          </p:cNvSpPr>
-          <p:nvPr>
-            <p:ph type="sldNum" idx="5" sz="quarter"/>
-          </p:nvPr>
-        </p:nvSpPr>
-        <p:spPr/>
-      </p:sp>
-    </p:spTree>
-  </p:cSld>
-  <p:clrMapOvr>
-    <a:masterClrMapping/>
-  </p:clrMapOvr>
-</p:notes>
-</file>
-
-<file path=ppt/notesSlides/notesSlide12.xml><?xml version="1.0" encoding="utf-8"?>
-<p:notes xmlns:a="http://schemas.openxmlformats.org/drawingml/2006/main" xmlns:p="http://schemas.openxmlformats.org/presentationml/2006/main" xmlns:r="http://schemas.openxmlformats.org/officeDocument/2006/relationships">
-  <p:cSld>
-    <p:spTree>
-      <p:nvGrpSpPr>
-        <p:cNvPr id="1" name=""/>
-        <p:cNvGrpSpPr/>
-        <p:nvPr/>
-      </p:nvGrpSpPr>
-      <p:grpSpPr>
-        <a:xfrm>
-          <a:off x="0" y="0"/>
-          <a:ext cx="0" cy="0"/>
-          <a:chOff x="0" y="0"/>
-          <a:chExt cx="0" cy="0"/>
-        </a:xfrm>
-      </p:grpSpPr>
-      <p:sp>
-        <p:nvSpPr>
-          <p:cNvPr id="2" name="Slide Image Placeholder 1"/>
-          <p:cNvSpPr>
-            <a:spLocks noGrp="1"/>
-          </p:cNvSpPr>
-          <p:nvPr>
-            <p:ph type="sldImg" idx="2"/>
-          </p:nvPr>
-        </p:nvSpPr>
-        <p:spPr/>
-      </p:sp>
-      <p:sp>
-        <p:nvSpPr>
-          <p:cNvPr id="3" name="Notes Placeholder 2"/>
-          <p:cNvSpPr>
-            <a:spLocks noGrp="1"/>
-          </p:cNvSpPr>
-          <p:nvPr>
-            <p:ph type="body" idx="3" sz="quarter"/>
-          </p:nvPr>
-        </p:nvSpPr>
-        <p:spPr/>
-        <p:txBody>
-          <a:bodyPr/>
-          <a:lstStyle/>
-          <a:p>
-            <a:r>
-              <a:t>Diapositiva de Alexander Rodríguez. Módulos propuestos: Inventario y Exportaciones. Esta es la responsabilidad planificada por módulo; a la derecha están sus historias comprometidas para los Sprints 3 y 4 según el backlog. El integrante debe completar el único marcador [COMPLETAR] con su trabajo real (commits, pull requests, tareas de Jira y aportes de documentación o pruebas) y ajustar el módulo si difiere. Tiempo: 1 minuto.</a:t>
-            </a:r>
-          </a:p>
-        </p:txBody>
-      </p:sp>
-      <p:sp>
-        <p:nvSpPr>
-          <p:cNvPr id="4" name="Slide Number Placeholder 3"/>
-          <p:cNvSpPr>
-            <a:spLocks noGrp="1"/>
-          </p:cNvSpPr>
-          <p:nvPr>
-            <p:ph type="sldNum" idx="5" sz="quarter"/>
-          </p:nvPr>
-        </p:nvSpPr>
-        <p:spPr/>
-      </p:sp>
-    </p:spTree>
-  </p:cSld>
-  <p:clrMapOvr>
-    <a:masterClrMapping/>
-  </p:clrMapOvr>
-</p:notes>
-</file>
-
-<file path=ppt/notesSlides/notesSlide13.xml><?xml version="1.0" encoding="utf-8"?>
-<p:notes xmlns:a="http://schemas.openxmlformats.org/drawingml/2006/main" xmlns:p="http://schemas.openxmlformats.org/presentationml/2006/main" xmlns:r="http://schemas.openxmlformats.org/officeDocument/2006/relationships">
-  <p:cSld>
-    <p:spTree>
-      <p:nvGrpSpPr>
-        <p:cNvPr id="1" name=""/>
-        <p:cNvGrpSpPr/>
-        <p:nvPr/>
-      </p:nvGrpSpPr>
-      <p:grpSpPr>
-        <a:xfrm>
-          <a:off x="0" y="0"/>
-          <a:ext cx="0" cy="0"/>
-          <a:chOff x="0" y="0"/>
-          <a:chExt cx="0" cy="0"/>
-        </a:xfrm>
-      </p:grpSpPr>
-      <p:sp>
-        <p:nvSpPr>
-          <p:cNvPr id="2" name="Slide Image Placeholder 1"/>
-          <p:cNvSpPr>
-            <a:spLocks noGrp="1"/>
-          </p:cNvSpPr>
-          <p:nvPr>
-            <p:ph type="sldImg" idx="2"/>
-          </p:nvPr>
-        </p:nvSpPr>
-        <p:spPr/>
-      </p:sp>
-      <p:sp>
-        <p:nvSpPr>
-          <p:cNvPr id="3" name="Notes Placeholder 2"/>
-          <p:cNvSpPr>
-            <a:spLocks noGrp="1"/>
-          </p:cNvSpPr>
-          <p:nvPr>
-            <p:ph type="body" idx="3" sz="quarter"/>
-          </p:nvPr>
-        </p:nvSpPr>
-        <p:spPr/>
-        <p:txBody>
-          <a:bodyPr/>
-          <a:lstStyle/>
-          <a:p>
-            <a:r>
-              <a:t>Diapositiva de Mario Zambrano. Módulos propuestos: Reportes y pruebas de seguridad transversales. Esta es la responsabilidad planificada por módulo; a la derecha están sus historias comprometidas para los Sprints 3 y 4 según el backlog. El integrante debe completar el único marcador [COMPLETAR] con su trabajo real (commits, pull requests, tareas de Jira y aportes de documentación o pruebas) y ajustar el módulo si difiere. Tiempo: 1 minuto.</a:t>
-            </a:r>
-          </a:p>
-        </p:txBody>
-      </p:sp>
-      <p:sp>
-        <p:nvSpPr>
-          <p:cNvPr id="4" name="Slide Number Placeholder 3"/>
-          <p:cNvSpPr>
-            <a:spLocks noGrp="1"/>
-          </p:cNvSpPr>
-          <p:nvPr>
-            <p:ph type="sldNum" idx="5" sz="quarter"/>
-          </p:nvPr>
-        </p:nvSpPr>
-        <p:spPr/>
-      </p:sp>
-    </p:spTree>
-  </p:cSld>
-  <p:clrMapOvr>
-    <a:masterClrMapping/>
-  </p:clrMapOvr>
-</p:notes>
-</file>
-
-<file path=ppt/notesSlides/notesSlide14.xml><?xml version="1.0" encoding="utf-8"?>
-<p:notes xmlns:a="http://schemas.openxmlformats.org/drawingml/2006/main" xmlns:p="http://schemas.openxmlformats.org/presentationml/2006/main" xmlns:r="http://schemas.openxmlformats.org/officeDocument/2006/relationships">
-  <p:cSld>
-    <p:spTree>
-      <p:nvGrpSpPr>
-        <p:cNvPr id="1" name=""/>
-        <p:cNvGrpSpPr/>
-        <p:nvPr/>
-      </p:nvGrpSpPr>
-      <p:grpSpPr>
-        <a:xfrm>
-          <a:off x="0" y="0"/>
-          <a:ext cx="0" cy="0"/>
-          <a:chOff x="0" y="0"/>
-          <a:chExt cx="0" cy="0"/>
-        </a:xfrm>
-      </p:grpSpPr>
-      <p:sp>
-        <p:nvSpPr>
-          <p:cNvPr id="2" name="Slide Image Placeholder 1"/>
-          <p:cNvSpPr>
-            <a:spLocks noGrp="1"/>
-          </p:cNvSpPr>
-          <p:nvPr>
-            <p:ph type="sldImg" idx="2"/>
-          </p:nvPr>
-        </p:nvSpPr>
-        <p:spPr/>
-      </p:sp>
-      <p:sp>
-        <p:nvSpPr>
-          <p:cNvPr id="3" name="Notes Placeholder 2"/>
-          <p:cNvSpPr>
-            <a:spLocks noGrp="1"/>
-          </p:cNvSpPr>
-          <p:nvPr>
-            <p:ph type="body" idx="3" sz="quarter"/>
-          </p:nvPr>
-        </p:nvSpPr>
-        <p:spPr/>
-        <p:txBody>
-          <a:bodyPr/>
-          <a:lstStyle/>
-          <a:p>
-            <a:r>
-              <a:t>GUION DE LA DEMO (aprox. 2 minutos). Aclarar al inicio que se muestra el prototipo de frontend (carpeta frontend/ del repositorio): las 9 pantallas funcionan con datos de demostración guardados en el navegador; el backend Spring Boot y MySQL aún no está conectado. Cuentas de demo: botones en la pantalla de Login.</a:t>
-            </a:r>
-          </a:p>
-          <a:p>
-            <a:r>
-              <a:t>1) Login: abrir la pantalla, mostrar un intento con contraseña incorrecta (mensaje genérico) y luego ingresar con un usuario de prueba. Mencionar que la contraseña se guarda con BCrypt y la sesión se controla por rol (RNF-01 a RNF-03).</a:t>
-            </a:r>
-          </a:p>
-          <a:p>
-            <a:r>
-              <a:t>2) Dashboard: mostrar los KPIs (total de exportaciones, clientes activos, inventario en kg, ventas del mes en USD), la gráfica de exportaciones por país, productos más vendidos y las últimas exportaciones. Los datos son de demostración.</a:t>
-            </a:r>
-          </a:p>
-          <a:p>
-            <a:r>
-              <a:t>3) Clientes, Productos e Inventario (Sprint 1): registrar un cliente de la UE, ver el catálogo y consultar el stock por bodega.</a:t>
-            </a:r>
-          </a:p>
-          <a:p>
-            <a:r>
-              <a:t>4) Nueva Exportación: recorrer el asistente de 4 pasos: información básica; cliente y destino con puerto de salida, puerto de llegada y fecha de envío; productos y cantidades; documentos. En el prototipo el asistente ya funciona completo (valida stock y descuenta inventario); la persistencia real llegará con el backend en el Sprint 3.</a:t>
-            </a:r>
-          </a:p>
-          <a:p>
-            <a:r>
-              <a:t>5) Reportes: filtrar por rango de fechas y mostrar los botones de exportar a PDF y Excel.</a:t>
-            </a:r>
-          </a:p>
-          <a:p>
-            <a:r>
-              <a:t>Plan B si falla la demo: mostrar capturas de pantalla de los mockups. Tiempo: 2 minutos.</a:t>
-            </a:r>
-          </a:p>
-        </p:txBody>
-      </p:sp>
-      <p:sp>
-        <p:nvSpPr>
-          <p:cNvPr id="4" name="Slide Number Placeholder 3"/>
-          <p:cNvSpPr>
-            <a:spLocks noGrp="1"/>
-          </p:cNvSpPr>
-          <p:nvPr>
-            <p:ph type="sldNum" idx="5" sz="quarter"/>
-          </p:nvPr>
-        </p:nvSpPr>
-        <p:spPr/>
-      </p:sp>
-    </p:spTree>
-  </p:cSld>
-  <p:clrMapOvr>
-    <a:masterClrMapping/>
-  </p:clrMapOvr>
-</p:notes>
-</file>
-
-<file path=ppt/notesSlides/notesSlide15.xml><?xml version="1.0" encoding="utf-8"?>
-<p:notes xmlns:a="http://schemas.openxmlformats.org/drawingml/2006/main" xmlns:p="http://schemas.openxmlformats.org/presentationml/2006/main" xmlns:r="http://schemas.openxmlformats.org/officeDocument/2006/relationships">
-  <p:cSld>
-    <p:spTree>
-      <p:nvGrpSpPr>
-        <p:cNvPr id="1" name=""/>
-        <p:cNvGrpSpPr/>
-        <p:nvPr/>
-      </p:nvGrpSpPr>
-      <p:grpSpPr>
-        <a:xfrm>
-          <a:off x="0" y="0"/>
-          <a:ext cx="0" cy="0"/>
-          <a:chOff x="0" y="0"/>
-          <a:chExt cx="0" cy="0"/>
-        </a:xfrm>
-      </p:grpSpPr>
-      <p:sp>
-        <p:nvSpPr>
-          <p:cNvPr id="2" name="Slide Image Placeholder 1"/>
-          <p:cNvSpPr>
-            <a:spLocks noGrp="1"/>
-          </p:cNvSpPr>
-          <p:nvPr>
-            <p:ph type="sldImg" idx="2"/>
-          </p:nvPr>
-        </p:nvSpPr>
-        <p:spPr/>
-      </p:sp>
-      <p:sp>
-        <p:nvSpPr>
-          <p:cNvPr id="3" name="Notes Placeholder 2"/>
-          <p:cNvSpPr>
-            <a:spLocks noGrp="1"/>
-          </p:cNvSpPr>
-          <p:nvPr>
-            <p:ph type="body" idx="3" sz="quarter"/>
-          </p:nvPr>
-        </p:nvSpPr>
-        <p:spPr/>
-        <p:txBody>
-          <a:bodyPr/>
-          <a:lstStyle/>
-          <a:p>
-            <a:r>
               <a:t>Para el Sprint 3 proponemos: implementar Exportaciones (HU-11, HU-12) y Documentación (HU-14, HU-15), completar Usuarios (HU-05, HU-06) y las mejoras de Clientes, Productos e Inventario (HU-07 a HU-09). En paralelo, ejecutar el plan de pruebas con JUnit 5, Mockito y MockMvc contra MySQL y registrar los resultados. En el Sprint 4: Pagos, Reportes y Dashboard, más HU-10 y HU-13. Quedan cuatro preguntas abiertas para el docente: alcance del MVP, estrategia de despliegue, requisitos de seguridad y normativa de la UE, y cronograma. Cerrar agradeciendo y abriendo preguntas. Tiempo: 45 segundos.</a:t>
             </a:r>
           </a:p>
@@ -1526,7 +1141,37 @@
           <a:lstStyle/>
           <a:p>
             <a:r>
-              <a:t>Diapositiva de Brayan Guerrero. Módulos propuestos: Usuarios / Autenticación y Dashboard. Esta es la responsabilidad planificada por módulo; a la derecha están sus historias comprometidas para los Sprints 3 y 4 según el backlog. El integrante debe completar el único marcador [COMPLETAR] con su trabajo real (commits, pull requests, tareas de Jira y aportes de documentación o pruebas) y ajustar el módulo si difiere. Tiempo: 1 minuto.</a:t>
+              <a:t>GUION DE LA DEMO (aprox. 2 minutos). Aclarar al inicio que se muestra el prototipo de frontend (carpeta frontend/ del repositorio): las 9 pantallas funcionan con datos de demostración guardados en el navegador; el backend Spring Boot y MySQL aún no está conectado. Cuentas de demo: botones en la pantalla de Login.</a:t>
+            </a:r>
+          </a:p>
+          <a:p>
+            <a:r>
+              <a:t>1) Login: abrir la pantalla, mostrar un intento con contraseña incorrecta (mensaje genérico) y luego ingresar con un usuario de prueba. Mencionar que la contraseña se guarda con BCrypt y la sesión se controla por rol (RNF-01 a RNF-03).</a:t>
+            </a:r>
+          </a:p>
+          <a:p>
+            <a:r>
+              <a:t>2) Dashboard: mostrar los KPIs (total de exportaciones, clientes activos, inventario en kg, ventas del mes en USD), la gráfica de exportaciones por país, productos más vendidos y las últimas exportaciones. Los datos son de demostración.</a:t>
+            </a:r>
+          </a:p>
+          <a:p>
+            <a:r>
+              <a:t>3) Clientes, Productos e Inventario (Sprint 1): registrar un cliente de la UE, ver el catálogo y consultar el stock por bodega.</a:t>
+            </a:r>
+          </a:p>
+          <a:p>
+            <a:r>
+              <a:t>4) Nueva Exportación: recorrer el asistente de 4 pasos: información básica; cliente y destino con puerto de salida, puerto de llegada y fecha de envío; productos y cantidades; documentos. En el prototipo el asistente ya funciona completo (valida stock y descuenta inventario); la persistencia real llegará con el backend en el Sprint 3.</a:t>
+            </a:r>
+          </a:p>
+          <a:p>
+            <a:r>
+              <a:t>5) Reportes: filtrar por rango de fechas y mostrar los botones de exportar a PDF y Excel.</a:t>
+            </a:r>
+          </a:p>
+          <a:p>
+            <a:r>
+              <a:t>Plan B si falla la demo: mostrar capturas de pantalla de los mockups. Tiempo: 2 minutos.</a:t>
             </a:r>
           </a:p>
         </p:txBody>
@@ -4938,7 +4583,7 @@
                 </a:solidFill>
                 <a:latin typeface="Calibri"/>
               </a:rPr>
-              <a:t>Juan Jurado</a:t>
+              <a:t>Próximos pasos · Sprint 3</a:t>
             </a:r>
           </a:p>
         </p:txBody>
@@ -4973,7 +4618,7 @@
                 </a:solidFill>
                 <a:latin typeface="Calibri"/>
               </a:rPr>
-              <a:t>Responsabilidades planificadas y contribuciones</a:t>
+              <a:t>Prioridades y decisiones abiertas</a:t>
             </a:r>
           </a:p>
         </p:txBody>
@@ -5044,4453 +4689,6 @@
                 <a:latin typeface="Calibri"/>
               </a:rPr>
               <a:t>10</a:t>
-            </a:r>
-          </a:p>
-        </p:txBody>
-      </p:sp>
-      <p:sp>
-        <p:nvSpPr>
-          <p:cNvPr id="7" name="Rounded Rectangle 6"/>
-          <p:cNvSpPr/>
-          <p:nvPr/>
-        </p:nvSpPr>
-        <p:spPr>
-          <a:xfrm>
-            <a:off x="548640" y="1463040"/>
-            <a:ext cx="5394960" cy="1920240"/>
-          </a:xfrm>
-          <a:prstGeom prst="roundRect">
-            <a:avLst>
-              <a:gd name="adj" fmla="val 6000"/>
-            </a:avLst>
-          </a:prstGeom>
-          <a:solidFill>
-            <a:srgbClr val="221A16"/>
-          </a:solidFill>
-          <a:ln>
-            <a:noFill/>
-          </a:ln>
-          <a:effectLst/>
-        </p:spPr>
-        <p:style>
-          <a:lnRef idx="1">
-            <a:schemeClr val="accent1"/>
-          </a:lnRef>
-          <a:fillRef idx="3">
-            <a:schemeClr val="accent1"/>
-          </a:fillRef>
-          <a:effectRef idx="2">
-            <a:schemeClr val="accent1"/>
-          </a:effectRef>
-          <a:fontRef idx="minor">
-            <a:schemeClr val="lt1"/>
-          </a:fontRef>
-        </p:style>
-        <p:txBody>
-          <a:bodyPr rtlCol="0" anchor="ctr"/>
-          <a:lstStyle/>
-          <a:p>
-            <a:pPr algn="ctr"/>
-          </a:p>
-        </p:txBody>
-      </p:sp>
-      <p:sp>
-        <p:nvSpPr>
-          <p:cNvPr id="8" name="TextBox 7"/>
-          <p:cNvSpPr txBox="1"/>
-          <p:nvPr/>
-        </p:nvSpPr>
-        <p:spPr>
-          <a:xfrm>
-            <a:off x="731520" y="1554480"/>
-            <a:ext cx="5029200" cy="365760"/>
-          </a:xfrm>
-          <a:prstGeom prst="rect">
-            <a:avLst/>
-          </a:prstGeom>
-          <a:noFill/>
-        </p:spPr>
-        <p:txBody>
-          <a:bodyPr wrap="square" lIns="45720" rIns="45720" tIns="27432" bIns="27432" anchor="t">
-            <a:spAutoFit/>
-          </a:bodyPr>
-          <a:lstStyle/>
-          <a:p>
-            <a:pPr algn="l"/>
-            <a:r>
-              <a:rPr sz="1600" b="1">
-                <a:solidFill>
-                  <a:srgbClr val="66BB6A"/>
-                </a:solidFill>
-                <a:latin typeface="Calibri"/>
-              </a:rPr>
-              <a:t>Módulos / áreas planificados</a:t>
-            </a:r>
-          </a:p>
-        </p:txBody>
-      </p:sp>
-      <p:sp>
-        <p:nvSpPr>
-          <p:cNvPr id="9" name="TextBox 8"/>
-          <p:cNvSpPr txBox="1"/>
-          <p:nvPr/>
-        </p:nvSpPr>
-        <p:spPr>
-          <a:xfrm>
-            <a:off x="731520" y="1965960"/>
-            <a:ext cx="5029200" cy="548640"/>
-          </a:xfrm>
-          <a:prstGeom prst="rect">
-            <a:avLst/>
-          </a:prstGeom>
-          <a:noFill/>
-        </p:spPr>
-        <p:txBody>
-          <a:bodyPr wrap="square" lIns="45720" rIns="45720" tIns="27432" bIns="27432" anchor="t">
-            <a:spAutoFit/>
-          </a:bodyPr>
-          <a:lstStyle/>
-          <a:p>
-            <a:pPr algn="l"/>
-            <a:r>
-              <a:rPr sz="1800" b="1">
-                <a:solidFill>
-                  <a:srgbClr val="F3E9E2"/>
-                </a:solidFill>
-                <a:latin typeface="Calibri"/>
-              </a:rPr>
-              <a:t>Clientes y Pagos</a:t>
-            </a:r>
-          </a:p>
-        </p:txBody>
-      </p:sp>
-      <p:sp>
-        <p:nvSpPr>
-          <p:cNvPr id="10" name="TextBox 9"/>
-          <p:cNvSpPr txBox="1"/>
-          <p:nvPr/>
-        </p:nvSpPr>
-        <p:spPr>
-          <a:xfrm>
-            <a:off x="731520" y="2697480"/>
-            <a:ext cx="5029200" cy="640080"/>
-          </a:xfrm>
-          <a:prstGeom prst="rect">
-            <a:avLst/>
-          </a:prstGeom>
-          <a:noFill/>
-        </p:spPr>
-        <p:txBody>
-          <a:bodyPr wrap="square" lIns="45720" rIns="45720" tIns="27432" bIns="27432" anchor="t">
-            <a:spAutoFit/>
-          </a:bodyPr>
-          <a:lstStyle/>
-          <a:p>
-            <a:pPr algn="l"/>
-            <a:r>
-              <a:rPr sz="1200" b="0">
-                <a:solidFill>
-                  <a:srgbClr val="BCAAA4"/>
-                </a:solidFill>
-                <a:latin typeface="Calibri"/>
-              </a:rPr>
-              <a:t>Historias: HU-02, HU-07, HU-16, HU-17</a:t>
-            </a:r>
-          </a:p>
-        </p:txBody>
-      </p:sp>
-      <p:sp>
-        <p:nvSpPr>
-          <p:cNvPr id="11" name="Rounded Rectangle 10"/>
-          <p:cNvSpPr/>
-          <p:nvPr/>
-        </p:nvSpPr>
-        <p:spPr>
-          <a:xfrm>
-            <a:off x="548640" y="3566160"/>
-            <a:ext cx="5394960" cy="2651760"/>
-          </a:xfrm>
-          <a:prstGeom prst="roundRect">
-            <a:avLst>
-              <a:gd name="adj" fmla="val 6000"/>
-            </a:avLst>
-          </a:prstGeom>
-          <a:solidFill>
-            <a:srgbClr val="221A16"/>
-          </a:solidFill>
-          <a:ln>
-            <a:noFill/>
-          </a:ln>
-          <a:effectLst/>
-        </p:spPr>
-        <p:style>
-          <a:lnRef idx="1">
-            <a:schemeClr val="accent1"/>
-          </a:lnRef>
-          <a:fillRef idx="3">
-            <a:schemeClr val="accent1"/>
-          </a:fillRef>
-          <a:effectRef idx="2">
-            <a:schemeClr val="accent1"/>
-          </a:effectRef>
-          <a:fontRef idx="minor">
-            <a:schemeClr val="lt1"/>
-          </a:fontRef>
-        </p:style>
-        <p:txBody>
-          <a:bodyPr rtlCol="0" anchor="ctr"/>
-          <a:lstStyle/>
-          <a:p>
-            <a:pPr algn="ctr"/>
-          </a:p>
-        </p:txBody>
-      </p:sp>
-      <p:sp>
-        <p:nvSpPr>
-          <p:cNvPr id="12" name="TextBox 11"/>
-          <p:cNvSpPr txBox="1"/>
-          <p:nvPr/>
-        </p:nvSpPr>
-        <p:spPr>
-          <a:xfrm>
-            <a:off x="731520" y="3657600"/>
-            <a:ext cx="5029200" cy="365760"/>
-          </a:xfrm>
-          <a:prstGeom prst="rect">
-            <a:avLst/>
-          </a:prstGeom>
-          <a:noFill/>
-        </p:spPr>
-        <p:txBody>
-          <a:bodyPr wrap="square" lIns="45720" rIns="45720" tIns="27432" bIns="27432" anchor="t">
-            <a:spAutoFit/>
-          </a:bodyPr>
-          <a:lstStyle/>
-          <a:p>
-            <a:pPr algn="l"/>
-            <a:r>
-              <a:rPr sz="1600" b="1">
-                <a:solidFill>
-                  <a:srgbClr val="66BB6A"/>
-                </a:solidFill>
-                <a:latin typeface="Calibri"/>
-              </a:rPr>
-              <a:t>Plan de pruebas</a:t>
-            </a:r>
-          </a:p>
-        </p:txBody>
-      </p:sp>
-      <p:sp>
-        <p:nvSpPr>
-          <p:cNvPr id="13" name="TextBox 12"/>
-          <p:cNvSpPr txBox="1"/>
-          <p:nvPr/>
-        </p:nvSpPr>
-        <p:spPr>
-          <a:xfrm>
-            <a:off x="731520" y="4069080"/>
-            <a:ext cx="5029200" cy="2103120"/>
-          </a:xfrm>
-          <a:prstGeom prst="rect">
-            <a:avLst/>
-          </a:prstGeom>
-          <a:noFill/>
-        </p:spPr>
-        <p:txBody>
-          <a:bodyPr wrap="square" lIns="45720">
-            <a:spAutoFit/>
-          </a:bodyPr>
-          <a:lstStyle/>
-          <a:p>
-            <a:pPr>
-              <a:spcAft>
-                <a:spcPts val="600"/>
-              </a:spcAft>
-            </a:pPr>
-            <a:r>
-              <a:rPr sz="800">
-                <a:solidFill>
-                  <a:srgbClr val="66BB6A"/>
-                </a:solidFill>
-                <a:latin typeface="Calibri"/>
-              </a:rPr>
-              <a:t>● </a:t>
-            </a:r>
-            <a:r>
-              <a:rPr b="1" sz="1300">
-                <a:solidFill>
-                  <a:srgbClr val="F3E9E2"/>
-                </a:solidFill>
-                <a:latin typeface="Calibri"/>
-              </a:rPr>
-              <a:t>Casos asignados: </a:t>
-            </a:r>
-            <a:r>
-              <a:rPr sz="1300">
-                <a:solidFill>
-                  <a:srgbClr val="BCAAA4"/>
-                </a:solidFill>
-                <a:latin typeface="Calibri"/>
-              </a:rPr>
-              <a:t>11</a:t>
-            </a:r>
-          </a:p>
-          <a:p>
-            <a:pPr>
-              <a:spcAft>
-                <a:spcPts val="600"/>
-              </a:spcAft>
-            </a:pPr>
-            <a:r>
-              <a:rPr sz="800">
-                <a:solidFill>
-                  <a:srgbClr val="66BB6A"/>
-                </a:solidFill>
-                <a:latin typeface="Calibri"/>
-              </a:rPr>
-              <a:t>● </a:t>
-            </a:r>
-            <a:r>
-              <a:rPr b="1" sz="1300">
-                <a:solidFill>
-                  <a:srgbClr val="F3E9E2"/>
-                </a:solidFill>
-                <a:latin typeface="Calibri"/>
-              </a:rPr>
-              <a:t>De Sprint 1: </a:t>
-            </a:r>
-            <a:r>
-              <a:rPr sz="1300">
-                <a:solidFill>
-                  <a:srgbClr val="BCAAA4"/>
-                </a:solidFill>
-                <a:latin typeface="Calibri"/>
-              </a:rPr>
-              <a:t>9 casos</a:t>
-            </a:r>
-          </a:p>
-          <a:p>
-            <a:pPr>
-              <a:spcAft>
-                <a:spcPts val="600"/>
-              </a:spcAft>
-            </a:pPr>
-            <a:r>
-              <a:rPr sz="800">
-                <a:solidFill>
-                  <a:srgbClr val="66BB6A"/>
-                </a:solidFill>
-                <a:latin typeface="Calibri"/>
-              </a:rPr>
-              <a:t>● </a:t>
-            </a:r>
-            <a:r>
-              <a:rPr b="1" sz="1300">
-                <a:solidFill>
-                  <a:srgbClr val="F3E9E2"/>
-                </a:solidFill>
-                <a:latin typeface="Calibri"/>
-              </a:rPr>
-              <a:t>IDs: </a:t>
-            </a:r>
-            <a:r>
-              <a:rPr sz="1300">
-                <a:solidFill>
-                  <a:srgbClr val="BCAAA4"/>
-                </a:solidFill>
-                <a:latin typeface="Calibri"/>
-              </a:rPr>
-              <a:t>QA005, QA006, QA007, QA008, QA017, QC003, QC004, QC005…</a:t>
-            </a:r>
-          </a:p>
-        </p:txBody>
-      </p:sp>
-      <p:sp>
-        <p:nvSpPr>
-          <p:cNvPr id="14" name="Rounded Rectangle 13"/>
-          <p:cNvSpPr/>
-          <p:nvPr/>
-        </p:nvSpPr>
-        <p:spPr>
-          <a:xfrm>
-            <a:off x="6126480" y="1463040"/>
-            <a:ext cx="5532120" cy="4754880"/>
-          </a:xfrm>
-          <a:prstGeom prst="roundRect">
-            <a:avLst>
-              <a:gd name="adj" fmla="val 6000"/>
-            </a:avLst>
-          </a:prstGeom>
-          <a:solidFill>
-            <a:srgbClr val="221A16"/>
-          </a:solidFill>
-          <a:ln>
-            <a:noFill/>
-          </a:ln>
-          <a:effectLst/>
-        </p:spPr>
-        <p:style>
-          <a:lnRef idx="1">
-            <a:schemeClr val="accent1"/>
-          </a:lnRef>
-          <a:fillRef idx="3">
-            <a:schemeClr val="accent1"/>
-          </a:fillRef>
-          <a:effectRef idx="2">
-            <a:schemeClr val="accent1"/>
-          </a:effectRef>
-          <a:fontRef idx="minor">
-            <a:schemeClr val="lt1"/>
-          </a:fontRef>
-        </p:style>
-        <p:txBody>
-          <a:bodyPr rtlCol="0" anchor="ctr"/>
-          <a:lstStyle/>
-          <a:p>
-            <a:pPr algn="ctr"/>
-          </a:p>
-        </p:txBody>
-      </p:sp>
-      <p:sp>
-        <p:nvSpPr>
-          <p:cNvPr id="15" name="TextBox 14"/>
-          <p:cNvSpPr txBox="1"/>
-          <p:nvPr/>
-        </p:nvSpPr>
-        <p:spPr>
-          <a:xfrm>
-            <a:off x="6309360" y="1554480"/>
-            <a:ext cx="5212080" cy="365760"/>
-          </a:xfrm>
-          <a:prstGeom prst="rect">
-            <a:avLst/>
-          </a:prstGeom>
-          <a:noFill/>
-        </p:spPr>
-        <p:txBody>
-          <a:bodyPr wrap="square" lIns="45720" rIns="45720" tIns="27432" bIns="27432" anchor="t">
-            <a:spAutoFit/>
-          </a:bodyPr>
-          <a:lstStyle/>
-          <a:p>
-            <a:pPr algn="l"/>
-            <a:r>
-              <a:rPr sz="1600" b="1">
-                <a:solidFill>
-                  <a:srgbClr val="66BB6A"/>
-                </a:solidFill>
-                <a:latin typeface="Calibri"/>
-              </a:rPr>
-              <a:t>Compromisos y contribuciones</a:t>
-            </a:r>
-          </a:p>
-        </p:txBody>
-      </p:sp>
-      <p:sp>
-        <p:nvSpPr>
-          <p:cNvPr id="16" name="TextBox 15"/>
-          <p:cNvSpPr txBox="1"/>
-          <p:nvPr/>
-        </p:nvSpPr>
-        <p:spPr>
-          <a:xfrm>
-            <a:off x="6309360" y="2011680"/>
-            <a:ext cx="5212080" cy="4114800"/>
-          </a:xfrm>
-          <a:prstGeom prst="rect">
-            <a:avLst/>
-          </a:prstGeom>
-          <a:noFill/>
-        </p:spPr>
-        <p:txBody>
-          <a:bodyPr wrap="square" lIns="45720">
-            <a:spAutoFit/>
-          </a:bodyPr>
-          <a:lstStyle/>
-          <a:p>
-            <a:pPr>
-              <a:spcAft>
-                <a:spcPts val="1000"/>
-              </a:spcAft>
-            </a:pPr>
-            <a:r>
-              <a:rPr sz="900">
-                <a:solidFill>
-                  <a:srgbClr val="66BB6A"/>
-                </a:solidFill>
-                <a:latin typeface="Calibri"/>
-              </a:rPr>
-              <a:t>● </a:t>
-            </a:r>
-            <a:r>
-              <a:rPr b="1" sz="1400">
-                <a:solidFill>
-                  <a:srgbClr val="F3E9E2"/>
-                </a:solidFill>
-                <a:latin typeface="Calibri"/>
-              </a:rPr>
-              <a:t>HU-07: </a:t>
-            </a:r>
-            <a:r>
-              <a:rPr sz="1400">
-                <a:solidFill>
-                  <a:srgbClr val="BCAAA4"/>
-                </a:solidFill>
-                <a:latin typeface="Calibri"/>
-              </a:rPr>
-              <a:t>Búsqueda de clientes · 3 pts · Sprint 3</a:t>
-            </a:r>
-          </a:p>
-          <a:p>
-            <a:pPr>
-              <a:spcAft>
-                <a:spcPts val="1000"/>
-              </a:spcAft>
-            </a:pPr>
-            <a:r>
-              <a:rPr sz="900">
-                <a:solidFill>
-                  <a:srgbClr val="66BB6A"/>
-                </a:solidFill>
-                <a:latin typeface="Calibri"/>
-              </a:rPr>
-              <a:t>● </a:t>
-            </a:r>
-            <a:r>
-              <a:rPr b="1" sz="1400">
-                <a:solidFill>
-                  <a:srgbClr val="F3E9E2"/>
-                </a:solidFill>
-                <a:latin typeface="Calibri"/>
-              </a:rPr>
-              <a:t>HU-16: </a:t>
-            </a:r>
-            <a:r>
-              <a:rPr sz="1400">
-                <a:solidFill>
-                  <a:srgbClr val="BCAAA4"/>
-                </a:solidFill>
-                <a:latin typeface="Calibri"/>
-              </a:rPr>
-              <a:t>Registrar pago internacional · 5 pts · Sprint 4</a:t>
-            </a:r>
-          </a:p>
-          <a:p>
-            <a:pPr>
-              <a:spcAft>
-                <a:spcPts val="1000"/>
-              </a:spcAft>
-            </a:pPr>
-            <a:r>
-              <a:rPr sz="900">
-                <a:solidFill>
-                  <a:srgbClr val="66BB6A"/>
-                </a:solidFill>
-                <a:latin typeface="Calibri"/>
-              </a:rPr>
-              <a:t>● </a:t>
-            </a:r>
-            <a:r>
-              <a:rPr b="1" sz="1400">
-                <a:solidFill>
-                  <a:srgbClr val="F3E9E2"/>
-                </a:solidFill>
-                <a:latin typeface="Calibri"/>
-              </a:rPr>
-              <a:t>HU-17: </a:t>
-            </a:r>
-            <a:r>
-              <a:rPr sz="1400">
-                <a:solidFill>
-                  <a:srgbClr val="BCAAA4"/>
-                </a:solidFill>
-                <a:latin typeface="Calibri"/>
-              </a:rPr>
-              <a:t>Confirmación de pagos y saldo · 3 pts · Sprint 4</a:t>
-            </a:r>
-          </a:p>
-          <a:p>
-            <a:pPr>
-              <a:spcAft>
-                <a:spcPts val="1000"/>
-              </a:spcAft>
-            </a:pPr>
-            <a:r>
-              <a:rPr sz="900">
-                <a:solidFill>
-                  <a:srgbClr val="66BB6A"/>
-                </a:solidFill>
-                <a:latin typeface="Calibri"/>
-              </a:rPr>
-              <a:t>● </a:t>
-            </a:r>
-            <a:r>
-              <a:rPr b="1" sz="1400">
-                <a:solidFill>
-                  <a:srgbClr val="F3E9E2"/>
-                </a:solidFill>
-                <a:latin typeface="Calibri"/>
-              </a:rPr>
-              <a:t>Aporte realizado hasta hoy: </a:t>
-            </a:r>
-            <a:r>
-              <a:rPr sz="1400">
-                <a:solidFill>
-                  <a:srgbClr val="BCAAA4"/>
-                </a:solidFill>
-                <a:latin typeface="Calibri"/>
-              </a:rPr>
-              <a:t>[COMPLETAR con Jira/Git]</a:t>
-            </a:r>
-          </a:p>
-        </p:txBody>
-      </p:sp>
-    </p:spTree>
-  </p:cSld>
-  <p:clrMapOvr>
-    <a:masterClrMapping/>
-  </p:clrMapOvr>
-</p:sld>
-</file>
-
-<file path=ppt/slides/slide11.xml><?xml version="1.0" encoding="utf-8"?>
-<p:sld xmlns:a="http://schemas.openxmlformats.org/drawingml/2006/main" xmlns:p="http://schemas.openxmlformats.org/presentationml/2006/main" xmlns:r="http://schemas.openxmlformats.org/officeDocument/2006/relationships">
-  <p:cSld>
-    <p:bg>
-      <p:bgPr>
-        <a:solidFill>
-          <a:srgbClr val="15110F"/>
-        </a:solidFill>
-        <a:effectLst/>
-      </p:bgPr>
-    </p:bg>
-    <p:spTree>
-      <p:nvGrpSpPr>
-        <p:cNvPr id="1" name=""/>
-        <p:cNvGrpSpPr/>
-        <p:nvPr/>
-      </p:nvGrpSpPr>
-      <p:grpSpPr/>
-      <p:sp>
-        <p:nvSpPr>
-          <p:cNvPr id="2" name="Rectangle 1"/>
-          <p:cNvSpPr/>
-          <p:nvPr/>
-        </p:nvSpPr>
-        <p:spPr>
-          <a:xfrm>
-            <a:off x="0" y="0"/>
-            <a:ext cx="164592" cy="6858000"/>
-          </a:xfrm>
-          <a:prstGeom prst="rect">
-            <a:avLst/>
-          </a:prstGeom>
-          <a:solidFill>
-            <a:srgbClr val="66BB6A"/>
-          </a:solidFill>
-          <a:ln>
-            <a:noFill/>
-          </a:ln>
-          <a:effectLst/>
-        </p:spPr>
-        <p:style>
-          <a:lnRef idx="1">
-            <a:schemeClr val="accent1"/>
-          </a:lnRef>
-          <a:fillRef idx="3">
-            <a:schemeClr val="accent1"/>
-          </a:fillRef>
-          <a:effectRef idx="2">
-            <a:schemeClr val="accent1"/>
-          </a:effectRef>
-          <a:fontRef idx="minor">
-            <a:schemeClr val="lt1"/>
-          </a:fontRef>
-        </p:style>
-        <p:txBody>
-          <a:bodyPr rtlCol="0" anchor="ctr"/>
-          <a:lstStyle/>
-          <a:p>
-            <a:pPr algn="ctr"/>
-          </a:p>
-        </p:txBody>
-      </p:sp>
-      <p:sp>
-        <p:nvSpPr>
-          <p:cNvPr id="3" name="TextBox 2"/>
-          <p:cNvSpPr txBox="1"/>
-          <p:nvPr/>
-        </p:nvSpPr>
-        <p:spPr>
-          <a:xfrm>
-            <a:off x="548640" y="274320"/>
-            <a:ext cx="10972800" cy="640080"/>
-          </a:xfrm>
-          <a:prstGeom prst="rect">
-            <a:avLst/>
-          </a:prstGeom>
-          <a:noFill/>
-        </p:spPr>
-        <p:txBody>
-          <a:bodyPr wrap="square" lIns="45720" rIns="45720" tIns="27432" bIns="27432" anchor="t">
-            <a:spAutoFit/>
-          </a:bodyPr>
-          <a:lstStyle/>
-          <a:p>
-            <a:pPr algn="l"/>
-            <a:r>
-              <a:rPr sz="3200" b="1">
-                <a:solidFill>
-                  <a:srgbClr val="F3E9E2"/>
-                </a:solidFill>
-                <a:latin typeface="Calibri"/>
-              </a:rPr>
-              <a:t>Nicoll López</a:t>
-            </a:r>
-          </a:p>
-        </p:txBody>
-      </p:sp>
-      <p:sp>
-        <p:nvSpPr>
-          <p:cNvPr id="4" name="TextBox 3"/>
-          <p:cNvSpPr txBox="1"/>
-          <p:nvPr/>
-        </p:nvSpPr>
-        <p:spPr>
-          <a:xfrm>
-            <a:off x="548640" y="896112"/>
-            <a:ext cx="10972800" cy="365760"/>
-          </a:xfrm>
-          <a:prstGeom prst="rect">
-            <a:avLst/>
-          </a:prstGeom>
-          <a:noFill/>
-        </p:spPr>
-        <p:txBody>
-          <a:bodyPr wrap="square" lIns="45720" rIns="45720" tIns="27432" bIns="27432" anchor="t">
-            <a:spAutoFit/>
-          </a:bodyPr>
-          <a:lstStyle/>
-          <a:p>
-            <a:pPr algn="l"/>
-            <a:r>
-              <a:rPr sz="1500" b="0">
-                <a:solidFill>
-                  <a:srgbClr val="A1887F"/>
-                </a:solidFill>
-                <a:latin typeface="Calibri"/>
-              </a:rPr>
-              <a:t>Responsabilidades planificadas y contribuciones</a:t>
-            </a:r>
-          </a:p>
-        </p:txBody>
-      </p:sp>
-      <p:sp>
-        <p:nvSpPr>
-          <p:cNvPr id="5" name="TextBox 4"/>
-          <p:cNvSpPr txBox="1"/>
-          <p:nvPr/>
-        </p:nvSpPr>
-        <p:spPr>
-          <a:xfrm>
-            <a:off x="548640" y="6446520"/>
-            <a:ext cx="7315200" cy="274320"/>
-          </a:xfrm>
-          <a:prstGeom prst="rect">
-            <a:avLst/>
-          </a:prstGeom>
-          <a:noFill/>
-        </p:spPr>
-        <p:txBody>
-          <a:bodyPr wrap="square" lIns="45720" rIns="45720" tIns="27432" bIns="27432" anchor="t">
-            <a:spAutoFit/>
-          </a:bodyPr>
-          <a:lstStyle/>
-          <a:p>
-            <a:pPr algn="l"/>
-            <a:r>
-              <a:rPr sz="1000" b="0">
-                <a:solidFill>
-                  <a:srgbClr val="BCAAA4"/>
-                </a:solidFill>
-                <a:latin typeface="Calibri"/>
-              </a:rPr>
-              <a:t>CoffeeExport Manager · RITECH SAS · Sprint 2</a:t>
-            </a:r>
-          </a:p>
-        </p:txBody>
-      </p:sp>
-      <p:sp>
-        <p:nvSpPr>
-          <p:cNvPr id="6" name="TextBox 5"/>
-          <p:cNvSpPr txBox="1"/>
-          <p:nvPr/>
-        </p:nvSpPr>
-        <p:spPr>
-          <a:xfrm>
-            <a:off x="10881360" y="6446520"/>
-            <a:ext cx="914400" cy="274320"/>
-          </a:xfrm>
-          <a:prstGeom prst="rect">
-            <a:avLst/>
-          </a:prstGeom>
-          <a:noFill/>
-        </p:spPr>
-        <p:txBody>
-          <a:bodyPr wrap="square" lIns="45720" rIns="45720" tIns="27432" bIns="27432" anchor="t">
-            <a:spAutoFit/>
-          </a:bodyPr>
-          <a:lstStyle/>
-          <a:p>
-            <a:pPr algn="r"/>
-            <a:r>
-              <a:rPr sz="1000" b="0">
-                <a:solidFill>
-                  <a:srgbClr val="BCAAA4"/>
-                </a:solidFill>
-                <a:latin typeface="Calibri"/>
-              </a:rPr>
-              <a:t>11</a:t>
-            </a:r>
-          </a:p>
-        </p:txBody>
-      </p:sp>
-      <p:sp>
-        <p:nvSpPr>
-          <p:cNvPr id="7" name="Rounded Rectangle 6"/>
-          <p:cNvSpPr/>
-          <p:nvPr/>
-        </p:nvSpPr>
-        <p:spPr>
-          <a:xfrm>
-            <a:off x="548640" y="1463040"/>
-            <a:ext cx="5394960" cy="1920240"/>
-          </a:xfrm>
-          <a:prstGeom prst="roundRect">
-            <a:avLst>
-              <a:gd name="adj" fmla="val 6000"/>
-            </a:avLst>
-          </a:prstGeom>
-          <a:solidFill>
-            <a:srgbClr val="221A16"/>
-          </a:solidFill>
-          <a:ln>
-            <a:noFill/>
-          </a:ln>
-          <a:effectLst/>
-        </p:spPr>
-        <p:style>
-          <a:lnRef idx="1">
-            <a:schemeClr val="accent1"/>
-          </a:lnRef>
-          <a:fillRef idx="3">
-            <a:schemeClr val="accent1"/>
-          </a:fillRef>
-          <a:effectRef idx="2">
-            <a:schemeClr val="accent1"/>
-          </a:effectRef>
-          <a:fontRef idx="minor">
-            <a:schemeClr val="lt1"/>
-          </a:fontRef>
-        </p:style>
-        <p:txBody>
-          <a:bodyPr rtlCol="0" anchor="ctr"/>
-          <a:lstStyle/>
-          <a:p>
-            <a:pPr algn="ctr"/>
-          </a:p>
-        </p:txBody>
-      </p:sp>
-      <p:sp>
-        <p:nvSpPr>
-          <p:cNvPr id="8" name="TextBox 7"/>
-          <p:cNvSpPr txBox="1"/>
-          <p:nvPr/>
-        </p:nvSpPr>
-        <p:spPr>
-          <a:xfrm>
-            <a:off x="731520" y="1554480"/>
-            <a:ext cx="5029200" cy="365760"/>
-          </a:xfrm>
-          <a:prstGeom prst="rect">
-            <a:avLst/>
-          </a:prstGeom>
-          <a:noFill/>
-        </p:spPr>
-        <p:txBody>
-          <a:bodyPr wrap="square" lIns="45720" rIns="45720" tIns="27432" bIns="27432" anchor="t">
-            <a:spAutoFit/>
-          </a:bodyPr>
-          <a:lstStyle/>
-          <a:p>
-            <a:pPr algn="l"/>
-            <a:r>
-              <a:rPr sz="1600" b="1">
-                <a:solidFill>
-                  <a:srgbClr val="66BB6A"/>
-                </a:solidFill>
-                <a:latin typeface="Calibri"/>
-              </a:rPr>
-              <a:t>Módulos / áreas planificados</a:t>
-            </a:r>
-          </a:p>
-        </p:txBody>
-      </p:sp>
-      <p:sp>
-        <p:nvSpPr>
-          <p:cNvPr id="9" name="TextBox 8"/>
-          <p:cNvSpPr txBox="1"/>
-          <p:nvPr/>
-        </p:nvSpPr>
-        <p:spPr>
-          <a:xfrm>
-            <a:off x="731520" y="1965960"/>
-            <a:ext cx="5029200" cy="548640"/>
-          </a:xfrm>
-          <a:prstGeom prst="rect">
-            <a:avLst/>
-          </a:prstGeom>
-          <a:noFill/>
-        </p:spPr>
-        <p:txBody>
-          <a:bodyPr wrap="square" lIns="45720" rIns="45720" tIns="27432" bIns="27432" anchor="t">
-            <a:spAutoFit/>
-          </a:bodyPr>
-          <a:lstStyle/>
-          <a:p>
-            <a:pPr algn="l"/>
-            <a:r>
-              <a:rPr sz="1800" b="1">
-                <a:solidFill>
-                  <a:srgbClr val="F3E9E2"/>
-                </a:solidFill>
-                <a:latin typeface="Calibri"/>
-              </a:rPr>
-              <a:t>Productos y Documentación</a:t>
-            </a:r>
-          </a:p>
-        </p:txBody>
-      </p:sp>
-      <p:sp>
-        <p:nvSpPr>
-          <p:cNvPr id="10" name="TextBox 9"/>
-          <p:cNvSpPr txBox="1"/>
-          <p:nvPr/>
-        </p:nvSpPr>
-        <p:spPr>
-          <a:xfrm>
-            <a:off x="731520" y="2697480"/>
-            <a:ext cx="5029200" cy="640080"/>
-          </a:xfrm>
-          <a:prstGeom prst="rect">
-            <a:avLst/>
-          </a:prstGeom>
-          <a:noFill/>
-        </p:spPr>
-        <p:txBody>
-          <a:bodyPr wrap="square" lIns="45720" rIns="45720" tIns="27432" bIns="27432" anchor="t">
-            <a:spAutoFit/>
-          </a:bodyPr>
-          <a:lstStyle/>
-          <a:p>
-            <a:pPr algn="l"/>
-            <a:r>
-              <a:rPr sz="1200" b="0">
-                <a:solidFill>
-                  <a:srgbClr val="BCAAA4"/>
-                </a:solidFill>
-                <a:latin typeface="Calibri"/>
-              </a:rPr>
-              <a:t>Historias: HU-03, HU-08, HU-14, HU-15</a:t>
-            </a:r>
-          </a:p>
-        </p:txBody>
-      </p:sp>
-      <p:sp>
-        <p:nvSpPr>
-          <p:cNvPr id="11" name="Rounded Rectangle 10"/>
-          <p:cNvSpPr/>
-          <p:nvPr/>
-        </p:nvSpPr>
-        <p:spPr>
-          <a:xfrm>
-            <a:off x="548640" y="3566160"/>
-            <a:ext cx="5394960" cy="2651760"/>
-          </a:xfrm>
-          <a:prstGeom prst="roundRect">
-            <a:avLst>
-              <a:gd name="adj" fmla="val 6000"/>
-            </a:avLst>
-          </a:prstGeom>
-          <a:solidFill>
-            <a:srgbClr val="221A16"/>
-          </a:solidFill>
-          <a:ln>
-            <a:noFill/>
-          </a:ln>
-          <a:effectLst/>
-        </p:spPr>
-        <p:style>
-          <a:lnRef idx="1">
-            <a:schemeClr val="accent1"/>
-          </a:lnRef>
-          <a:fillRef idx="3">
-            <a:schemeClr val="accent1"/>
-          </a:fillRef>
-          <a:effectRef idx="2">
-            <a:schemeClr val="accent1"/>
-          </a:effectRef>
-          <a:fontRef idx="minor">
-            <a:schemeClr val="lt1"/>
-          </a:fontRef>
-        </p:style>
-        <p:txBody>
-          <a:bodyPr rtlCol="0" anchor="ctr"/>
-          <a:lstStyle/>
-          <a:p>
-            <a:pPr algn="ctr"/>
-          </a:p>
-        </p:txBody>
-      </p:sp>
-      <p:sp>
-        <p:nvSpPr>
-          <p:cNvPr id="12" name="TextBox 11"/>
-          <p:cNvSpPr txBox="1"/>
-          <p:nvPr/>
-        </p:nvSpPr>
-        <p:spPr>
-          <a:xfrm>
-            <a:off x="731520" y="3657600"/>
-            <a:ext cx="5029200" cy="365760"/>
-          </a:xfrm>
-          <a:prstGeom prst="rect">
-            <a:avLst/>
-          </a:prstGeom>
-          <a:noFill/>
-        </p:spPr>
-        <p:txBody>
-          <a:bodyPr wrap="square" lIns="45720" rIns="45720" tIns="27432" bIns="27432" anchor="t">
-            <a:spAutoFit/>
-          </a:bodyPr>
-          <a:lstStyle/>
-          <a:p>
-            <a:pPr algn="l"/>
-            <a:r>
-              <a:rPr sz="1600" b="1">
-                <a:solidFill>
-                  <a:srgbClr val="66BB6A"/>
-                </a:solidFill>
-                <a:latin typeface="Calibri"/>
-              </a:rPr>
-              <a:t>Plan de pruebas</a:t>
-            </a:r>
-          </a:p>
-        </p:txBody>
-      </p:sp>
-      <p:sp>
-        <p:nvSpPr>
-          <p:cNvPr id="13" name="TextBox 12"/>
-          <p:cNvSpPr txBox="1"/>
-          <p:nvPr/>
-        </p:nvSpPr>
-        <p:spPr>
-          <a:xfrm>
-            <a:off x="731520" y="4069080"/>
-            <a:ext cx="5029200" cy="2103120"/>
-          </a:xfrm>
-          <a:prstGeom prst="rect">
-            <a:avLst/>
-          </a:prstGeom>
-          <a:noFill/>
-        </p:spPr>
-        <p:txBody>
-          <a:bodyPr wrap="square" lIns="45720">
-            <a:spAutoFit/>
-          </a:bodyPr>
-          <a:lstStyle/>
-          <a:p>
-            <a:pPr>
-              <a:spcAft>
-                <a:spcPts val="600"/>
-              </a:spcAft>
-            </a:pPr>
-            <a:r>
-              <a:rPr sz="800">
-                <a:solidFill>
-                  <a:srgbClr val="66BB6A"/>
-                </a:solidFill>
-                <a:latin typeface="Calibri"/>
-              </a:rPr>
-              <a:t>● </a:t>
-            </a:r>
-            <a:r>
-              <a:rPr b="1" sz="1300">
-                <a:solidFill>
-                  <a:srgbClr val="F3E9E2"/>
-                </a:solidFill>
-                <a:latin typeface="Calibri"/>
-              </a:rPr>
-              <a:t>Casos asignados: </a:t>
-            </a:r>
-            <a:r>
-              <a:rPr sz="1300">
-                <a:solidFill>
-                  <a:srgbClr val="BCAAA4"/>
-                </a:solidFill>
-                <a:latin typeface="Calibri"/>
-              </a:rPr>
-              <a:t>7</a:t>
-            </a:r>
-          </a:p>
-          <a:p>
-            <a:pPr>
-              <a:spcAft>
-                <a:spcPts val="600"/>
-              </a:spcAft>
-            </a:pPr>
-            <a:r>
-              <a:rPr sz="800">
-                <a:solidFill>
-                  <a:srgbClr val="66BB6A"/>
-                </a:solidFill>
-                <a:latin typeface="Calibri"/>
-              </a:rPr>
-              <a:t>● </a:t>
-            </a:r>
-            <a:r>
-              <a:rPr b="1" sz="1300">
-                <a:solidFill>
-                  <a:srgbClr val="F3E9E2"/>
-                </a:solidFill>
-                <a:latin typeface="Calibri"/>
-              </a:rPr>
-              <a:t>De Sprint 1: </a:t>
-            </a:r>
-            <a:r>
-              <a:rPr sz="1300">
-                <a:solidFill>
-                  <a:srgbClr val="BCAAA4"/>
-                </a:solidFill>
-                <a:latin typeface="Calibri"/>
-              </a:rPr>
-              <a:t>6 casos</a:t>
-            </a:r>
-          </a:p>
-          <a:p>
-            <a:pPr>
-              <a:spcAft>
-                <a:spcPts val="600"/>
-              </a:spcAft>
-            </a:pPr>
-            <a:r>
-              <a:rPr sz="800">
-                <a:solidFill>
-                  <a:srgbClr val="66BB6A"/>
-                </a:solidFill>
-                <a:latin typeface="Calibri"/>
-              </a:rPr>
-              <a:t>● </a:t>
-            </a:r>
-            <a:r>
-              <a:rPr b="1" sz="1300">
-                <a:solidFill>
-                  <a:srgbClr val="F3E9E2"/>
-                </a:solidFill>
-                <a:latin typeface="Calibri"/>
-              </a:rPr>
-              <a:t>IDs: </a:t>
-            </a:r>
-            <a:r>
-              <a:rPr sz="1300">
-                <a:solidFill>
-                  <a:srgbClr val="BCAAA4"/>
-                </a:solidFill>
-                <a:latin typeface="Calibri"/>
-              </a:rPr>
-              <a:t>QA009, QA010, QA011, QC006, QC007, QC017, QC023</a:t>
-            </a:r>
-          </a:p>
-        </p:txBody>
-      </p:sp>
-      <p:sp>
-        <p:nvSpPr>
-          <p:cNvPr id="14" name="Rounded Rectangle 13"/>
-          <p:cNvSpPr/>
-          <p:nvPr/>
-        </p:nvSpPr>
-        <p:spPr>
-          <a:xfrm>
-            <a:off x="6126480" y="1463040"/>
-            <a:ext cx="5532120" cy="4754880"/>
-          </a:xfrm>
-          <a:prstGeom prst="roundRect">
-            <a:avLst>
-              <a:gd name="adj" fmla="val 6000"/>
-            </a:avLst>
-          </a:prstGeom>
-          <a:solidFill>
-            <a:srgbClr val="221A16"/>
-          </a:solidFill>
-          <a:ln>
-            <a:noFill/>
-          </a:ln>
-          <a:effectLst/>
-        </p:spPr>
-        <p:style>
-          <a:lnRef idx="1">
-            <a:schemeClr val="accent1"/>
-          </a:lnRef>
-          <a:fillRef idx="3">
-            <a:schemeClr val="accent1"/>
-          </a:fillRef>
-          <a:effectRef idx="2">
-            <a:schemeClr val="accent1"/>
-          </a:effectRef>
-          <a:fontRef idx="minor">
-            <a:schemeClr val="lt1"/>
-          </a:fontRef>
-        </p:style>
-        <p:txBody>
-          <a:bodyPr rtlCol="0" anchor="ctr"/>
-          <a:lstStyle/>
-          <a:p>
-            <a:pPr algn="ctr"/>
-          </a:p>
-        </p:txBody>
-      </p:sp>
-      <p:sp>
-        <p:nvSpPr>
-          <p:cNvPr id="15" name="TextBox 14"/>
-          <p:cNvSpPr txBox="1"/>
-          <p:nvPr/>
-        </p:nvSpPr>
-        <p:spPr>
-          <a:xfrm>
-            <a:off x="6309360" y="1554480"/>
-            <a:ext cx="5212080" cy="365760"/>
-          </a:xfrm>
-          <a:prstGeom prst="rect">
-            <a:avLst/>
-          </a:prstGeom>
-          <a:noFill/>
-        </p:spPr>
-        <p:txBody>
-          <a:bodyPr wrap="square" lIns="45720" rIns="45720" tIns="27432" bIns="27432" anchor="t">
-            <a:spAutoFit/>
-          </a:bodyPr>
-          <a:lstStyle/>
-          <a:p>
-            <a:pPr algn="l"/>
-            <a:r>
-              <a:rPr sz="1600" b="1">
-                <a:solidFill>
-                  <a:srgbClr val="66BB6A"/>
-                </a:solidFill>
-                <a:latin typeface="Calibri"/>
-              </a:rPr>
-              <a:t>Compromisos y contribuciones</a:t>
-            </a:r>
-          </a:p>
-        </p:txBody>
-      </p:sp>
-      <p:sp>
-        <p:nvSpPr>
-          <p:cNvPr id="16" name="TextBox 15"/>
-          <p:cNvSpPr txBox="1"/>
-          <p:nvPr/>
-        </p:nvSpPr>
-        <p:spPr>
-          <a:xfrm>
-            <a:off x="6309360" y="2011680"/>
-            <a:ext cx="5212080" cy="4114800"/>
-          </a:xfrm>
-          <a:prstGeom prst="rect">
-            <a:avLst/>
-          </a:prstGeom>
-          <a:noFill/>
-        </p:spPr>
-        <p:txBody>
-          <a:bodyPr wrap="square" lIns="45720">
-            <a:spAutoFit/>
-          </a:bodyPr>
-          <a:lstStyle/>
-          <a:p>
-            <a:pPr>
-              <a:spcAft>
-                <a:spcPts val="1000"/>
-              </a:spcAft>
-            </a:pPr>
-            <a:r>
-              <a:rPr sz="900">
-                <a:solidFill>
-                  <a:srgbClr val="66BB6A"/>
-                </a:solidFill>
-                <a:latin typeface="Calibri"/>
-              </a:rPr>
-              <a:t>● </a:t>
-            </a:r>
-            <a:r>
-              <a:rPr b="1" sz="1400">
-                <a:solidFill>
-                  <a:srgbClr val="F3E9E2"/>
-                </a:solidFill>
-                <a:latin typeface="Calibri"/>
-              </a:rPr>
-              <a:t>HU-08: </a:t>
-            </a:r>
-            <a:r>
-              <a:rPr sz="1400">
-                <a:solidFill>
-                  <a:srgbClr val="BCAAA4"/>
-                </a:solidFill>
-                <a:latin typeface="Calibri"/>
-              </a:rPr>
-              <a:t>Actualización y baja de productos · 3 pts · Sprint 3</a:t>
-            </a:r>
-          </a:p>
-          <a:p>
-            <a:pPr>
-              <a:spcAft>
-                <a:spcPts val="1000"/>
-              </a:spcAft>
-            </a:pPr>
-            <a:r>
-              <a:rPr sz="900">
-                <a:solidFill>
-                  <a:srgbClr val="66BB6A"/>
-                </a:solidFill>
-                <a:latin typeface="Calibri"/>
-              </a:rPr>
-              <a:t>● </a:t>
-            </a:r>
-            <a:r>
-              <a:rPr b="1" sz="1400">
-                <a:solidFill>
-                  <a:srgbClr val="F3E9E2"/>
-                </a:solidFill>
-                <a:latin typeface="Calibri"/>
-              </a:rPr>
-              <a:t>HU-14: </a:t>
-            </a:r>
-            <a:r>
-              <a:rPr sz="1400">
-                <a:solidFill>
-                  <a:srgbClr val="BCAAA4"/>
-                </a:solidFill>
-                <a:latin typeface="Calibri"/>
-              </a:rPr>
-              <a:t>Adjuntar documentos · 5 pts · Sprint 3</a:t>
-            </a:r>
-          </a:p>
-          <a:p>
-            <a:pPr>
-              <a:spcAft>
-                <a:spcPts val="1000"/>
-              </a:spcAft>
-            </a:pPr>
-            <a:r>
-              <a:rPr sz="900">
-                <a:solidFill>
-                  <a:srgbClr val="66BB6A"/>
-                </a:solidFill>
-                <a:latin typeface="Calibri"/>
-              </a:rPr>
-              <a:t>● </a:t>
-            </a:r>
-            <a:r>
-              <a:rPr b="1" sz="1400">
-                <a:solidFill>
-                  <a:srgbClr val="F3E9E2"/>
-                </a:solidFill>
-                <a:latin typeface="Calibri"/>
-              </a:rPr>
-              <a:t>HU-15: </a:t>
-            </a:r>
-            <a:r>
-              <a:rPr sz="1400">
-                <a:solidFill>
-                  <a:srgbClr val="BCAAA4"/>
-                </a:solidFill>
-                <a:latin typeface="Calibri"/>
-              </a:rPr>
-              <a:t>Verificación de documentos obligatorios · 3 pts · Sprint 3</a:t>
-            </a:r>
-          </a:p>
-          <a:p>
-            <a:pPr>
-              <a:spcAft>
-                <a:spcPts val="1000"/>
-              </a:spcAft>
-            </a:pPr>
-            <a:r>
-              <a:rPr sz="900">
-                <a:solidFill>
-                  <a:srgbClr val="66BB6A"/>
-                </a:solidFill>
-                <a:latin typeface="Calibri"/>
-              </a:rPr>
-              <a:t>● </a:t>
-            </a:r>
-            <a:r>
-              <a:rPr b="1" sz="1400">
-                <a:solidFill>
-                  <a:srgbClr val="F3E9E2"/>
-                </a:solidFill>
-                <a:latin typeface="Calibri"/>
-              </a:rPr>
-              <a:t>Aporte realizado hasta hoy: </a:t>
-            </a:r>
-            <a:r>
-              <a:rPr sz="1400">
-                <a:solidFill>
-                  <a:srgbClr val="BCAAA4"/>
-                </a:solidFill>
-                <a:latin typeface="Calibri"/>
-              </a:rPr>
-              <a:t>[COMPLETAR con Jira/Git]</a:t>
-            </a:r>
-          </a:p>
-        </p:txBody>
-      </p:sp>
-    </p:spTree>
-  </p:cSld>
-  <p:clrMapOvr>
-    <a:masterClrMapping/>
-  </p:clrMapOvr>
-</p:sld>
-</file>
-
-<file path=ppt/slides/slide12.xml><?xml version="1.0" encoding="utf-8"?>
-<p:sld xmlns:a="http://schemas.openxmlformats.org/drawingml/2006/main" xmlns:p="http://schemas.openxmlformats.org/presentationml/2006/main" xmlns:r="http://schemas.openxmlformats.org/officeDocument/2006/relationships">
-  <p:cSld>
-    <p:bg>
-      <p:bgPr>
-        <a:solidFill>
-          <a:srgbClr val="15110F"/>
-        </a:solidFill>
-        <a:effectLst/>
-      </p:bgPr>
-    </p:bg>
-    <p:spTree>
-      <p:nvGrpSpPr>
-        <p:cNvPr id="1" name=""/>
-        <p:cNvGrpSpPr/>
-        <p:nvPr/>
-      </p:nvGrpSpPr>
-      <p:grpSpPr/>
-      <p:sp>
-        <p:nvSpPr>
-          <p:cNvPr id="2" name="Rectangle 1"/>
-          <p:cNvSpPr/>
-          <p:nvPr/>
-        </p:nvSpPr>
-        <p:spPr>
-          <a:xfrm>
-            <a:off x="0" y="0"/>
-            <a:ext cx="164592" cy="6858000"/>
-          </a:xfrm>
-          <a:prstGeom prst="rect">
-            <a:avLst/>
-          </a:prstGeom>
-          <a:solidFill>
-            <a:srgbClr val="66BB6A"/>
-          </a:solidFill>
-          <a:ln>
-            <a:noFill/>
-          </a:ln>
-          <a:effectLst/>
-        </p:spPr>
-        <p:style>
-          <a:lnRef idx="1">
-            <a:schemeClr val="accent1"/>
-          </a:lnRef>
-          <a:fillRef idx="3">
-            <a:schemeClr val="accent1"/>
-          </a:fillRef>
-          <a:effectRef idx="2">
-            <a:schemeClr val="accent1"/>
-          </a:effectRef>
-          <a:fontRef idx="minor">
-            <a:schemeClr val="lt1"/>
-          </a:fontRef>
-        </p:style>
-        <p:txBody>
-          <a:bodyPr rtlCol="0" anchor="ctr"/>
-          <a:lstStyle/>
-          <a:p>
-            <a:pPr algn="ctr"/>
-          </a:p>
-        </p:txBody>
-      </p:sp>
-      <p:sp>
-        <p:nvSpPr>
-          <p:cNvPr id="3" name="TextBox 2"/>
-          <p:cNvSpPr txBox="1"/>
-          <p:nvPr/>
-        </p:nvSpPr>
-        <p:spPr>
-          <a:xfrm>
-            <a:off x="548640" y="274320"/>
-            <a:ext cx="10972800" cy="640080"/>
-          </a:xfrm>
-          <a:prstGeom prst="rect">
-            <a:avLst/>
-          </a:prstGeom>
-          <a:noFill/>
-        </p:spPr>
-        <p:txBody>
-          <a:bodyPr wrap="square" lIns="45720" rIns="45720" tIns="27432" bIns="27432" anchor="t">
-            <a:spAutoFit/>
-          </a:bodyPr>
-          <a:lstStyle/>
-          <a:p>
-            <a:pPr algn="l"/>
-            <a:r>
-              <a:rPr sz="3200" b="1">
-                <a:solidFill>
-                  <a:srgbClr val="F3E9E2"/>
-                </a:solidFill>
-                <a:latin typeface="Calibri"/>
-              </a:rPr>
-              <a:t>Alexander Rodríguez</a:t>
-            </a:r>
-          </a:p>
-        </p:txBody>
-      </p:sp>
-      <p:sp>
-        <p:nvSpPr>
-          <p:cNvPr id="4" name="TextBox 3"/>
-          <p:cNvSpPr txBox="1"/>
-          <p:nvPr/>
-        </p:nvSpPr>
-        <p:spPr>
-          <a:xfrm>
-            <a:off x="548640" y="896112"/>
-            <a:ext cx="10972800" cy="365760"/>
-          </a:xfrm>
-          <a:prstGeom prst="rect">
-            <a:avLst/>
-          </a:prstGeom>
-          <a:noFill/>
-        </p:spPr>
-        <p:txBody>
-          <a:bodyPr wrap="square" lIns="45720" rIns="45720" tIns="27432" bIns="27432" anchor="t">
-            <a:spAutoFit/>
-          </a:bodyPr>
-          <a:lstStyle/>
-          <a:p>
-            <a:pPr algn="l"/>
-            <a:r>
-              <a:rPr sz="1500" b="0">
-                <a:solidFill>
-                  <a:srgbClr val="A1887F"/>
-                </a:solidFill>
-                <a:latin typeface="Calibri"/>
-              </a:rPr>
-              <a:t>Responsabilidades planificadas y contribuciones</a:t>
-            </a:r>
-          </a:p>
-        </p:txBody>
-      </p:sp>
-      <p:sp>
-        <p:nvSpPr>
-          <p:cNvPr id="5" name="TextBox 4"/>
-          <p:cNvSpPr txBox="1"/>
-          <p:nvPr/>
-        </p:nvSpPr>
-        <p:spPr>
-          <a:xfrm>
-            <a:off x="548640" y="6446520"/>
-            <a:ext cx="7315200" cy="274320"/>
-          </a:xfrm>
-          <a:prstGeom prst="rect">
-            <a:avLst/>
-          </a:prstGeom>
-          <a:noFill/>
-        </p:spPr>
-        <p:txBody>
-          <a:bodyPr wrap="square" lIns="45720" rIns="45720" tIns="27432" bIns="27432" anchor="t">
-            <a:spAutoFit/>
-          </a:bodyPr>
-          <a:lstStyle/>
-          <a:p>
-            <a:pPr algn="l"/>
-            <a:r>
-              <a:rPr sz="1000" b="0">
-                <a:solidFill>
-                  <a:srgbClr val="BCAAA4"/>
-                </a:solidFill>
-                <a:latin typeface="Calibri"/>
-              </a:rPr>
-              <a:t>CoffeeExport Manager · RITECH SAS · Sprint 2</a:t>
-            </a:r>
-          </a:p>
-        </p:txBody>
-      </p:sp>
-      <p:sp>
-        <p:nvSpPr>
-          <p:cNvPr id="6" name="TextBox 5"/>
-          <p:cNvSpPr txBox="1"/>
-          <p:nvPr/>
-        </p:nvSpPr>
-        <p:spPr>
-          <a:xfrm>
-            <a:off x="10881360" y="6446520"/>
-            <a:ext cx="914400" cy="274320"/>
-          </a:xfrm>
-          <a:prstGeom prst="rect">
-            <a:avLst/>
-          </a:prstGeom>
-          <a:noFill/>
-        </p:spPr>
-        <p:txBody>
-          <a:bodyPr wrap="square" lIns="45720" rIns="45720" tIns="27432" bIns="27432" anchor="t">
-            <a:spAutoFit/>
-          </a:bodyPr>
-          <a:lstStyle/>
-          <a:p>
-            <a:pPr algn="r"/>
-            <a:r>
-              <a:rPr sz="1000" b="0">
-                <a:solidFill>
-                  <a:srgbClr val="BCAAA4"/>
-                </a:solidFill>
-                <a:latin typeface="Calibri"/>
-              </a:rPr>
-              <a:t>12</a:t>
-            </a:r>
-          </a:p>
-        </p:txBody>
-      </p:sp>
-      <p:sp>
-        <p:nvSpPr>
-          <p:cNvPr id="7" name="Rounded Rectangle 6"/>
-          <p:cNvSpPr/>
-          <p:nvPr/>
-        </p:nvSpPr>
-        <p:spPr>
-          <a:xfrm>
-            <a:off x="548640" y="1463040"/>
-            <a:ext cx="5394960" cy="1920240"/>
-          </a:xfrm>
-          <a:prstGeom prst="roundRect">
-            <a:avLst>
-              <a:gd name="adj" fmla="val 6000"/>
-            </a:avLst>
-          </a:prstGeom>
-          <a:solidFill>
-            <a:srgbClr val="221A16"/>
-          </a:solidFill>
-          <a:ln>
-            <a:noFill/>
-          </a:ln>
-          <a:effectLst/>
-        </p:spPr>
-        <p:style>
-          <a:lnRef idx="1">
-            <a:schemeClr val="accent1"/>
-          </a:lnRef>
-          <a:fillRef idx="3">
-            <a:schemeClr val="accent1"/>
-          </a:fillRef>
-          <a:effectRef idx="2">
-            <a:schemeClr val="accent1"/>
-          </a:effectRef>
-          <a:fontRef idx="minor">
-            <a:schemeClr val="lt1"/>
-          </a:fontRef>
-        </p:style>
-        <p:txBody>
-          <a:bodyPr rtlCol="0" anchor="ctr"/>
-          <a:lstStyle/>
-          <a:p>
-            <a:pPr algn="ctr"/>
-          </a:p>
-        </p:txBody>
-      </p:sp>
-      <p:sp>
-        <p:nvSpPr>
-          <p:cNvPr id="8" name="TextBox 7"/>
-          <p:cNvSpPr txBox="1"/>
-          <p:nvPr/>
-        </p:nvSpPr>
-        <p:spPr>
-          <a:xfrm>
-            <a:off x="731520" y="1554480"/>
-            <a:ext cx="5029200" cy="365760"/>
-          </a:xfrm>
-          <a:prstGeom prst="rect">
-            <a:avLst/>
-          </a:prstGeom>
-          <a:noFill/>
-        </p:spPr>
-        <p:txBody>
-          <a:bodyPr wrap="square" lIns="45720" rIns="45720" tIns="27432" bIns="27432" anchor="t">
-            <a:spAutoFit/>
-          </a:bodyPr>
-          <a:lstStyle/>
-          <a:p>
-            <a:pPr algn="l"/>
-            <a:r>
-              <a:rPr sz="1600" b="1">
-                <a:solidFill>
-                  <a:srgbClr val="66BB6A"/>
-                </a:solidFill>
-                <a:latin typeface="Calibri"/>
-              </a:rPr>
-              <a:t>Módulos / áreas planificados</a:t>
-            </a:r>
-          </a:p>
-        </p:txBody>
-      </p:sp>
-      <p:sp>
-        <p:nvSpPr>
-          <p:cNvPr id="9" name="TextBox 8"/>
-          <p:cNvSpPr txBox="1"/>
-          <p:nvPr/>
-        </p:nvSpPr>
-        <p:spPr>
-          <a:xfrm>
-            <a:off x="731520" y="1965960"/>
-            <a:ext cx="5029200" cy="548640"/>
-          </a:xfrm>
-          <a:prstGeom prst="rect">
-            <a:avLst/>
-          </a:prstGeom>
-          <a:noFill/>
-        </p:spPr>
-        <p:txBody>
-          <a:bodyPr wrap="square" lIns="45720" rIns="45720" tIns="27432" bIns="27432" anchor="t">
-            <a:spAutoFit/>
-          </a:bodyPr>
-          <a:lstStyle/>
-          <a:p>
-            <a:pPr algn="l"/>
-            <a:r>
-              <a:rPr sz="1800" b="1">
-                <a:solidFill>
-                  <a:srgbClr val="F3E9E2"/>
-                </a:solidFill>
-                <a:latin typeface="Calibri"/>
-              </a:rPr>
-              <a:t>Inventario y Exportaciones</a:t>
-            </a:r>
-          </a:p>
-        </p:txBody>
-      </p:sp>
-      <p:sp>
-        <p:nvSpPr>
-          <p:cNvPr id="10" name="TextBox 9"/>
-          <p:cNvSpPr txBox="1"/>
-          <p:nvPr/>
-        </p:nvSpPr>
-        <p:spPr>
-          <a:xfrm>
-            <a:off x="731520" y="2697480"/>
-            <a:ext cx="5029200" cy="640080"/>
-          </a:xfrm>
-          <a:prstGeom prst="rect">
-            <a:avLst/>
-          </a:prstGeom>
-          <a:noFill/>
-        </p:spPr>
-        <p:txBody>
-          <a:bodyPr wrap="square" lIns="45720" rIns="45720" tIns="27432" bIns="27432" anchor="t">
-            <a:spAutoFit/>
-          </a:bodyPr>
-          <a:lstStyle/>
-          <a:p>
-            <a:pPr algn="l"/>
-            <a:r>
-              <a:rPr sz="1200" b="0">
-                <a:solidFill>
-                  <a:srgbClr val="BCAAA4"/>
-                </a:solidFill>
-                <a:latin typeface="Calibri"/>
-              </a:rPr>
-              <a:t>Historias: HU-04, HU-09, HU-10, HU-11, HU-12, HU-13</a:t>
-            </a:r>
-          </a:p>
-        </p:txBody>
-      </p:sp>
-      <p:sp>
-        <p:nvSpPr>
-          <p:cNvPr id="11" name="Rounded Rectangle 10"/>
-          <p:cNvSpPr/>
-          <p:nvPr/>
-        </p:nvSpPr>
-        <p:spPr>
-          <a:xfrm>
-            <a:off x="548640" y="3566160"/>
-            <a:ext cx="5394960" cy="2651760"/>
-          </a:xfrm>
-          <a:prstGeom prst="roundRect">
-            <a:avLst>
-              <a:gd name="adj" fmla="val 6000"/>
-            </a:avLst>
-          </a:prstGeom>
-          <a:solidFill>
-            <a:srgbClr val="221A16"/>
-          </a:solidFill>
-          <a:ln>
-            <a:noFill/>
-          </a:ln>
-          <a:effectLst/>
-        </p:spPr>
-        <p:style>
-          <a:lnRef idx="1">
-            <a:schemeClr val="accent1"/>
-          </a:lnRef>
-          <a:fillRef idx="3">
-            <a:schemeClr val="accent1"/>
-          </a:fillRef>
-          <a:effectRef idx="2">
-            <a:schemeClr val="accent1"/>
-          </a:effectRef>
-          <a:fontRef idx="minor">
-            <a:schemeClr val="lt1"/>
-          </a:fontRef>
-        </p:style>
-        <p:txBody>
-          <a:bodyPr rtlCol="0" anchor="ctr"/>
-          <a:lstStyle/>
-          <a:p>
-            <a:pPr algn="ctr"/>
-          </a:p>
-        </p:txBody>
-      </p:sp>
-      <p:sp>
-        <p:nvSpPr>
-          <p:cNvPr id="12" name="TextBox 11"/>
-          <p:cNvSpPr txBox="1"/>
-          <p:nvPr/>
-        </p:nvSpPr>
-        <p:spPr>
-          <a:xfrm>
-            <a:off x="731520" y="3657600"/>
-            <a:ext cx="5029200" cy="365760"/>
-          </a:xfrm>
-          <a:prstGeom prst="rect">
-            <a:avLst/>
-          </a:prstGeom>
-          <a:noFill/>
-        </p:spPr>
-        <p:txBody>
-          <a:bodyPr wrap="square" lIns="45720" rIns="45720" tIns="27432" bIns="27432" anchor="t">
-            <a:spAutoFit/>
-          </a:bodyPr>
-          <a:lstStyle/>
-          <a:p>
-            <a:pPr algn="l"/>
-            <a:r>
-              <a:rPr sz="1600" b="1">
-                <a:solidFill>
-                  <a:srgbClr val="66BB6A"/>
-                </a:solidFill>
-                <a:latin typeface="Calibri"/>
-              </a:rPr>
-              <a:t>Plan de pruebas</a:t>
-            </a:r>
-          </a:p>
-        </p:txBody>
-      </p:sp>
-      <p:sp>
-        <p:nvSpPr>
-          <p:cNvPr id="13" name="TextBox 12"/>
-          <p:cNvSpPr txBox="1"/>
-          <p:nvPr/>
-        </p:nvSpPr>
-        <p:spPr>
-          <a:xfrm>
-            <a:off x="731520" y="4069080"/>
-            <a:ext cx="5029200" cy="2103120"/>
-          </a:xfrm>
-          <a:prstGeom prst="rect">
-            <a:avLst/>
-          </a:prstGeom>
-          <a:noFill/>
-        </p:spPr>
-        <p:txBody>
-          <a:bodyPr wrap="square" lIns="45720">
-            <a:spAutoFit/>
-          </a:bodyPr>
-          <a:lstStyle/>
-          <a:p>
-            <a:pPr>
-              <a:spcAft>
-                <a:spcPts val="600"/>
-              </a:spcAft>
-            </a:pPr>
-            <a:r>
-              <a:rPr sz="800">
-                <a:solidFill>
-                  <a:srgbClr val="66BB6A"/>
-                </a:solidFill>
-                <a:latin typeface="Calibri"/>
-              </a:rPr>
-              <a:t>● </a:t>
-            </a:r>
-            <a:r>
-              <a:rPr b="1" sz="1300">
-                <a:solidFill>
-                  <a:srgbClr val="F3E9E2"/>
-                </a:solidFill>
-                <a:latin typeface="Calibri"/>
-              </a:rPr>
-              <a:t>Casos asignados: </a:t>
-            </a:r>
-            <a:r>
-              <a:rPr sz="1300">
-                <a:solidFill>
-                  <a:srgbClr val="BCAAA4"/>
-                </a:solidFill>
-                <a:latin typeface="Calibri"/>
-              </a:rPr>
-              <a:t>10</a:t>
-            </a:r>
-          </a:p>
-          <a:p>
-            <a:pPr>
-              <a:spcAft>
-                <a:spcPts val="600"/>
-              </a:spcAft>
-            </a:pPr>
-            <a:r>
-              <a:rPr sz="800">
-                <a:solidFill>
-                  <a:srgbClr val="66BB6A"/>
-                </a:solidFill>
-                <a:latin typeface="Calibri"/>
-              </a:rPr>
-              <a:t>● </a:t>
-            </a:r>
-            <a:r>
-              <a:rPr b="1" sz="1300">
-                <a:solidFill>
-                  <a:srgbClr val="F3E9E2"/>
-                </a:solidFill>
-                <a:latin typeface="Calibri"/>
-              </a:rPr>
-              <a:t>De Sprint 1: </a:t>
-            </a:r>
-            <a:r>
-              <a:rPr sz="1300">
-                <a:solidFill>
-                  <a:srgbClr val="BCAAA4"/>
-                </a:solidFill>
-                <a:latin typeface="Calibri"/>
-              </a:rPr>
-              <a:t>7 casos</a:t>
-            </a:r>
-          </a:p>
-          <a:p>
-            <a:pPr>
-              <a:spcAft>
-                <a:spcPts val="600"/>
-              </a:spcAft>
-            </a:pPr>
-            <a:r>
-              <a:rPr sz="800">
-                <a:solidFill>
-                  <a:srgbClr val="66BB6A"/>
-                </a:solidFill>
-                <a:latin typeface="Calibri"/>
-              </a:rPr>
-              <a:t>● </a:t>
-            </a:r>
-            <a:r>
-              <a:rPr b="1" sz="1300">
-                <a:solidFill>
-                  <a:srgbClr val="F3E9E2"/>
-                </a:solidFill>
-                <a:latin typeface="Calibri"/>
-              </a:rPr>
-              <a:t>IDs: </a:t>
-            </a:r>
-            <a:r>
-              <a:rPr sz="1300">
-                <a:solidFill>
-                  <a:srgbClr val="BCAAA4"/>
-                </a:solidFill>
-                <a:latin typeface="Calibri"/>
-              </a:rPr>
-              <a:t>QA012, QA013, QA014, QA015, QA016, QC008, QC009, QC018…</a:t>
-            </a:r>
-          </a:p>
-        </p:txBody>
-      </p:sp>
-      <p:sp>
-        <p:nvSpPr>
-          <p:cNvPr id="14" name="Rounded Rectangle 13"/>
-          <p:cNvSpPr/>
-          <p:nvPr/>
-        </p:nvSpPr>
-        <p:spPr>
-          <a:xfrm>
-            <a:off x="6126480" y="1463040"/>
-            <a:ext cx="5532120" cy="4754880"/>
-          </a:xfrm>
-          <a:prstGeom prst="roundRect">
-            <a:avLst>
-              <a:gd name="adj" fmla="val 6000"/>
-            </a:avLst>
-          </a:prstGeom>
-          <a:solidFill>
-            <a:srgbClr val="221A16"/>
-          </a:solidFill>
-          <a:ln>
-            <a:noFill/>
-          </a:ln>
-          <a:effectLst/>
-        </p:spPr>
-        <p:style>
-          <a:lnRef idx="1">
-            <a:schemeClr val="accent1"/>
-          </a:lnRef>
-          <a:fillRef idx="3">
-            <a:schemeClr val="accent1"/>
-          </a:fillRef>
-          <a:effectRef idx="2">
-            <a:schemeClr val="accent1"/>
-          </a:effectRef>
-          <a:fontRef idx="minor">
-            <a:schemeClr val="lt1"/>
-          </a:fontRef>
-        </p:style>
-        <p:txBody>
-          <a:bodyPr rtlCol="0" anchor="ctr"/>
-          <a:lstStyle/>
-          <a:p>
-            <a:pPr algn="ctr"/>
-          </a:p>
-        </p:txBody>
-      </p:sp>
-      <p:sp>
-        <p:nvSpPr>
-          <p:cNvPr id="15" name="TextBox 14"/>
-          <p:cNvSpPr txBox="1"/>
-          <p:nvPr/>
-        </p:nvSpPr>
-        <p:spPr>
-          <a:xfrm>
-            <a:off x="6309360" y="1554480"/>
-            <a:ext cx="5212080" cy="365760"/>
-          </a:xfrm>
-          <a:prstGeom prst="rect">
-            <a:avLst/>
-          </a:prstGeom>
-          <a:noFill/>
-        </p:spPr>
-        <p:txBody>
-          <a:bodyPr wrap="square" lIns="45720" rIns="45720" tIns="27432" bIns="27432" anchor="t">
-            <a:spAutoFit/>
-          </a:bodyPr>
-          <a:lstStyle/>
-          <a:p>
-            <a:pPr algn="l"/>
-            <a:r>
-              <a:rPr sz="1600" b="1">
-                <a:solidFill>
-                  <a:srgbClr val="66BB6A"/>
-                </a:solidFill>
-                <a:latin typeface="Calibri"/>
-              </a:rPr>
-              <a:t>Compromisos y contribuciones</a:t>
-            </a:r>
-          </a:p>
-        </p:txBody>
-      </p:sp>
-      <p:sp>
-        <p:nvSpPr>
-          <p:cNvPr id="16" name="TextBox 15"/>
-          <p:cNvSpPr txBox="1"/>
-          <p:nvPr/>
-        </p:nvSpPr>
-        <p:spPr>
-          <a:xfrm>
-            <a:off x="6309360" y="2011680"/>
-            <a:ext cx="5212080" cy="4114800"/>
-          </a:xfrm>
-          <a:prstGeom prst="rect">
-            <a:avLst/>
-          </a:prstGeom>
-          <a:noFill/>
-        </p:spPr>
-        <p:txBody>
-          <a:bodyPr wrap="square" lIns="45720">
-            <a:spAutoFit/>
-          </a:bodyPr>
-          <a:lstStyle/>
-          <a:p>
-            <a:pPr>
-              <a:spcAft>
-                <a:spcPts val="1000"/>
-              </a:spcAft>
-            </a:pPr>
-            <a:r>
-              <a:rPr sz="900">
-                <a:solidFill>
-                  <a:srgbClr val="66BB6A"/>
-                </a:solidFill>
-                <a:latin typeface="Calibri"/>
-              </a:rPr>
-              <a:t>● </a:t>
-            </a:r>
-            <a:r>
-              <a:rPr b="1" sz="1400">
-                <a:solidFill>
-                  <a:srgbClr val="F3E9E2"/>
-                </a:solidFill>
-                <a:latin typeface="Calibri"/>
-              </a:rPr>
-              <a:t>HU-09: </a:t>
-            </a:r>
-            <a:r>
-              <a:rPr sz="1400">
-                <a:solidFill>
-                  <a:srgbClr val="BCAAA4"/>
-                </a:solidFill>
-                <a:latin typeface="Calibri"/>
-              </a:rPr>
-              <a:t>Alerta de stock mínimo · 3 pts · Sprint 3</a:t>
-            </a:r>
-          </a:p>
-          <a:p>
-            <a:pPr>
-              <a:spcAft>
-                <a:spcPts val="1000"/>
-              </a:spcAft>
-            </a:pPr>
-            <a:r>
-              <a:rPr sz="900">
-                <a:solidFill>
-                  <a:srgbClr val="66BB6A"/>
-                </a:solidFill>
-                <a:latin typeface="Calibri"/>
-              </a:rPr>
-              <a:t>● </a:t>
-            </a:r>
-            <a:r>
-              <a:rPr b="1" sz="1400">
-                <a:solidFill>
-                  <a:srgbClr val="F3E9E2"/>
-                </a:solidFill>
-                <a:latin typeface="Calibri"/>
-              </a:rPr>
-              <a:t>HU-11: </a:t>
-            </a:r>
-            <a:r>
-              <a:rPr sz="1400">
-                <a:solidFill>
-                  <a:srgbClr val="BCAAA4"/>
-                </a:solidFill>
-                <a:latin typeface="Calibri"/>
-              </a:rPr>
-              <a:t>Crear exportación · 8 pts · Sprint 3</a:t>
-            </a:r>
-          </a:p>
-          <a:p>
-            <a:pPr>
-              <a:spcAft>
-                <a:spcPts val="1000"/>
-              </a:spcAft>
-            </a:pPr>
-            <a:r>
-              <a:rPr sz="900">
-                <a:solidFill>
-                  <a:srgbClr val="66BB6A"/>
-                </a:solidFill>
-                <a:latin typeface="Calibri"/>
-              </a:rPr>
-              <a:t>● </a:t>
-            </a:r>
-            <a:r>
-              <a:rPr b="1" sz="1400">
-                <a:solidFill>
-                  <a:srgbClr val="F3E9E2"/>
-                </a:solidFill>
-                <a:latin typeface="Calibri"/>
-              </a:rPr>
-              <a:t>HU-12: </a:t>
-            </a:r>
-            <a:r>
-              <a:rPr sz="1400">
-                <a:solidFill>
-                  <a:srgbClr val="BCAAA4"/>
-                </a:solidFill>
-                <a:latin typeface="Calibri"/>
-              </a:rPr>
-              <a:t>Seguimiento del estado de la exportación · 5 pts · Sprint 3</a:t>
-            </a:r>
-          </a:p>
-          <a:p>
-            <a:pPr>
-              <a:spcAft>
-                <a:spcPts val="1000"/>
-              </a:spcAft>
-            </a:pPr>
-            <a:r>
-              <a:rPr sz="900">
-                <a:solidFill>
-                  <a:srgbClr val="66BB6A"/>
-                </a:solidFill>
-                <a:latin typeface="Calibri"/>
-              </a:rPr>
-              <a:t>● </a:t>
-            </a:r>
-            <a:r>
-              <a:rPr b="1" sz="1400">
-                <a:solidFill>
-                  <a:srgbClr val="F3E9E2"/>
-                </a:solidFill>
-                <a:latin typeface="Calibri"/>
-              </a:rPr>
-              <a:t>HU-10: </a:t>
-            </a:r>
-            <a:r>
-              <a:rPr sz="1400">
-                <a:solidFill>
-                  <a:srgbClr val="BCAAA4"/>
-                </a:solidFill>
-                <a:latin typeface="Calibri"/>
-              </a:rPr>
-              <a:t>Historial de movimientos · 3 pts · Sprint 4</a:t>
-            </a:r>
-          </a:p>
-          <a:p>
-            <a:pPr>
-              <a:spcAft>
-                <a:spcPts val="1000"/>
-              </a:spcAft>
-            </a:pPr>
-            <a:r>
-              <a:rPr sz="900">
-                <a:solidFill>
-                  <a:srgbClr val="66BB6A"/>
-                </a:solidFill>
-                <a:latin typeface="Calibri"/>
-              </a:rPr>
-              <a:t>● </a:t>
-            </a:r>
-            <a:r>
-              <a:rPr b="1" sz="1400">
-                <a:solidFill>
-                  <a:srgbClr val="F3E9E2"/>
-                </a:solidFill>
-                <a:latin typeface="Calibri"/>
-              </a:rPr>
-              <a:t>HU-13: </a:t>
-            </a:r>
-            <a:r>
-              <a:rPr sz="1400">
-                <a:solidFill>
-                  <a:srgbClr val="BCAAA4"/>
-                </a:solidFill>
-                <a:latin typeface="Calibri"/>
-              </a:rPr>
-              <a:t>Listado de exportaciones · 3 pts · Sprint 4</a:t>
-            </a:r>
-          </a:p>
-          <a:p>
-            <a:pPr>
-              <a:spcAft>
-                <a:spcPts val="1000"/>
-              </a:spcAft>
-            </a:pPr>
-            <a:r>
-              <a:rPr sz="900">
-                <a:solidFill>
-                  <a:srgbClr val="66BB6A"/>
-                </a:solidFill>
-                <a:latin typeface="Calibri"/>
-              </a:rPr>
-              <a:t>● </a:t>
-            </a:r>
-            <a:r>
-              <a:rPr b="1" sz="1400">
-                <a:solidFill>
-                  <a:srgbClr val="F3E9E2"/>
-                </a:solidFill>
-                <a:latin typeface="Calibri"/>
-              </a:rPr>
-              <a:t>Aporte realizado hasta hoy: </a:t>
-            </a:r>
-            <a:r>
-              <a:rPr sz="1400">
-                <a:solidFill>
-                  <a:srgbClr val="BCAAA4"/>
-                </a:solidFill>
-                <a:latin typeface="Calibri"/>
-              </a:rPr>
-              <a:t>[COMPLETAR con Jira/Git]</a:t>
-            </a:r>
-          </a:p>
-        </p:txBody>
-      </p:sp>
-    </p:spTree>
-  </p:cSld>
-  <p:clrMapOvr>
-    <a:masterClrMapping/>
-  </p:clrMapOvr>
-</p:sld>
-</file>
-
-<file path=ppt/slides/slide13.xml><?xml version="1.0" encoding="utf-8"?>
-<p:sld xmlns:a="http://schemas.openxmlformats.org/drawingml/2006/main" xmlns:p="http://schemas.openxmlformats.org/presentationml/2006/main" xmlns:r="http://schemas.openxmlformats.org/officeDocument/2006/relationships">
-  <p:cSld>
-    <p:bg>
-      <p:bgPr>
-        <a:solidFill>
-          <a:srgbClr val="15110F"/>
-        </a:solidFill>
-        <a:effectLst/>
-      </p:bgPr>
-    </p:bg>
-    <p:spTree>
-      <p:nvGrpSpPr>
-        <p:cNvPr id="1" name=""/>
-        <p:cNvGrpSpPr/>
-        <p:nvPr/>
-      </p:nvGrpSpPr>
-      <p:grpSpPr/>
-      <p:sp>
-        <p:nvSpPr>
-          <p:cNvPr id="2" name="Rectangle 1"/>
-          <p:cNvSpPr/>
-          <p:nvPr/>
-        </p:nvSpPr>
-        <p:spPr>
-          <a:xfrm>
-            <a:off x="0" y="0"/>
-            <a:ext cx="164592" cy="6858000"/>
-          </a:xfrm>
-          <a:prstGeom prst="rect">
-            <a:avLst/>
-          </a:prstGeom>
-          <a:solidFill>
-            <a:srgbClr val="66BB6A"/>
-          </a:solidFill>
-          <a:ln>
-            <a:noFill/>
-          </a:ln>
-          <a:effectLst/>
-        </p:spPr>
-        <p:style>
-          <a:lnRef idx="1">
-            <a:schemeClr val="accent1"/>
-          </a:lnRef>
-          <a:fillRef idx="3">
-            <a:schemeClr val="accent1"/>
-          </a:fillRef>
-          <a:effectRef idx="2">
-            <a:schemeClr val="accent1"/>
-          </a:effectRef>
-          <a:fontRef idx="minor">
-            <a:schemeClr val="lt1"/>
-          </a:fontRef>
-        </p:style>
-        <p:txBody>
-          <a:bodyPr rtlCol="0" anchor="ctr"/>
-          <a:lstStyle/>
-          <a:p>
-            <a:pPr algn="ctr"/>
-          </a:p>
-        </p:txBody>
-      </p:sp>
-      <p:sp>
-        <p:nvSpPr>
-          <p:cNvPr id="3" name="TextBox 2"/>
-          <p:cNvSpPr txBox="1"/>
-          <p:nvPr/>
-        </p:nvSpPr>
-        <p:spPr>
-          <a:xfrm>
-            <a:off x="548640" y="274320"/>
-            <a:ext cx="10972800" cy="640080"/>
-          </a:xfrm>
-          <a:prstGeom prst="rect">
-            <a:avLst/>
-          </a:prstGeom>
-          <a:noFill/>
-        </p:spPr>
-        <p:txBody>
-          <a:bodyPr wrap="square" lIns="45720" rIns="45720" tIns="27432" bIns="27432" anchor="t">
-            <a:spAutoFit/>
-          </a:bodyPr>
-          <a:lstStyle/>
-          <a:p>
-            <a:pPr algn="l"/>
-            <a:r>
-              <a:rPr sz="3200" b="1">
-                <a:solidFill>
-                  <a:srgbClr val="F3E9E2"/>
-                </a:solidFill>
-                <a:latin typeface="Calibri"/>
-              </a:rPr>
-              <a:t>Mario Zambrano</a:t>
-            </a:r>
-          </a:p>
-        </p:txBody>
-      </p:sp>
-      <p:sp>
-        <p:nvSpPr>
-          <p:cNvPr id="4" name="TextBox 3"/>
-          <p:cNvSpPr txBox="1"/>
-          <p:nvPr/>
-        </p:nvSpPr>
-        <p:spPr>
-          <a:xfrm>
-            <a:off x="548640" y="896112"/>
-            <a:ext cx="10972800" cy="365760"/>
-          </a:xfrm>
-          <a:prstGeom prst="rect">
-            <a:avLst/>
-          </a:prstGeom>
-          <a:noFill/>
-        </p:spPr>
-        <p:txBody>
-          <a:bodyPr wrap="square" lIns="45720" rIns="45720" tIns="27432" bIns="27432" anchor="t">
-            <a:spAutoFit/>
-          </a:bodyPr>
-          <a:lstStyle/>
-          <a:p>
-            <a:pPr algn="l"/>
-            <a:r>
-              <a:rPr sz="1500" b="0">
-                <a:solidFill>
-                  <a:srgbClr val="A1887F"/>
-                </a:solidFill>
-                <a:latin typeface="Calibri"/>
-              </a:rPr>
-              <a:t>Responsabilidades planificadas y contribuciones</a:t>
-            </a:r>
-          </a:p>
-        </p:txBody>
-      </p:sp>
-      <p:sp>
-        <p:nvSpPr>
-          <p:cNvPr id="5" name="TextBox 4"/>
-          <p:cNvSpPr txBox="1"/>
-          <p:nvPr/>
-        </p:nvSpPr>
-        <p:spPr>
-          <a:xfrm>
-            <a:off x="548640" y="6446520"/>
-            <a:ext cx="7315200" cy="274320"/>
-          </a:xfrm>
-          <a:prstGeom prst="rect">
-            <a:avLst/>
-          </a:prstGeom>
-          <a:noFill/>
-        </p:spPr>
-        <p:txBody>
-          <a:bodyPr wrap="square" lIns="45720" rIns="45720" tIns="27432" bIns="27432" anchor="t">
-            <a:spAutoFit/>
-          </a:bodyPr>
-          <a:lstStyle/>
-          <a:p>
-            <a:pPr algn="l"/>
-            <a:r>
-              <a:rPr sz="1000" b="0">
-                <a:solidFill>
-                  <a:srgbClr val="BCAAA4"/>
-                </a:solidFill>
-                <a:latin typeface="Calibri"/>
-              </a:rPr>
-              <a:t>CoffeeExport Manager · RITECH SAS · Sprint 2</a:t>
-            </a:r>
-          </a:p>
-        </p:txBody>
-      </p:sp>
-      <p:sp>
-        <p:nvSpPr>
-          <p:cNvPr id="6" name="TextBox 5"/>
-          <p:cNvSpPr txBox="1"/>
-          <p:nvPr/>
-        </p:nvSpPr>
-        <p:spPr>
-          <a:xfrm>
-            <a:off x="10881360" y="6446520"/>
-            <a:ext cx="914400" cy="274320"/>
-          </a:xfrm>
-          <a:prstGeom prst="rect">
-            <a:avLst/>
-          </a:prstGeom>
-          <a:noFill/>
-        </p:spPr>
-        <p:txBody>
-          <a:bodyPr wrap="square" lIns="45720" rIns="45720" tIns="27432" bIns="27432" anchor="t">
-            <a:spAutoFit/>
-          </a:bodyPr>
-          <a:lstStyle/>
-          <a:p>
-            <a:pPr algn="r"/>
-            <a:r>
-              <a:rPr sz="1000" b="0">
-                <a:solidFill>
-                  <a:srgbClr val="BCAAA4"/>
-                </a:solidFill>
-                <a:latin typeface="Calibri"/>
-              </a:rPr>
-              <a:t>13</a:t>
-            </a:r>
-          </a:p>
-        </p:txBody>
-      </p:sp>
-      <p:sp>
-        <p:nvSpPr>
-          <p:cNvPr id="7" name="Rounded Rectangle 6"/>
-          <p:cNvSpPr/>
-          <p:nvPr/>
-        </p:nvSpPr>
-        <p:spPr>
-          <a:xfrm>
-            <a:off x="548640" y="1463040"/>
-            <a:ext cx="5394960" cy="1920240"/>
-          </a:xfrm>
-          <a:prstGeom prst="roundRect">
-            <a:avLst>
-              <a:gd name="adj" fmla="val 6000"/>
-            </a:avLst>
-          </a:prstGeom>
-          <a:solidFill>
-            <a:srgbClr val="221A16"/>
-          </a:solidFill>
-          <a:ln>
-            <a:noFill/>
-          </a:ln>
-          <a:effectLst/>
-        </p:spPr>
-        <p:style>
-          <a:lnRef idx="1">
-            <a:schemeClr val="accent1"/>
-          </a:lnRef>
-          <a:fillRef idx="3">
-            <a:schemeClr val="accent1"/>
-          </a:fillRef>
-          <a:effectRef idx="2">
-            <a:schemeClr val="accent1"/>
-          </a:effectRef>
-          <a:fontRef idx="minor">
-            <a:schemeClr val="lt1"/>
-          </a:fontRef>
-        </p:style>
-        <p:txBody>
-          <a:bodyPr rtlCol="0" anchor="ctr"/>
-          <a:lstStyle/>
-          <a:p>
-            <a:pPr algn="ctr"/>
-          </a:p>
-        </p:txBody>
-      </p:sp>
-      <p:sp>
-        <p:nvSpPr>
-          <p:cNvPr id="8" name="TextBox 7"/>
-          <p:cNvSpPr txBox="1"/>
-          <p:nvPr/>
-        </p:nvSpPr>
-        <p:spPr>
-          <a:xfrm>
-            <a:off x="731520" y="1554480"/>
-            <a:ext cx="5029200" cy="365760"/>
-          </a:xfrm>
-          <a:prstGeom prst="rect">
-            <a:avLst/>
-          </a:prstGeom>
-          <a:noFill/>
-        </p:spPr>
-        <p:txBody>
-          <a:bodyPr wrap="square" lIns="45720" rIns="45720" tIns="27432" bIns="27432" anchor="t">
-            <a:spAutoFit/>
-          </a:bodyPr>
-          <a:lstStyle/>
-          <a:p>
-            <a:pPr algn="l"/>
-            <a:r>
-              <a:rPr sz="1600" b="1">
-                <a:solidFill>
-                  <a:srgbClr val="66BB6A"/>
-                </a:solidFill>
-                <a:latin typeface="Calibri"/>
-              </a:rPr>
-              <a:t>Módulos / áreas planificados</a:t>
-            </a:r>
-          </a:p>
-        </p:txBody>
-      </p:sp>
-      <p:sp>
-        <p:nvSpPr>
-          <p:cNvPr id="9" name="TextBox 8"/>
-          <p:cNvSpPr txBox="1"/>
-          <p:nvPr/>
-        </p:nvSpPr>
-        <p:spPr>
-          <a:xfrm>
-            <a:off x="731520" y="1965960"/>
-            <a:ext cx="5029200" cy="548640"/>
-          </a:xfrm>
-          <a:prstGeom prst="rect">
-            <a:avLst/>
-          </a:prstGeom>
-          <a:noFill/>
-        </p:spPr>
-        <p:txBody>
-          <a:bodyPr wrap="square" lIns="45720" rIns="45720" tIns="27432" bIns="27432" anchor="t">
-            <a:spAutoFit/>
-          </a:bodyPr>
-          <a:lstStyle/>
-          <a:p>
-            <a:pPr algn="l"/>
-            <a:r>
-              <a:rPr sz="1800" b="1">
-                <a:solidFill>
-                  <a:srgbClr val="F3E9E2"/>
-                </a:solidFill>
-                <a:latin typeface="Calibri"/>
-              </a:rPr>
-              <a:t>Reportes y pruebas de seguridad transversales</a:t>
-            </a:r>
-          </a:p>
-        </p:txBody>
-      </p:sp>
-      <p:sp>
-        <p:nvSpPr>
-          <p:cNvPr id="10" name="TextBox 9"/>
-          <p:cNvSpPr txBox="1"/>
-          <p:nvPr/>
-        </p:nvSpPr>
-        <p:spPr>
-          <a:xfrm>
-            <a:off x="731520" y="2697480"/>
-            <a:ext cx="5029200" cy="640080"/>
-          </a:xfrm>
-          <a:prstGeom prst="rect">
-            <a:avLst/>
-          </a:prstGeom>
-          <a:noFill/>
-        </p:spPr>
-        <p:txBody>
-          <a:bodyPr wrap="square" lIns="45720" rIns="45720" tIns="27432" bIns="27432" anchor="t">
-            <a:spAutoFit/>
-          </a:bodyPr>
-          <a:lstStyle/>
-          <a:p>
-            <a:pPr algn="l"/>
-            <a:r>
-              <a:rPr sz="1200" b="0">
-                <a:solidFill>
-                  <a:srgbClr val="BCAAA4"/>
-                </a:solidFill>
-                <a:latin typeface="Calibri"/>
-              </a:rPr>
-              <a:t>Historias: HU-18, HU-19</a:t>
-            </a:r>
-          </a:p>
-        </p:txBody>
-      </p:sp>
-      <p:sp>
-        <p:nvSpPr>
-          <p:cNvPr id="11" name="Rounded Rectangle 10"/>
-          <p:cNvSpPr/>
-          <p:nvPr/>
-        </p:nvSpPr>
-        <p:spPr>
-          <a:xfrm>
-            <a:off x="548640" y="3566160"/>
-            <a:ext cx="5394960" cy="2651760"/>
-          </a:xfrm>
-          <a:prstGeom prst="roundRect">
-            <a:avLst>
-              <a:gd name="adj" fmla="val 6000"/>
-            </a:avLst>
-          </a:prstGeom>
-          <a:solidFill>
-            <a:srgbClr val="221A16"/>
-          </a:solidFill>
-          <a:ln>
-            <a:noFill/>
-          </a:ln>
-          <a:effectLst/>
-        </p:spPr>
-        <p:style>
-          <a:lnRef idx="1">
-            <a:schemeClr val="accent1"/>
-          </a:lnRef>
-          <a:fillRef idx="3">
-            <a:schemeClr val="accent1"/>
-          </a:fillRef>
-          <a:effectRef idx="2">
-            <a:schemeClr val="accent1"/>
-          </a:effectRef>
-          <a:fontRef idx="minor">
-            <a:schemeClr val="lt1"/>
-          </a:fontRef>
-        </p:style>
-        <p:txBody>
-          <a:bodyPr rtlCol="0" anchor="ctr"/>
-          <a:lstStyle/>
-          <a:p>
-            <a:pPr algn="ctr"/>
-          </a:p>
-        </p:txBody>
-      </p:sp>
-      <p:sp>
-        <p:nvSpPr>
-          <p:cNvPr id="12" name="TextBox 11"/>
-          <p:cNvSpPr txBox="1"/>
-          <p:nvPr/>
-        </p:nvSpPr>
-        <p:spPr>
-          <a:xfrm>
-            <a:off x="731520" y="3657600"/>
-            <a:ext cx="5029200" cy="365760"/>
-          </a:xfrm>
-          <a:prstGeom prst="rect">
-            <a:avLst/>
-          </a:prstGeom>
-          <a:noFill/>
-        </p:spPr>
-        <p:txBody>
-          <a:bodyPr wrap="square" lIns="45720" rIns="45720" tIns="27432" bIns="27432" anchor="t">
-            <a:spAutoFit/>
-          </a:bodyPr>
-          <a:lstStyle/>
-          <a:p>
-            <a:pPr algn="l"/>
-            <a:r>
-              <a:rPr sz="1600" b="1">
-                <a:solidFill>
-                  <a:srgbClr val="66BB6A"/>
-                </a:solidFill>
-                <a:latin typeface="Calibri"/>
-              </a:rPr>
-              <a:t>Plan de pruebas</a:t>
-            </a:r>
-          </a:p>
-        </p:txBody>
-      </p:sp>
-      <p:sp>
-        <p:nvSpPr>
-          <p:cNvPr id="13" name="TextBox 12"/>
-          <p:cNvSpPr txBox="1"/>
-          <p:nvPr/>
-        </p:nvSpPr>
-        <p:spPr>
-          <a:xfrm>
-            <a:off x="731520" y="4069080"/>
-            <a:ext cx="5029200" cy="2103120"/>
-          </a:xfrm>
-          <a:prstGeom prst="rect">
-            <a:avLst/>
-          </a:prstGeom>
-          <a:noFill/>
-        </p:spPr>
-        <p:txBody>
-          <a:bodyPr wrap="square" lIns="45720">
-            <a:spAutoFit/>
-          </a:bodyPr>
-          <a:lstStyle/>
-          <a:p>
-            <a:pPr>
-              <a:spcAft>
-                <a:spcPts val="600"/>
-              </a:spcAft>
-            </a:pPr>
-            <a:r>
-              <a:rPr sz="800">
-                <a:solidFill>
-                  <a:srgbClr val="66BB6A"/>
-                </a:solidFill>
-                <a:latin typeface="Calibri"/>
-              </a:rPr>
-              <a:t>● </a:t>
-            </a:r>
-            <a:r>
-              <a:rPr b="1" sz="1300">
-                <a:solidFill>
-                  <a:srgbClr val="F3E9E2"/>
-                </a:solidFill>
-                <a:latin typeface="Calibri"/>
-              </a:rPr>
-              <a:t>Casos asignados: </a:t>
-            </a:r>
-            <a:r>
-              <a:rPr sz="1300">
-                <a:solidFill>
-                  <a:srgbClr val="BCAAA4"/>
-                </a:solidFill>
-                <a:latin typeface="Calibri"/>
-              </a:rPr>
-              <a:t>8</a:t>
-            </a:r>
-          </a:p>
-          <a:p>
-            <a:pPr>
-              <a:spcAft>
-                <a:spcPts val="600"/>
-              </a:spcAft>
-            </a:pPr>
-            <a:r>
-              <a:rPr sz="800">
-                <a:solidFill>
-                  <a:srgbClr val="66BB6A"/>
-                </a:solidFill>
-                <a:latin typeface="Calibri"/>
-              </a:rPr>
-              <a:t>● </a:t>
-            </a:r>
-            <a:r>
-              <a:rPr b="1" sz="1300">
-                <a:solidFill>
-                  <a:srgbClr val="F3E9E2"/>
-                </a:solidFill>
-                <a:latin typeface="Calibri"/>
-              </a:rPr>
-              <a:t>De Sprint 1: </a:t>
-            </a:r>
-            <a:r>
-              <a:rPr sz="1300">
-                <a:solidFill>
-                  <a:srgbClr val="BCAAA4"/>
-                </a:solidFill>
-                <a:latin typeface="Calibri"/>
-              </a:rPr>
-              <a:t>6 casos</a:t>
-            </a:r>
-          </a:p>
-          <a:p>
-            <a:pPr>
-              <a:spcAft>
-                <a:spcPts val="600"/>
-              </a:spcAft>
-            </a:pPr>
-            <a:r>
-              <a:rPr sz="800">
-                <a:solidFill>
-                  <a:srgbClr val="66BB6A"/>
-                </a:solidFill>
-                <a:latin typeface="Calibri"/>
-              </a:rPr>
-              <a:t>● </a:t>
-            </a:r>
-            <a:r>
-              <a:rPr b="1" sz="1300">
-                <a:solidFill>
-                  <a:srgbClr val="F3E9E2"/>
-                </a:solidFill>
-                <a:latin typeface="Calibri"/>
-              </a:rPr>
-              <a:t>IDs: </a:t>
-            </a:r>
-            <a:r>
-              <a:rPr sz="1300">
-                <a:solidFill>
-                  <a:srgbClr val="BCAAA4"/>
-                </a:solidFill>
-                <a:latin typeface="Calibri"/>
-              </a:rPr>
-              <a:t>QA002, QA018, QC010, QC011, QC012, QC013, QC014, QC025</a:t>
-            </a:r>
-          </a:p>
-        </p:txBody>
-      </p:sp>
-      <p:sp>
-        <p:nvSpPr>
-          <p:cNvPr id="14" name="Rounded Rectangle 13"/>
-          <p:cNvSpPr/>
-          <p:nvPr/>
-        </p:nvSpPr>
-        <p:spPr>
-          <a:xfrm>
-            <a:off x="6126480" y="1463040"/>
-            <a:ext cx="5532120" cy="4754880"/>
-          </a:xfrm>
-          <a:prstGeom prst="roundRect">
-            <a:avLst>
-              <a:gd name="adj" fmla="val 6000"/>
-            </a:avLst>
-          </a:prstGeom>
-          <a:solidFill>
-            <a:srgbClr val="221A16"/>
-          </a:solidFill>
-          <a:ln>
-            <a:noFill/>
-          </a:ln>
-          <a:effectLst/>
-        </p:spPr>
-        <p:style>
-          <a:lnRef idx="1">
-            <a:schemeClr val="accent1"/>
-          </a:lnRef>
-          <a:fillRef idx="3">
-            <a:schemeClr val="accent1"/>
-          </a:fillRef>
-          <a:effectRef idx="2">
-            <a:schemeClr val="accent1"/>
-          </a:effectRef>
-          <a:fontRef idx="minor">
-            <a:schemeClr val="lt1"/>
-          </a:fontRef>
-        </p:style>
-        <p:txBody>
-          <a:bodyPr rtlCol="0" anchor="ctr"/>
-          <a:lstStyle/>
-          <a:p>
-            <a:pPr algn="ctr"/>
-          </a:p>
-        </p:txBody>
-      </p:sp>
-      <p:sp>
-        <p:nvSpPr>
-          <p:cNvPr id="15" name="TextBox 14"/>
-          <p:cNvSpPr txBox="1"/>
-          <p:nvPr/>
-        </p:nvSpPr>
-        <p:spPr>
-          <a:xfrm>
-            <a:off x="6309360" y="1554480"/>
-            <a:ext cx="5212080" cy="365760"/>
-          </a:xfrm>
-          <a:prstGeom prst="rect">
-            <a:avLst/>
-          </a:prstGeom>
-          <a:noFill/>
-        </p:spPr>
-        <p:txBody>
-          <a:bodyPr wrap="square" lIns="45720" rIns="45720" tIns="27432" bIns="27432" anchor="t">
-            <a:spAutoFit/>
-          </a:bodyPr>
-          <a:lstStyle/>
-          <a:p>
-            <a:pPr algn="l"/>
-            <a:r>
-              <a:rPr sz="1600" b="1">
-                <a:solidFill>
-                  <a:srgbClr val="66BB6A"/>
-                </a:solidFill>
-                <a:latin typeface="Calibri"/>
-              </a:rPr>
-              <a:t>Compromisos y contribuciones</a:t>
-            </a:r>
-          </a:p>
-        </p:txBody>
-      </p:sp>
-      <p:sp>
-        <p:nvSpPr>
-          <p:cNvPr id="16" name="TextBox 15"/>
-          <p:cNvSpPr txBox="1"/>
-          <p:nvPr/>
-        </p:nvSpPr>
-        <p:spPr>
-          <a:xfrm>
-            <a:off x="6309360" y="2011680"/>
-            <a:ext cx="5212080" cy="4114800"/>
-          </a:xfrm>
-          <a:prstGeom prst="rect">
-            <a:avLst/>
-          </a:prstGeom>
-          <a:noFill/>
-        </p:spPr>
-        <p:txBody>
-          <a:bodyPr wrap="square" lIns="45720">
-            <a:spAutoFit/>
-          </a:bodyPr>
-          <a:lstStyle/>
-          <a:p>
-            <a:pPr>
-              <a:spcAft>
-                <a:spcPts val="1000"/>
-              </a:spcAft>
-            </a:pPr>
-            <a:r>
-              <a:rPr sz="900">
-                <a:solidFill>
-                  <a:srgbClr val="66BB6A"/>
-                </a:solidFill>
-                <a:latin typeface="Calibri"/>
-              </a:rPr>
-              <a:t>● </a:t>
-            </a:r>
-            <a:r>
-              <a:rPr b="1" sz="1400">
-                <a:solidFill>
-                  <a:srgbClr val="F3E9E2"/>
-                </a:solidFill>
-                <a:latin typeface="Calibri"/>
-              </a:rPr>
-              <a:t>HU-18: </a:t>
-            </a:r>
-            <a:r>
-              <a:rPr sz="1400">
-                <a:solidFill>
-                  <a:srgbClr val="BCAAA4"/>
-                </a:solidFill>
-                <a:latin typeface="Calibri"/>
-              </a:rPr>
-              <a:t>Reporte de exportaciones por fechas · 5 pts · Sprint 4</a:t>
-            </a:r>
-          </a:p>
-          <a:p>
-            <a:pPr>
-              <a:spcAft>
-                <a:spcPts val="1000"/>
-              </a:spcAft>
-            </a:pPr>
-            <a:r>
-              <a:rPr sz="900">
-                <a:solidFill>
-                  <a:srgbClr val="66BB6A"/>
-                </a:solidFill>
-                <a:latin typeface="Calibri"/>
-              </a:rPr>
-              <a:t>● </a:t>
-            </a:r>
-            <a:r>
-              <a:rPr b="1" sz="1400">
-                <a:solidFill>
-                  <a:srgbClr val="F3E9E2"/>
-                </a:solidFill>
-                <a:latin typeface="Calibri"/>
-              </a:rPr>
-              <a:t>HU-19: </a:t>
-            </a:r>
-            <a:r>
-              <a:rPr sz="1400">
-                <a:solidFill>
-                  <a:srgbClr val="BCAAA4"/>
-                </a:solidFill>
-                <a:latin typeface="Calibri"/>
-              </a:rPr>
-              <a:t>Exportar reportes a PDF y Excel · 3 pts · Sprint 4</a:t>
-            </a:r>
-          </a:p>
-          <a:p>
-            <a:pPr>
-              <a:spcAft>
-                <a:spcPts val="1000"/>
-              </a:spcAft>
-            </a:pPr>
-            <a:r>
-              <a:rPr sz="900">
-                <a:solidFill>
-                  <a:srgbClr val="66BB6A"/>
-                </a:solidFill>
-                <a:latin typeface="Calibri"/>
-              </a:rPr>
-              <a:t>● </a:t>
-            </a:r>
-            <a:r>
-              <a:rPr b="1" sz="1400">
-                <a:solidFill>
-                  <a:srgbClr val="F3E9E2"/>
-                </a:solidFill>
-                <a:latin typeface="Calibri"/>
-              </a:rPr>
-              <a:t>Aporte realizado hasta hoy: </a:t>
-            </a:r>
-            <a:r>
-              <a:rPr sz="1400">
-                <a:solidFill>
-                  <a:srgbClr val="BCAAA4"/>
-                </a:solidFill>
-                <a:latin typeface="Calibri"/>
-              </a:rPr>
-              <a:t>[COMPLETAR con Jira/Git]</a:t>
-            </a:r>
-          </a:p>
-        </p:txBody>
-      </p:sp>
-    </p:spTree>
-  </p:cSld>
-  <p:clrMapOvr>
-    <a:masterClrMapping/>
-  </p:clrMapOvr>
-</p:sld>
-</file>
-
-<file path=ppt/slides/slide14.xml><?xml version="1.0" encoding="utf-8"?>
-<p:sld xmlns:a="http://schemas.openxmlformats.org/drawingml/2006/main" xmlns:p="http://schemas.openxmlformats.org/presentationml/2006/main" xmlns:r="http://schemas.openxmlformats.org/officeDocument/2006/relationships">
-  <p:cSld>
-    <p:bg>
-      <p:bgPr>
-        <a:solidFill>
-          <a:srgbClr val="15110F"/>
-        </a:solidFill>
-        <a:effectLst/>
-      </p:bgPr>
-    </p:bg>
-    <p:spTree>
-      <p:nvGrpSpPr>
-        <p:cNvPr id="1" name=""/>
-        <p:cNvGrpSpPr/>
-        <p:nvPr/>
-      </p:nvGrpSpPr>
-      <p:grpSpPr/>
-      <p:sp>
-        <p:nvSpPr>
-          <p:cNvPr id="2" name="Rectangle 1"/>
-          <p:cNvSpPr/>
-          <p:nvPr/>
-        </p:nvSpPr>
-        <p:spPr>
-          <a:xfrm>
-            <a:off x="0" y="0"/>
-            <a:ext cx="164592" cy="6858000"/>
-          </a:xfrm>
-          <a:prstGeom prst="rect">
-            <a:avLst/>
-          </a:prstGeom>
-          <a:solidFill>
-            <a:srgbClr val="66BB6A"/>
-          </a:solidFill>
-          <a:ln>
-            <a:noFill/>
-          </a:ln>
-          <a:effectLst/>
-        </p:spPr>
-        <p:style>
-          <a:lnRef idx="1">
-            <a:schemeClr val="accent1"/>
-          </a:lnRef>
-          <a:fillRef idx="3">
-            <a:schemeClr val="accent1"/>
-          </a:fillRef>
-          <a:effectRef idx="2">
-            <a:schemeClr val="accent1"/>
-          </a:effectRef>
-          <a:fontRef idx="minor">
-            <a:schemeClr val="lt1"/>
-          </a:fontRef>
-        </p:style>
-        <p:txBody>
-          <a:bodyPr rtlCol="0" anchor="ctr"/>
-          <a:lstStyle/>
-          <a:p>
-            <a:pPr algn="ctr"/>
-          </a:p>
-        </p:txBody>
-      </p:sp>
-      <p:sp>
-        <p:nvSpPr>
-          <p:cNvPr id="3" name="TextBox 2"/>
-          <p:cNvSpPr txBox="1"/>
-          <p:nvPr/>
-        </p:nvSpPr>
-        <p:spPr>
-          <a:xfrm>
-            <a:off x="548640" y="274320"/>
-            <a:ext cx="10972800" cy="640080"/>
-          </a:xfrm>
-          <a:prstGeom prst="rect">
-            <a:avLst/>
-          </a:prstGeom>
-          <a:noFill/>
-        </p:spPr>
-        <p:txBody>
-          <a:bodyPr wrap="square" lIns="45720" rIns="45720" tIns="27432" bIns="27432" anchor="t">
-            <a:spAutoFit/>
-          </a:bodyPr>
-          <a:lstStyle/>
-          <a:p>
-            <a:pPr algn="l"/>
-            <a:r>
-              <a:rPr sz="3200" b="1">
-                <a:solidFill>
-                  <a:srgbClr val="F3E9E2"/>
-                </a:solidFill>
-                <a:latin typeface="Calibri"/>
-              </a:rPr>
-              <a:t>Demo del prototipo</a:t>
-            </a:r>
-          </a:p>
-        </p:txBody>
-      </p:sp>
-      <p:sp>
-        <p:nvSpPr>
-          <p:cNvPr id="4" name="TextBox 3"/>
-          <p:cNvSpPr txBox="1"/>
-          <p:nvPr/>
-        </p:nvSpPr>
-        <p:spPr>
-          <a:xfrm>
-            <a:off x="548640" y="896112"/>
-            <a:ext cx="10972800" cy="365760"/>
-          </a:xfrm>
-          <a:prstGeom prst="rect">
-            <a:avLst/>
-          </a:prstGeom>
-          <a:noFill/>
-        </p:spPr>
-        <p:txBody>
-          <a:bodyPr wrap="square" lIns="45720" rIns="45720" tIns="27432" bIns="27432" anchor="t">
-            <a:spAutoFit/>
-          </a:bodyPr>
-          <a:lstStyle/>
-          <a:p>
-            <a:pPr algn="l"/>
-            <a:r>
-              <a:rPr sz="1500" b="0">
-                <a:solidFill>
-                  <a:srgbClr val="A1887F"/>
-                </a:solidFill>
-                <a:latin typeface="Calibri"/>
-              </a:rPr>
-              <a:t>Login → Dashboard → Clientes, Productos e Inventario → Nueva Exportación → Reportes</a:t>
-            </a:r>
-          </a:p>
-        </p:txBody>
-      </p:sp>
-      <p:sp>
-        <p:nvSpPr>
-          <p:cNvPr id="5" name="TextBox 4"/>
-          <p:cNvSpPr txBox="1"/>
-          <p:nvPr/>
-        </p:nvSpPr>
-        <p:spPr>
-          <a:xfrm>
-            <a:off x="548640" y="6446520"/>
-            <a:ext cx="7315200" cy="274320"/>
-          </a:xfrm>
-          <a:prstGeom prst="rect">
-            <a:avLst/>
-          </a:prstGeom>
-          <a:noFill/>
-        </p:spPr>
-        <p:txBody>
-          <a:bodyPr wrap="square" lIns="45720" rIns="45720" tIns="27432" bIns="27432" anchor="t">
-            <a:spAutoFit/>
-          </a:bodyPr>
-          <a:lstStyle/>
-          <a:p>
-            <a:pPr algn="l"/>
-            <a:r>
-              <a:rPr sz="1000" b="0">
-                <a:solidFill>
-                  <a:srgbClr val="BCAAA4"/>
-                </a:solidFill>
-                <a:latin typeface="Calibri"/>
-              </a:rPr>
-              <a:t>CoffeeExport Manager · RITECH SAS · Sprint 2</a:t>
-            </a:r>
-          </a:p>
-        </p:txBody>
-      </p:sp>
-      <p:sp>
-        <p:nvSpPr>
-          <p:cNvPr id="6" name="TextBox 5"/>
-          <p:cNvSpPr txBox="1"/>
-          <p:nvPr/>
-        </p:nvSpPr>
-        <p:spPr>
-          <a:xfrm>
-            <a:off x="10881360" y="6446520"/>
-            <a:ext cx="914400" cy="274320"/>
-          </a:xfrm>
-          <a:prstGeom prst="rect">
-            <a:avLst/>
-          </a:prstGeom>
-          <a:noFill/>
-        </p:spPr>
-        <p:txBody>
-          <a:bodyPr wrap="square" lIns="45720" rIns="45720" tIns="27432" bIns="27432" anchor="t">
-            <a:spAutoFit/>
-          </a:bodyPr>
-          <a:lstStyle/>
-          <a:p>
-            <a:pPr algn="r"/>
-            <a:r>
-              <a:rPr sz="1000" b="0">
-                <a:solidFill>
-                  <a:srgbClr val="BCAAA4"/>
-                </a:solidFill>
-                <a:latin typeface="Calibri"/>
-              </a:rPr>
-              <a:t>14</a:t>
-            </a:r>
-          </a:p>
-        </p:txBody>
-      </p:sp>
-      <p:sp>
-        <p:nvSpPr>
-          <p:cNvPr id="7" name="Rounded Rectangle 6"/>
-          <p:cNvSpPr/>
-          <p:nvPr/>
-        </p:nvSpPr>
-        <p:spPr>
-          <a:xfrm>
-            <a:off x="548640" y="1463040"/>
-            <a:ext cx="11109960" cy="822960"/>
-          </a:xfrm>
-          <a:prstGeom prst="roundRect">
-            <a:avLst>
-              <a:gd name="adj" fmla="val 6000"/>
-            </a:avLst>
-          </a:prstGeom>
-          <a:solidFill>
-            <a:srgbClr val="221A16"/>
-          </a:solidFill>
-          <a:ln>
-            <a:noFill/>
-          </a:ln>
-          <a:effectLst/>
-        </p:spPr>
-        <p:style>
-          <a:lnRef idx="1">
-            <a:schemeClr val="accent1"/>
-          </a:lnRef>
-          <a:fillRef idx="3">
-            <a:schemeClr val="accent1"/>
-          </a:fillRef>
-          <a:effectRef idx="2">
-            <a:schemeClr val="accent1"/>
-          </a:effectRef>
-          <a:fontRef idx="minor">
-            <a:schemeClr val="lt1"/>
-          </a:fontRef>
-        </p:style>
-        <p:txBody>
-          <a:bodyPr rtlCol="0" anchor="ctr"/>
-          <a:lstStyle/>
-          <a:p>
-            <a:pPr algn="ctr"/>
-          </a:p>
-        </p:txBody>
-      </p:sp>
-      <p:sp>
-        <p:nvSpPr>
-          <p:cNvPr id="8" name="Oval 7"/>
-          <p:cNvSpPr/>
-          <p:nvPr/>
-        </p:nvSpPr>
-        <p:spPr>
-          <a:xfrm>
-            <a:off x="685800" y="1600200"/>
-            <a:ext cx="548640" cy="548640"/>
-          </a:xfrm>
-          <a:prstGeom prst="ellipse">
-            <a:avLst/>
-          </a:prstGeom>
-          <a:solidFill>
-            <a:srgbClr val="66BB6A"/>
-          </a:solidFill>
-          <a:ln>
-            <a:noFill/>
-          </a:ln>
-          <a:effectLst/>
-        </p:spPr>
-        <p:style>
-          <a:lnRef idx="1">
-            <a:schemeClr val="accent1"/>
-          </a:lnRef>
-          <a:fillRef idx="3">
-            <a:schemeClr val="accent1"/>
-          </a:fillRef>
-          <a:effectRef idx="2">
-            <a:schemeClr val="accent1"/>
-          </a:effectRef>
-          <a:fontRef idx="minor">
-            <a:schemeClr val="lt1"/>
-          </a:fontRef>
-        </p:style>
-        <p:txBody>
-          <a:bodyPr rtlCol="0" anchor="ctr"/>
-          <a:lstStyle/>
-          <a:p>
-            <a:pPr algn="ctr"/>
-          </a:p>
-        </p:txBody>
-      </p:sp>
-      <p:sp>
-        <p:nvSpPr>
-          <p:cNvPr id="9" name="TextBox 8"/>
-          <p:cNvSpPr txBox="1"/>
-          <p:nvPr/>
-        </p:nvSpPr>
-        <p:spPr>
-          <a:xfrm>
-            <a:off x="685800" y="1600200"/>
-            <a:ext cx="548640" cy="548640"/>
-          </a:xfrm>
-          <a:prstGeom prst="rect">
-            <a:avLst/>
-          </a:prstGeom>
-          <a:noFill/>
-        </p:spPr>
-        <p:txBody>
-          <a:bodyPr wrap="square" lIns="45720" rIns="45720" tIns="27432" bIns="27432" anchor="ctr">
-            <a:spAutoFit/>
-          </a:bodyPr>
-          <a:lstStyle/>
-          <a:p>
-            <a:pPr algn="ctr"/>
-            <a:r>
-              <a:rPr sz="2000" b="1">
-                <a:solidFill>
-                  <a:srgbClr val="15110F"/>
-                </a:solidFill>
-                <a:latin typeface="Calibri"/>
-              </a:rPr>
-              <a:t>1</a:t>
-            </a:r>
-          </a:p>
-        </p:txBody>
-      </p:sp>
-      <p:sp>
-        <p:nvSpPr>
-          <p:cNvPr id="10" name="TextBox 9"/>
-          <p:cNvSpPr txBox="1"/>
-          <p:nvPr/>
-        </p:nvSpPr>
-        <p:spPr>
-          <a:xfrm>
-            <a:off x="1463040" y="1554480"/>
-            <a:ext cx="3566160" cy="640080"/>
-          </a:xfrm>
-          <a:prstGeom prst="rect">
-            <a:avLst/>
-          </a:prstGeom>
-          <a:noFill/>
-        </p:spPr>
-        <p:txBody>
-          <a:bodyPr wrap="square" lIns="45720" rIns="45720" tIns="27432" bIns="27432" anchor="ctr">
-            <a:spAutoFit/>
-          </a:bodyPr>
-          <a:lstStyle/>
-          <a:p>
-            <a:pPr algn="l"/>
-            <a:r>
-              <a:rPr sz="1700" b="1">
-                <a:solidFill>
-                  <a:srgbClr val="F3E9E2"/>
-                </a:solidFill>
-                <a:latin typeface="Calibri"/>
-              </a:rPr>
-              <a:t>Login</a:t>
-            </a:r>
-          </a:p>
-        </p:txBody>
-      </p:sp>
-      <p:sp>
-        <p:nvSpPr>
-          <p:cNvPr id="11" name="TextBox 10"/>
-          <p:cNvSpPr txBox="1"/>
-          <p:nvPr/>
-        </p:nvSpPr>
-        <p:spPr>
-          <a:xfrm>
-            <a:off x="5120640" y="1554480"/>
-            <a:ext cx="6400800" cy="640080"/>
-          </a:xfrm>
-          <a:prstGeom prst="rect">
-            <a:avLst/>
-          </a:prstGeom>
-          <a:noFill/>
-        </p:spPr>
-        <p:txBody>
-          <a:bodyPr wrap="square" lIns="45720" rIns="45720" tIns="27432" bIns="27432" anchor="ctr">
-            <a:spAutoFit/>
-          </a:bodyPr>
-          <a:lstStyle/>
-          <a:p>
-            <a:pPr algn="l"/>
-            <a:r>
-              <a:rPr sz="1400" b="0">
-                <a:solidFill>
-                  <a:srgbClr val="BCAAA4"/>
-                </a:solidFill>
-                <a:latin typeface="Calibri"/>
-              </a:rPr>
-              <a:t>Credenciales inválidas → mensaje genérico; ingreso con usuario de prueba</a:t>
-            </a:r>
-          </a:p>
-        </p:txBody>
-      </p:sp>
-      <p:sp>
-        <p:nvSpPr>
-          <p:cNvPr id="12" name="Rounded Rectangle 11"/>
-          <p:cNvSpPr/>
-          <p:nvPr/>
-        </p:nvSpPr>
-        <p:spPr>
-          <a:xfrm>
-            <a:off x="548640" y="2395728"/>
-            <a:ext cx="11109960" cy="822960"/>
-          </a:xfrm>
-          <a:prstGeom prst="roundRect">
-            <a:avLst>
-              <a:gd name="adj" fmla="val 6000"/>
-            </a:avLst>
-          </a:prstGeom>
-          <a:solidFill>
-            <a:srgbClr val="221A16"/>
-          </a:solidFill>
-          <a:ln>
-            <a:noFill/>
-          </a:ln>
-          <a:effectLst/>
-        </p:spPr>
-        <p:style>
-          <a:lnRef idx="1">
-            <a:schemeClr val="accent1"/>
-          </a:lnRef>
-          <a:fillRef idx="3">
-            <a:schemeClr val="accent1"/>
-          </a:fillRef>
-          <a:effectRef idx="2">
-            <a:schemeClr val="accent1"/>
-          </a:effectRef>
-          <a:fontRef idx="minor">
-            <a:schemeClr val="lt1"/>
-          </a:fontRef>
-        </p:style>
-        <p:txBody>
-          <a:bodyPr rtlCol="0" anchor="ctr"/>
-          <a:lstStyle/>
-          <a:p>
-            <a:pPr algn="ctr"/>
-          </a:p>
-        </p:txBody>
-      </p:sp>
-      <p:sp>
-        <p:nvSpPr>
-          <p:cNvPr id="13" name="Oval 12"/>
-          <p:cNvSpPr/>
-          <p:nvPr/>
-        </p:nvSpPr>
-        <p:spPr>
-          <a:xfrm>
-            <a:off x="685800" y="2532888"/>
-            <a:ext cx="548640" cy="548640"/>
-          </a:xfrm>
-          <a:prstGeom prst="ellipse">
-            <a:avLst/>
-          </a:prstGeom>
-          <a:solidFill>
-            <a:srgbClr val="66BB6A"/>
-          </a:solidFill>
-          <a:ln>
-            <a:noFill/>
-          </a:ln>
-          <a:effectLst/>
-        </p:spPr>
-        <p:style>
-          <a:lnRef idx="1">
-            <a:schemeClr val="accent1"/>
-          </a:lnRef>
-          <a:fillRef idx="3">
-            <a:schemeClr val="accent1"/>
-          </a:fillRef>
-          <a:effectRef idx="2">
-            <a:schemeClr val="accent1"/>
-          </a:effectRef>
-          <a:fontRef idx="minor">
-            <a:schemeClr val="lt1"/>
-          </a:fontRef>
-        </p:style>
-        <p:txBody>
-          <a:bodyPr rtlCol="0" anchor="ctr"/>
-          <a:lstStyle/>
-          <a:p>
-            <a:pPr algn="ctr"/>
-          </a:p>
-        </p:txBody>
-      </p:sp>
-      <p:sp>
-        <p:nvSpPr>
-          <p:cNvPr id="14" name="TextBox 13"/>
-          <p:cNvSpPr txBox="1"/>
-          <p:nvPr/>
-        </p:nvSpPr>
-        <p:spPr>
-          <a:xfrm>
-            <a:off x="685800" y="2532888"/>
-            <a:ext cx="548640" cy="548640"/>
-          </a:xfrm>
-          <a:prstGeom prst="rect">
-            <a:avLst/>
-          </a:prstGeom>
-          <a:noFill/>
-        </p:spPr>
-        <p:txBody>
-          <a:bodyPr wrap="square" lIns="45720" rIns="45720" tIns="27432" bIns="27432" anchor="ctr">
-            <a:spAutoFit/>
-          </a:bodyPr>
-          <a:lstStyle/>
-          <a:p>
-            <a:pPr algn="ctr"/>
-            <a:r>
-              <a:rPr sz="2000" b="1">
-                <a:solidFill>
-                  <a:srgbClr val="15110F"/>
-                </a:solidFill>
-                <a:latin typeface="Calibri"/>
-              </a:rPr>
-              <a:t>2</a:t>
-            </a:r>
-          </a:p>
-        </p:txBody>
-      </p:sp>
-      <p:sp>
-        <p:nvSpPr>
-          <p:cNvPr id="15" name="TextBox 14"/>
-          <p:cNvSpPr txBox="1"/>
-          <p:nvPr/>
-        </p:nvSpPr>
-        <p:spPr>
-          <a:xfrm>
-            <a:off x="1463040" y="2487168"/>
-            <a:ext cx="3566160" cy="640080"/>
-          </a:xfrm>
-          <a:prstGeom prst="rect">
-            <a:avLst/>
-          </a:prstGeom>
-          <a:noFill/>
-        </p:spPr>
-        <p:txBody>
-          <a:bodyPr wrap="square" lIns="45720" rIns="45720" tIns="27432" bIns="27432" anchor="ctr">
-            <a:spAutoFit/>
-          </a:bodyPr>
-          <a:lstStyle/>
-          <a:p>
-            <a:pPr algn="l"/>
-            <a:r>
-              <a:rPr sz="1700" b="1">
-                <a:solidFill>
-                  <a:srgbClr val="F3E9E2"/>
-                </a:solidFill>
-                <a:latin typeface="Calibri"/>
-              </a:rPr>
-              <a:t>Dashboard</a:t>
-            </a:r>
-          </a:p>
-        </p:txBody>
-      </p:sp>
-      <p:sp>
-        <p:nvSpPr>
-          <p:cNvPr id="16" name="TextBox 15"/>
-          <p:cNvSpPr txBox="1"/>
-          <p:nvPr/>
-        </p:nvSpPr>
-        <p:spPr>
-          <a:xfrm>
-            <a:off x="5120640" y="2487168"/>
-            <a:ext cx="6400800" cy="640080"/>
-          </a:xfrm>
-          <a:prstGeom prst="rect">
-            <a:avLst/>
-          </a:prstGeom>
-          <a:noFill/>
-        </p:spPr>
-        <p:txBody>
-          <a:bodyPr wrap="square" lIns="45720" rIns="45720" tIns="27432" bIns="27432" anchor="ctr">
-            <a:spAutoFit/>
-          </a:bodyPr>
-          <a:lstStyle/>
-          <a:p>
-            <a:pPr algn="l"/>
-            <a:r>
-              <a:rPr sz="1400" b="0">
-                <a:solidFill>
-                  <a:srgbClr val="BCAAA4"/>
-                </a:solidFill>
-                <a:latin typeface="Calibri"/>
-              </a:rPr>
-              <a:t>KPIs, exportaciones por país, productos más vendidos, últimas exportaciones</a:t>
-            </a:r>
-          </a:p>
-        </p:txBody>
-      </p:sp>
-      <p:sp>
-        <p:nvSpPr>
-          <p:cNvPr id="17" name="Rounded Rectangle 16"/>
-          <p:cNvSpPr/>
-          <p:nvPr/>
-        </p:nvSpPr>
-        <p:spPr>
-          <a:xfrm>
-            <a:off x="548640" y="3328416"/>
-            <a:ext cx="11109960" cy="822960"/>
-          </a:xfrm>
-          <a:prstGeom prst="roundRect">
-            <a:avLst>
-              <a:gd name="adj" fmla="val 6000"/>
-            </a:avLst>
-          </a:prstGeom>
-          <a:solidFill>
-            <a:srgbClr val="221A16"/>
-          </a:solidFill>
-          <a:ln>
-            <a:noFill/>
-          </a:ln>
-          <a:effectLst/>
-        </p:spPr>
-        <p:style>
-          <a:lnRef idx="1">
-            <a:schemeClr val="accent1"/>
-          </a:lnRef>
-          <a:fillRef idx="3">
-            <a:schemeClr val="accent1"/>
-          </a:fillRef>
-          <a:effectRef idx="2">
-            <a:schemeClr val="accent1"/>
-          </a:effectRef>
-          <a:fontRef idx="minor">
-            <a:schemeClr val="lt1"/>
-          </a:fontRef>
-        </p:style>
-        <p:txBody>
-          <a:bodyPr rtlCol="0" anchor="ctr"/>
-          <a:lstStyle/>
-          <a:p>
-            <a:pPr algn="ctr"/>
-          </a:p>
-        </p:txBody>
-      </p:sp>
-      <p:sp>
-        <p:nvSpPr>
-          <p:cNvPr id="18" name="Oval 17"/>
-          <p:cNvSpPr/>
-          <p:nvPr/>
-        </p:nvSpPr>
-        <p:spPr>
-          <a:xfrm>
-            <a:off x="685800" y="3465576"/>
-            <a:ext cx="548640" cy="548640"/>
-          </a:xfrm>
-          <a:prstGeom prst="ellipse">
-            <a:avLst/>
-          </a:prstGeom>
-          <a:solidFill>
-            <a:srgbClr val="66BB6A"/>
-          </a:solidFill>
-          <a:ln>
-            <a:noFill/>
-          </a:ln>
-          <a:effectLst/>
-        </p:spPr>
-        <p:style>
-          <a:lnRef idx="1">
-            <a:schemeClr val="accent1"/>
-          </a:lnRef>
-          <a:fillRef idx="3">
-            <a:schemeClr val="accent1"/>
-          </a:fillRef>
-          <a:effectRef idx="2">
-            <a:schemeClr val="accent1"/>
-          </a:effectRef>
-          <a:fontRef idx="minor">
-            <a:schemeClr val="lt1"/>
-          </a:fontRef>
-        </p:style>
-        <p:txBody>
-          <a:bodyPr rtlCol="0" anchor="ctr"/>
-          <a:lstStyle/>
-          <a:p>
-            <a:pPr algn="ctr"/>
-          </a:p>
-        </p:txBody>
-      </p:sp>
-      <p:sp>
-        <p:nvSpPr>
-          <p:cNvPr id="19" name="TextBox 18"/>
-          <p:cNvSpPr txBox="1"/>
-          <p:nvPr/>
-        </p:nvSpPr>
-        <p:spPr>
-          <a:xfrm>
-            <a:off x="685800" y="3465576"/>
-            <a:ext cx="548640" cy="548640"/>
-          </a:xfrm>
-          <a:prstGeom prst="rect">
-            <a:avLst/>
-          </a:prstGeom>
-          <a:noFill/>
-        </p:spPr>
-        <p:txBody>
-          <a:bodyPr wrap="square" lIns="45720" rIns="45720" tIns="27432" bIns="27432" anchor="ctr">
-            <a:spAutoFit/>
-          </a:bodyPr>
-          <a:lstStyle/>
-          <a:p>
-            <a:pPr algn="ctr"/>
-            <a:r>
-              <a:rPr sz="2000" b="1">
-                <a:solidFill>
-                  <a:srgbClr val="15110F"/>
-                </a:solidFill>
-                <a:latin typeface="Calibri"/>
-              </a:rPr>
-              <a:t>3</a:t>
-            </a:r>
-          </a:p>
-        </p:txBody>
-      </p:sp>
-      <p:sp>
-        <p:nvSpPr>
-          <p:cNvPr id="20" name="TextBox 19"/>
-          <p:cNvSpPr txBox="1"/>
-          <p:nvPr/>
-        </p:nvSpPr>
-        <p:spPr>
-          <a:xfrm>
-            <a:off x="1463040" y="3419856"/>
-            <a:ext cx="3566160" cy="640080"/>
-          </a:xfrm>
-          <a:prstGeom prst="rect">
-            <a:avLst/>
-          </a:prstGeom>
-          <a:noFill/>
-        </p:spPr>
-        <p:txBody>
-          <a:bodyPr wrap="square" lIns="45720" rIns="45720" tIns="27432" bIns="27432" anchor="ctr">
-            <a:spAutoFit/>
-          </a:bodyPr>
-          <a:lstStyle/>
-          <a:p>
-            <a:pPr algn="l"/>
-            <a:r>
-              <a:rPr sz="1700" b="1">
-                <a:solidFill>
-                  <a:srgbClr val="F3E9E2"/>
-                </a:solidFill>
-                <a:latin typeface="Calibri"/>
-              </a:rPr>
-              <a:t>Clientes · Productos · Inventario</a:t>
-            </a:r>
-          </a:p>
-        </p:txBody>
-      </p:sp>
-      <p:sp>
-        <p:nvSpPr>
-          <p:cNvPr id="21" name="TextBox 20"/>
-          <p:cNvSpPr txBox="1"/>
-          <p:nvPr/>
-        </p:nvSpPr>
-        <p:spPr>
-          <a:xfrm>
-            <a:off x="5120640" y="3419856"/>
-            <a:ext cx="6400800" cy="640080"/>
-          </a:xfrm>
-          <a:prstGeom prst="rect">
-            <a:avLst/>
-          </a:prstGeom>
-          <a:noFill/>
-        </p:spPr>
-        <p:txBody>
-          <a:bodyPr wrap="square" lIns="45720" rIns="45720" tIns="27432" bIns="27432" anchor="ctr">
-            <a:spAutoFit/>
-          </a:bodyPr>
-          <a:lstStyle/>
-          <a:p>
-            <a:pPr algn="l"/>
-            <a:r>
-              <a:rPr sz="1400" b="0">
-                <a:solidFill>
-                  <a:srgbClr val="BCAAA4"/>
-                </a:solidFill>
-                <a:latin typeface="Calibri"/>
-              </a:rPr>
-              <a:t>Registro de cliente UE, catálogo y stock por bodega</a:t>
-            </a:r>
-          </a:p>
-        </p:txBody>
-      </p:sp>
-      <p:sp>
-        <p:nvSpPr>
-          <p:cNvPr id="22" name="Rounded Rectangle 21"/>
-          <p:cNvSpPr/>
-          <p:nvPr/>
-        </p:nvSpPr>
-        <p:spPr>
-          <a:xfrm>
-            <a:off x="548640" y="4261104"/>
-            <a:ext cx="11109960" cy="822960"/>
-          </a:xfrm>
-          <a:prstGeom prst="roundRect">
-            <a:avLst>
-              <a:gd name="adj" fmla="val 6000"/>
-            </a:avLst>
-          </a:prstGeom>
-          <a:solidFill>
-            <a:srgbClr val="221A16"/>
-          </a:solidFill>
-          <a:ln>
-            <a:noFill/>
-          </a:ln>
-          <a:effectLst/>
-        </p:spPr>
-        <p:style>
-          <a:lnRef idx="1">
-            <a:schemeClr val="accent1"/>
-          </a:lnRef>
-          <a:fillRef idx="3">
-            <a:schemeClr val="accent1"/>
-          </a:fillRef>
-          <a:effectRef idx="2">
-            <a:schemeClr val="accent1"/>
-          </a:effectRef>
-          <a:fontRef idx="minor">
-            <a:schemeClr val="lt1"/>
-          </a:fontRef>
-        </p:style>
-        <p:txBody>
-          <a:bodyPr rtlCol="0" anchor="ctr"/>
-          <a:lstStyle/>
-          <a:p>
-            <a:pPr algn="ctr"/>
-          </a:p>
-        </p:txBody>
-      </p:sp>
-      <p:sp>
-        <p:nvSpPr>
-          <p:cNvPr id="23" name="Oval 22"/>
-          <p:cNvSpPr/>
-          <p:nvPr/>
-        </p:nvSpPr>
-        <p:spPr>
-          <a:xfrm>
-            <a:off x="685800" y="4398264"/>
-            <a:ext cx="548640" cy="548640"/>
-          </a:xfrm>
-          <a:prstGeom prst="ellipse">
-            <a:avLst/>
-          </a:prstGeom>
-          <a:solidFill>
-            <a:srgbClr val="66BB6A"/>
-          </a:solidFill>
-          <a:ln>
-            <a:noFill/>
-          </a:ln>
-          <a:effectLst/>
-        </p:spPr>
-        <p:style>
-          <a:lnRef idx="1">
-            <a:schemeClr val="accent1"/>
-          </a:lnRef>
-          <a:fillRef idx="3">
-            <a:schemeClr val="accent1"/>
-          </a:fillRef>
-          <a:effectRef idx="2">
-            <a:schemeClr val="accent1"/>
-          </a:effectRef>
-          <a:fontRef idx="minor">
-            <a:schemeClr val="lt1"/>
-          </a:fontRef>
-        </p:style>
-        <p:txBody>
-          <a:bodyPr rtlCol="0" anchor="ctr"/>
-          <a:lstStyle/>
-          <a:p>
-            <a:pPr algn="ctr"/>
-          </a:p>
-        </p:txBody>
-      </p:sp>
-      <p:sp>
-        <p:nvSpPr>
-          <p:cNvPr id="24" name="TextBox 23"/>
-          <p:cNvSpPr txBox="1"/>
-          <p:nvPr/>
-        </p:nvSpPr>
-        <p:spPr>
-          <a:xfrm>
-            <a:off x="685800" y="4398264"/>
-            <a:ext cx="548640" cy="548640"/>
-          </a:xfrm>
-          <a:prstGeom prst="rect">
-            <a:avLst/>
-          </a:prstGeom>
-          <a:noFill/>
-        </p:spPr>
-        <p:txBody>
-          <a:bodyPr wrap="square" lIns="45720" rIns="45720" tIns="27432" bIns="27432" anchor="ctr">
-            <a:spAutoFit/>
-          </a:bodyPr>
-          <a:lstStyle/>
-          <a:p>
-            <a:pPr algn="ctr"/>
-            <a:r>
-              <a:rPr sz="2000" b="1">
-                <a:solidFill>
-                  <a:srgbClr val="15110F"/>
-                </a:solidFill>
-                <a:latin typeface="Calibri"/>
-              </a:rPr>
-              <a:t>4</a:t>
-            </a:r>
-          </a:p>
-        </p:txBody>
-      </p:sp>
-      <p:sp>
-        <p:nvSpPr>
-          <p:cNvPr id="25" name="TextBox 24"/>
-          <p:cNvSpPr txBox="1"/>
-          <p:nvPr/>
-        </p:nvSpPr>
-        <p:spPr>
-          <a:xfrm>
-            <a:off x="1463040" y="4352544"/>
-            <a:ext cx="3566160" cy="640080"/>
-          </a:xfrm>
-          <a:prstGeom prst="rect">
-            <a:avLst/>
-          </a:prstGeom>
-          <a:noFill/>
-        </p:spPr>
-        <p:txBody>
-          <a:bodyPr wrap="square" lIns="45720" rIns="45720" tIns="27432" bIns="27432" anchor="ctr">
-            <a:spAutoFit/>
-          </a:bodyPr>
-          <a:lstStyle/>
-          <a:p>
-            <a:pPr algn="l"/>
-            <a:r>
-              <a:rPr sz="1700" b="1">
-                <a:solidFill>
-                  <a:srgbClr val="F3E9E2"/>
-                </a:solidFill>
-                <a:latin typeface="Calibri"/>
-              </a:rPr>
-              <a:t>Nueva Exportación</a:t>
-            </a:r>
-          </a:p>
-        </p:txBody>
-      </p:sp>
-      <p:sp>
-        <p:nvSpPr>
-          <p:cNvPr id="26" name="TextBox 25"/>
-          <p:cNvSpPr txBox="1"/>
-          <p:nvPr/>
-        </p:nvSpPr>
-        <p:spPr>
-          <a:xfrm>
-            <a:off x="5120640" y="4352544"/>
-            <a:ext cx="6400800" cy="640080"/>
-          </a:xfrm>
-          <a:prstGeom prst="rect">
-            <a:avLst/>
-          </a:prstGeom>
-          <a:noFill/>
-        </p:spPr>
-        <p:txBody>
-          <a:bodyPr wrap="square" lIns="45720" rIns="45720" tIns="27432" bIns="27432" anchor="ctr">
-            <a:spAutoFit/>
-          </a:bodyPr>
-          <a:lstStyle/>
-          <a:p>
-            <a:pPr algn="l"/>
-            <a:r>
-              <a:rPr sz="1400" b="0">
-                <a:solidFill>
-                  <a:srgbClr val="BCAAA4"/>
-                </a:solidFill>
-                <a:latin typeface="Calibri"/>
-              </a:rPr>
-              <a:t>Asistente de 4 pasos: básica, cliente y destino, productos, documentos</a:t>
-            </a:r>
-          </a:p>
-        </p:txBody>
-      </p:sp>
-      <p:sp>
-        <p:nvSpPr>
-          <p:cNvPr id="27" name="Rounded Rectangle 26"/>
-          <p:cNvSpPr/>
-          <p:nvPr/>
-        </p:nvSpPr>
-        <p:spPr>
-          <a:xfrm>
-            <a:off x="548640" y="5193792"/>
-            <a:ext cx="11109960" cy="822960"/>
-          </a:xfrm>
-          <a:prstGeom prst="roundRect">
-            <a:avLst>
-              <a:gd name="adj" fmla="val 6000"/>
-            </a:avLst>
-          </a:prstGeom>
-          <a:solidFill>
-            <a:srgbClr val="221A16"/>
-          </a:solidFill>
-          <a:ln>
-            <a:noFill/>
-          </a:ln>
-          <a:effectLst/>
-        </p:spPr>
-        <p:style>
-          <a:lnRef idx="1">
-            <a:schemeClr val="accent1"/>
-          </a:lnRef>
-          <a:fillRef idx="3">
-            <a:schemeClr val="accent1"/>
-          </a:fillRef>
-          <a:effectRef idx="2">
-            <a:schemeClr val="accent1"/>
-          </a:effectRef>
-          <a:fontRef idx="minor">
-            <a:schemeClr val="lt1"/>
-          </a:fontRef>
-        </p:style>
-        <p:txBody>
-          <a:bodyPr rtlCol="0" anchor="ctr"/>
-          <a:lstStyle/>
-          <a:p>
-            <a:pPr algn="ctr"/>
-          </a:p>
-        </p:txBody>
-      </p:sp>
-      <p:sp>
-        <p:nvSpPr>
-          <p:cNvPr id="28" name="Oval 27"/>
-          <p:cNvSpPr/>
-          <p:nvPr/>
-        </p:nvSpPr>
-        <p:spPr>
-          <a:xfrm>
-            <a:off x="685800" y="5330952"/>
-            <a:ext cx="548640" cy="548640"/>
-          </a:xfrm>
-          <a:prstGeom prst="ellipse">
-            <a:avLst/>
-          </a:prstGeom>
-          <a:solidFill>
-            <a:srgbClr val="66BB6A"/>
-          </a:solidFill>
-          <a:ln>
-            <a:noFill/>
-          </a:ln>
-          <a:effectLst/>
-        </p:spPr>
-        <p:style>
-          <a:lnRef idx="1">
-            <a:schemeClr val="accent1"/>
-          </a:lnRef>
-          <a:fillRef idx="3">
-            <a:schemeClr val="accent1"/>
-          </a:fillRef>
-          <a:effectRef idx="2">
-            <a:schemeClr val="accent1"/>
-          </a:effectRef>
-          <a:fontRef idx="minor">
-            <a:schemeClr val="lt1"/>
-          </a:fontRef>
-        </p:style>
-        <p:txBody>
-          <a:bodyPr rtlCol="0" anchor="ctr"/>
-          <a:lstStyle/>
-          <a:p>
-            <a:pPr algn="ctr"/>
-          </a:p>
-        </p:txBody>
-      </p:sp>
-      <p:sp>
-        <p:nvSpPr>
-          <p:cNvPr id="29" name="TextBox 28"/>
-          <p:cNvSpPr txBox="1"/>
-          <p:nvPr/>
-        </p:nvSpPr>
-        <p:spPr>
-          <a:xfrm>
-            <a:off x="685800" y="5330952"/>
-            <a:ext cx="548640" cy="548640"/>
-          </a:xfrm>
-          <a:prstGeom prst="rect">
-            <a:avLst/>
-          </a:prstGeom>
-          <a:noFill/>
-        </p:spPr>
-        <p:txBody>
-          <a:bodyPr wrap="square" lIns="45720" rIns="45720" tIns="27432" bIns="27432" anchor="ctr">
-            <a:spAutoFit/>
-          </a:bodyPr>
-          <a:lstStyle/>
-          <a:p>
-            <a:pPr algn="ctr"/>
-            <a:r>
-              <a:rPr sz="2000" b="1">
-                <a:solidFill>
-                  <a:srgbClr val="15110F"/>
-                </a:solidFill>
-                <a:latin typeface="Calibri"/>
-              </a:rPr>
-              <a:t>5</a:t>
-            </a:r>
-          </a:p>
-        </p:txBody>
-      </p:sp>
-      <p:sp>
-        <p:nvSpPr>
-          <p:cNvPr id="30" name="TextBox 29"/>
-          <p:cNvSpPr txBox="1"/>
-          <p:nvPr/>
-        </p:nvSpPr>
-        <p:spPr>
-          <a:xfrm>
-            <a:off x="1463040" y="5285231"/>
-            <a:ext cx="3566160" cy="640080"/>
-          </a:xfrm>
-          <a:prstGeom prst="rect">
-            <a:avLst/>
-          </a:prstGeom>
-          <a:noFill/>
-        </p:spPr>
-        <p:txBody>
-          <a:bodyPr wrap="square" lIns="45720" rIns="45720" tIns="27432" bIns="27432" anchor="ctr">
-            <a:spAutoFit/>
-          </a:bodyPr>
-          <a:lstStyle/>
-          <a:p>
-            <a:pPr algn="l"/>
-            <a:r>
-              <a:rPr sz="1700" b="1">
-                <a:solidFill>
-                  <a:srgbClr val="F3E9E2"/>
-                </a:solidFill>
-                <a:latin typeface="Calibri"/>
-              </a:rPr>
-              <a:t>Reportes</a:t>
-            </a:r>
-          </a:p>
-        </p:txBody>
-      </p:sp>
-      <p:sp>
-        <p:nvSpPr>
-          <p:cNvPr id="31" name="TextBox 30"/>
-          <p:cNvSpPr txBox="1"/>
-          <p:nvPr/>
-        </p:nvSpPr>
-        <p:spPr>
-          <a:xfrm>
-            <a:off x="5120640" y="5285231"/>
-            <a:ext cx="6400800" cy="640080"/>
-          </a:xfrm>
-          <a:prstGeom prst="rect">
-            <a:avLst/>
-          </a:prstGeom>
-          <a:noFill/>
-        </p:spPr>
-        <p:txBody>
-          <a:bodyPr wrap="square" lIns="45720" rIns="45720" tIns="27432" bIns="27432" anchor="ctr">
-            <a:spAutoFit/>
-          </a:bodyPr>
-          <a:lstStyle/>
-          <a:p>
-            <a:pPr algn="l"/>
-            <a:r>
-              <a:rPr sz="1400" b="0">
-                <a:solidFill>
-                  <a:srgbClr val="BCAAA4"/>
-                </a:solidFill>
-                <a:latin typeface="Calibri"/>
-              </a:rPr>
-              <a:t>Filtro por fechas y exportación a PDF y Excel</a:t>
-            </a:r>
-          </a:p>
-        </p:txBody>
-      </p:sp>
-    </p:spTree>
-  </p:cSld>
-  <p:clrMapOvr>
-    <a:masterClrMapping/>
-  </p:clrMapOvr>
-</p:sld>
-</file>
-
-<file path=ppt/slides/slide15.xml><?xml version="1.0" encoding="utf-8"?>
-<p:sld xmlns:a="http://schemas.openxmlformats.org/drawingml/2006/main" xmlns:p="http://schemas.openxmlformats.org/presentationml/2006/main" xmlns:r="http://schemas.openxmlformats.org/officeDocument/2006/relationships">
-  <p:cSld>
-    <p:bg>
-      <p:bgPr>
-        <a:solidFill>
-          <a:srgbClr val="15110F"/>
-        </a:solidFill>
-        <a:effectLst/>
-      </p:bgPr>
-    </p:bg>
-    <p:spTree>
-      <p:nvGrpSpPr>
-        <p:cNvPr id="1" name=""/>
-        <p:cNvGrpSpPr/>
-        <p:nvPr/>
-      </p:nvGrpSpPr>
-      <p:grpSpPr/>
-      <p:sp>
-        <p:nvSpPr>
-          <p:cNvPr id="2" name="Rectangle 1"/>
-          <p:cNvSpPr/>
-          <p:nvPr/>
-        </p:nvSpPr>
-        <p:spPr>
-          <a:xfrm>
-            <a:off x="0" y="0"/>
-            <a:ext cx="164592" cy="6858000"/>
-          </a:xfrm>
-          <a:prstGeom prst="rect">
-            <a:avLst/>
-          </a:prstGeom>
-          <a:solidFill>
-            <a:srgbClr val="66BB6A"/>
-          </a:solidFill>
-          <a:ln>
-            <a:noFill/>
-          </a:ln>
-          <a:effectLst/>
-        </p:spPr>
-        <p:style>
-          <a:lnRef idx="1">
-            <a:schemeClr val="accent1"/>
-          </a:lnRef>
-          <a:fillRef idx="3">
-            <a:schemeClr val="accent1"/>
-          </a:fillRef>
-          <a:effectRef idx="2">
-            <a:schemeClr val="accent1"/>
-          </a:effectRef>
-          <a:fontRef idx="minor">
-            <a:schemeClr val="lt1"/>
-          </a:fontRef>
-        </p:style>
-        <p:txBody>
-          <a:bodyPr rtlCol="0" anchor="ctr"/>
-          <a:lstStyle/>
-          <a:p>
-            <a:pPr algn="ctr"/>
-          </a:p>
-        </p:txBody>
-      </p:sp>
-      <p:sp>
-        <p:nvSpPr>
-          <p:cNvPr id="3" name="TextBox 2"/>
-          <p:cNvSpPr txBox="1"/>
-          <p:nvPr/>
-        </p:nvSpPr>
-        <p:spPr>
-          <a:xfrm>
-            <a:off x="548640" y="274320"/>
-            <a:ext cx="10972800" cy="640080"/>
-          </a:xfrm>
-          <a:prstGeom prst="rect">
-            <a:avLst/>
-          </a:prstGeom>
-          <a:noFill/>
-        </p:spPr>
-        <p:txBody>
-          <a:bodyPr wrap="square" lIns="45720" rIns="45720" tIns="27432" bIns="27432" anchor="t">
-            <a:spAutoFit/>
-          </a:bodyPr>
-          <a:lstStyle/>
-          <a:p>
-            <a:pPr algn="l"/>
-            <a:r>
-              <a:rPr sz="3200" b="1">
-                <a:solidFill>
-                  <a:srgbClr val="F3E9E2"/>
-                </a:solidFill>
-                <a:latin typeface="Calibri"/>
-              </a:rPr>
-              <a:t>Próximos pasos · Sprint 3</a:t>
-            </a:r>
-          </a:p>
-        </p:txBody>
-      </p:sp>
-      <p:sp>
-        <p:nvSpPr>
-          <p:cNvPr id="4" name="TextBox 3"/>
-          <p:cNvSpPr txBox="1"/>
-          <p:nvPr/>
-        </p:nvSpPr>
-        <p:spPr>
-          <a:xfrm>
-            <a:off x="548640" y="896112"/>
-            <a:ext cx="10972800" cy="365760"/>
-          </a:xfrm>
-          <a:prstGeom prst="rect">
-            <a:avLst/>
-          </a:prstGeom>
-          <a:noFill/>
-        </p:spPr>
-        <p:txBody>
-          <a:bodyPr wrap="square" lIns="45720" rIns="45720" tIns="27432" bIns="27432" anchor="t">
-            <a:spAutoFit/>
-          </a:bodyPr>
-          <a:lstStyle/>
-          <a:p>
-            <a:pPr algn="l"/>
-            <a:r>
-              <a:rPr sz="1500" b="0">
-                <a:solidFill>
-                  <a:srgbClr val="A1887F"/>
-                </a:solidFill>
-                <a:latin typeface="Calibri"/>
-              </a:rPr>
-              <a:t>Prioridades y decisiones abiertas</a:t>
-            </a:r>
-          </a:p>
-        </p:txBody>
-      </p:sp>
-      <p:sp>
-        <p:nvSpPr>
-          <p:cNvPr id="5" name="TextBox 4"/>
-          <p:cNvSpPr txBox="1"/>
-          <p:nvPr/>
-        </p:nvSpPr>
-        <p:spPr>
-          <a:xfrm>
-            <a:off x="548640" y="6446520"/>
-            <a:ext cx="7315200" cy="274320"/>
-          </a:xfrm>
-          <a:prstGeom prst="rect">
-            <a:avLst/>
-          </a:prstGeom>
-          <a:noFill/>
-        </p:spPr>
-        <p:txBody>
-          <a:bodyPr wrap="square" lIns="45720" rIns="45720" tIns="27432" bIns="27432" anchor="t">
-            <a:spAutoFit/>
-          </a:bodyPr>
-          <a:lstStyle/>
-          <a:p>
-            <a:pPr algn="l"/>
-            <a:r>
-              <a:rPr sz="1000" b="0">
-                <a:solidFill>
-                  <a:srgbClr val="BCAAA4"/>
-                </a:solidFill>
-                <a:latin typeface="Calibri"/>
-              </a:rPr>
-              <a:t>CoffeeExport Manager · RITECH SAS · Sprint 2</a:t>
-            </a:r>
-          </a:p>
-        </p:txBody>
-      </p:sp>
-      <p:sp>
-        <p:nvSpPr>
-          <p:cNvPr id="6" name="TextBox 5"/>
-          <p:cNvSpPr txBox="1"/>
-          <p:nvPr/>
-        </p:nvSpPr>
-        <p:spPr>
-          <a:xfrm>
-            <a:off x="10881360" y="6446520"/>
-            <a:ext cx="914400" cy="274320"/>
-          </a:xfrm>
-          <a:prstGeom prst="rect">
-            <a:avLst/>
-          </a:prstGeom>
-          <a:noFill/>
-        </p:spPr>
-        <p:txBody>
-          <a:bodyPr wrap="square" lIns="45720" rIns="45720" tIns="27432" bIns="27432" anchor="t">
-            <a:spAutoFit/>
-          </a:bodyPr>
-          <a:lstStyle/>
-          <a:p>
-            <a:pPr algn="r"/>
-            <a:r>
-              <a:rPr sz="1000" b="0">
-                <a:solidFill>
-                  <a:srgbClr val="BCAAA4"/>
-                </a:solidFill>
-                <a:latin typeface="Calibri"/>
-              </a:rPr>
-              <a:t>15</a:t>
             </a:r>
           </a:p>
         </p:txBody>
@@ -18272,7 +13470,7 @@
                 </a:solidFill>
                 <a:latin typeface="Calibri"/>
               </a:rPr>
-              <a:t>Brayan Guerrero</a:t>
+              <a:t>Demo del prototipo</a:t>
             </a:r>
           </a:p>
         </p:txBody>
@@ -18307,7 +13505,7 @@
                 </a:solidFill>
                 <a:latin typeface="Calibri"/>
               </a:rPr>
-              <a:t>Responsabilidades planificadas y contribuciones</a:t>
+              <a:t>Login → Dashboard → Clientes, Productos e Inventario → Nueva Exportación → Reportes</a:t>
             </a:r>
           </a:p>
         </p:txBody>
@@ -18391,7 +13589,7 @@
         <p:spPr>
           <a:xfrm>
             <a:off x="548640" y="1463040"/>
-            <a:ext cx="5394960" cy="1920240"/>
+            <a:ext cx="11109960" cy="822960"/>
           </a:xfrm>
           <a:prstGeom prst="roundRect">
             <a:avLst>
@@ -18430,14 +13628,58 @@
       </p:sp>
       <p:sp>
         <p:nvSpPr>
-          <p:cNvPr id="8" name="TextBox 7"/>
+          <p:cNvPr id="8" name="Oval 7"/>
+          <p:cNvSpPr/>
+          <p:nvPr/>
+        </p:nvSpPr>
+        <p:spPr>
+          <a:xfrm>
+            <a:off x="685800" y="1600200"/>
+            <a:ext cx="548640" cy="548640"/>
+          </a:xfrm>
+          <a:prstGeom prst="ellipse">
+            <a:avLst/>
+          </a:prstGeom>
+          <a:solidFill>
+            <a:srgbClr val="66BB6A"/>
+          </a:solidFill>
+          <a:ln>
+            <a:noFill/>
+          </a:ln>
+          <a:effectLst/>
+        </p:spPr>
+        <p:style>
+          <a:lnRef idx="1">
+            <a:schemeClr val="accent1"/>
+          </a:lnRef>
+          <a:fillRef idx="3">
+            <a:schemeClr val="accent1"/>
+          </a:fillRef>
+          <a:effectRef idx="2">
+            <a:schemeClr val="accent1"/>
+          </a:effectRef>
+          <a:fontRef idx="minor">
+            <a:schemeClr val="lt1"/>
+          </a:fontRef>
+        </p:style>
+        <p:txBody>
+          <a:bodyPr rtlCol="0" anchor="ctr"/>
+          <a:lstStyle/>
+          <a:p>
+            <a:pPr algn="ctr"/>
+          </a:p>
+        </p:txBody>
+      </p:sp>
+      <p:sp>
+        <p:nvSpPr>
+          <p:cNvPr id="9" name="TextBox 8"/>
           <p:cNvSpPr txBox="1"/>
           <p:nvPr/>
         </p:nvSpPr>
         <p:spPr>
           <a:xfrm>
-            <a:off x="731520" y="1554480"/>
-            <a:ext cx="5029200" cy="365760"/>
+            <a:off x="685800" y="1600200"/>
+            <a:ext cx="548640" cy="548640"/>
           </a:xfrm>
           <a:prstGeom prst="rect">
             <a:avLst/>
@@ -18445,34 +13687,34 @@
           <a:noFill/>
         </p:spPr>
         <p:txBody>
-          <a:bodyPr wrap="square" lIns="45720" rIns="45720" tIns="27432" bIns="27432" anchor="t">
+          <a:bodyPr wrap="square" lIns="45720" rIns="45720" tIns="27432" bIns="27432" anchor="ctr">
             <a:spAutoFit/>
           </a:bodyPr>
           <a:lstStyle/>
           <a:p>
-            <a:pPr algn="l"/>
-            <a:r>
-              <a:rPr sz="1600" b="1">
-                <a:solidFill>
-                  <a:srgbClr val="66BB6A"/>
-                </a:solidFill>
-                <a:latin typeface="Calibri"/>
-              </a:rPr>
-              <a:t>Módulos / áreas planificados</a:t>
-            </a:r>
-          </a:p>
-        </p:txBody>
-      </p:sp>
-      <p:sp>
-        <p:nvSpPr>
-          <p:cNvPr id="9" name="TextBox 8"/>
+            <a:pPr algn="ctr"/>
+            <a:r>
+              <a:rPr sz="2000" b="1">
+                <a:solidFill>
+                  <a:srgbClr val="15110F"/>
+                </a:solidFill>
+                <a:latin typeface="Calibri"/>
+              </a:rPr>
+              <a:t>1</a:t>
+            </a:r>
+          </a:p>
+        </p:txBody>
+      </p:sp>
+      <p:sp>
+        <p:nvSpPr>
+          <p:cNvPr id="10" name="TextBox 9"/>
           <p:cNvSpPr txBox="1"/>
           <p:nvPr/>
         </p:nvSpPr>
         <p:spPr>
           <a:xfrm>
-            <a:off x="731520" y="1965960"/>
-            <a:ext cx="5029200" cy="548640"/>
+            <a:off x="1463040" y="1554480"/>
+            <a:ext cx="3566160" cy="640080"/>
           </a:xfrm>
           <a:prstGeom prst="rect">
             <a:avLst/>
@@ -18480,34 +13722,34 @@
           <a:noFill/>
         </p:spPr>
         <p:txBody>
-          <a:bodyPr wrap="square" lIns="45720" rIns="45720" tIns="27432" bIns="27432" anchor="t">
+          <a:bodyPr wrap="square" lIns="45720" rIns="45720" tIns="27432" bIns="27432" anchor="ctr">
             <a:spAutoFit/>
           </a:bodyPr>
           <a:lstStyle/>
           <a:p>
             <a:pPr algn="l"/>
             <a:r>
-              <a:rPr sz="1800" b="1">
+              <a:rPr sz="1700" b="1">
                 <a:solidFill>
                   <a:srgbClr val="F3E9E2"/>
                 </a:solidFill>
                 <a:latin typeface="Calibri"/>
               </a:rPr>
-              <a:t>Usuarios / Autenticación y Dashboard</a:t>
-            </a:r>
-          </a:p>
-        </p:txBody>
-      </p:sp>
-      <p:sp>
-        <p:nvSpPr>
-          <p:cNvPr id="10" name="TextBox 9"/>
+              <a:t>Login</a:t>
+            </a:r>
+          </a:p>
+        </p:txBody>
+      </p:sp>
+      <p:sp>
+        <p:nvSpPr>
+          <p:cNvPr id="11" name="TextBox 10"/>
           <p:cNvSpPr txBox="1"/>
           <p:nvPr/>
         </p:nvSpPr>
         <p:spPr>
           <a:xfrm>
-            <a:off x="731520" y="2697480"/>
-            <a:ext cx="5029200" cy="640080"/>
+            <a:off x="5120640" y="1554480"/>
+            <a:ext cx="6400800" cy="640080"/>
           </a:xfrm>
           <a:prstGeom prst="rect">
             <a:avLst/>
@@ -18515,34 +13757,34 @@
           <a:noFill/>
         </p:spPr>
         <p:txBody>
-          <a:bodyPr wrap="square" lIns="45720" rIns="45720" tIns="27432" bIns="27432" anchor="t">
+          <a:bodyPr wrap="square" lIns="45720" rIns="45720" tIns="27432" bIns="27432" anchor="ctr">
             <a:spAutoFit/>
           </a:bodyPr>
           <a:lstStyle/>
           <a:p>
             <a:pPr algn="l"/>
             <a:r>
-              <a:rPr sz="1200" b="0">
+              <a:rPr sz="1400" b="0">
                 <a:solidFill>
                   <a:srgbClr val="BCAAA4"/>
                 </a:solidFill>
                 <a:latin typeface="Calibri"/>
               </a:rPr>
-              <a:t>Historias: HU-01, HU-05, HU-06, HU-20, HU-21</a:t>
-            </a:r>
-          </a:p>
-        </p:txBody>
-      </p:sp>
-      <p:sp>
-        <p:nvSpPr>
-          <p:cNvPr id="11" name="Rounded Rectangle 10"/>
+              <a:t>Credenciales inválidas → mensaje genérico; ingreso con usuario de prueba</a:t>
+            </a:r>
+          </a:p>
+        </p:txBody>
+      </p:sp>
+      <p:sp>
+        <p:nvSpPr>
+          <p:cNvPr id="12" name="Rounded Rectangle 11"/>
           <p:cNvSpPr/>
           <p:nvPr/>
         </p:nvSpPr>
         <p:spPr>
           <a:xfrm>
-            <a:off x="548640" y="3566160"/>
-            <a:ext cx="5394960" cy="2651760"/>
+            <a:off x="548640" y="2395728"/>
+            <a:ext cx="11109960" cy="822960"/>
           </a:xfrm>
           <a:prstGeom prst="roundRect">
             <a:avLst>
@@ -18581,14 +13823,58 @@
       </p:sp>
       <p:sp>
         <p:nvSpPr>
-          <p:cNvPr id="12" name="TextBox 11"/>
+          <p:cNvPr id="13" name="Oval 12"/>
+          <p:cNvSpPr/>
+          <p:nvPr/>
+        </p:nvSpPr>
+        <p:spPr>
+          <a:xfrm>
+            <a:off x="685800" y="2532888"/>
+            <a:ext cx="548640" cy="548640"/>
+          </a:xfrm>
+          <a:prstGeom prst="ellipse">
+            <a:avLst/>
+          </a:prstGeom>
+          <a:solidFill>
+            <a:srgbClr val="66BB6A"/>
+          </a:solidFill>
+          <a:ln>
+            <a:noFill/>
+          </a:ln>
+          <a:effectLst/>
+        </p:spPr>
+        <p:style>
+          <a:lnRef idx="1">
+            <a:schemeClr val="accent1"/>
+          </a:lnRef>
+          <a:fillRef idx="3">
+            <a:schemeClr val="accent1"/>
+          </a:fillRef>
+          <a:effectRef idx="2">
+            <a:schemeClr val="accent1"/>
+          </a:effectRef>
+          <a:fontRef idx="minor">
+            <a:schemeClr val="lt1"/>
+          </a:fontRef>
+        </p:style>
+        <p:txBody>
+          <a:bodyPr rtlCol="0" anchor="ctr"/>
+          <a:lstStyle/>
+          <a:p>
+            <a:pPr algn="ctr"/>
+          </a:p>
+        </p:txBody>
+      </p:sp>
+      <p:sp>
+        <p:nvSpPr>
+          <p:cNvPr id="14" name="TextBox 13"/>
           <p:cNvSpPr txBox="1"/>
           <p:nvPr/>
         </p:nvSpPr>
         <p:spPr>
           <a:xfrm>
-            <a:off x="731520" y="3657600"/>
-            <a:ext cx="5029200" cy="365760"/>
+            <a:off x="685800" y="2532888"/>
+            <a:ext cx="548640" cy="548640"/>
           </a:xfrm>
           <a:prstGeom prst="rect">
             <a:avLst/>
@@ -18596,34 +13882,34 @@
           <a:noFill/>
         </p:spPr>
         <p:txBody>
-          <a:bodyPr wrap="square" lIns="45720" rIns="45720" tIns="27432" bIns="27432" anchor="t">
+          <a:bodyPr wrap="square" lIns="45720" rIns="45720" tIns="27432" bIns="27432" anchor="ctr">
             <a:spAutoFit/>
           </a:bodyPr>
           <a:lstStyle/>
           <a:p>
-            <a:pPr algn="l"/>
-            <a:r>
-              <a:rPr sz="1600" b="1">
-                <a:solidFill>
-                  <a:srgbClr val="66BB6A"/>
-                </a:solidFill>
-                <a:latin typeface="Calibri"/>
-              </a:rPr>
-              <a:t>Plan de pruebas</a:t>
-            </a:r>
-          </a:p>
-        </p:txBody>
-      </p:sp>
-      <p:sp>
-        <p:nvSpPr>
-          <p:cNvPr id="13" name="TextBox 12"/>
+            <a:pPr algn="ctr"/>
+            <a:r>
+              <a:rPr sz="2000" b="1">
+                <a:solidFill>
+                  <a:srgbClr val="15110F"/>
+                </a:solidFill>
+                <a:latin typeface="Calibri"/>
+              </a:rPr>
+              <a:t>2</a:t>
+            </a:r>
+          </a:p>
+        </p:txBody>
+      </p:sp>
+      <p:sp>
+        <p:nvSpPr>
+          <p:cNvPr id="15" name="TextBox 14"/>
           <p:cNvSpPr txBox="1"/>
           <p:nvPr/>
         </p:nvSpPr>
         <p:spPr>
           <a:xfrm>
-            <a:off x="731520" y="4069080"/>
-            <a:ext cx="5029200" cy="2103120"/>
+            <a:off x="1463040" y="2487168"/>
+            <a:ext cx="3566160" cy="640080"/>
           </a:xfrm>
           <a:prstGeom prst="rect">
             <a:avLst/>
@@ -18631,124 +13917,69 @@
           <a:noFill/>
         </p:spPr>
         <p:txBody>
-          <a:bodyPr wrap="square" lIns="45720">
+          <a:bodyPr wrap="square" lIns="45720" rIns="45720" tIns="27432" bIns="27432" anchor="ctr">
             <a:spAutoFit/>
           </a:bodyPr>
           <a:lstStyle/>
           <a:p>
-            <a:pPr>
-              <a:spcAft>
-                <a:spcPts val="600"/>
-              </a:spcAft>
-            </a:pPr>
-            <a:r>
-              <a:rPr sz="800">
-                <a:solidFill>
-                  <a:srgbClr val="66BB6A"/>
-                </a:solidFill>
-                <a:latin typeface="Calibri"/>
-              </a:rPr>
-              <a:t>● </a:t>
-            </a:r>
-            <a:r>
-              <a:rPr b="1" sz="1300">
+            <a:pPr algn="l"/>
+            <a:r>
+              <a:rPr sz="1700" b="1">
                 <a:solidFill>
                   <a:srgbClr val="F3E9E2"/>
                 </a:solidFill>
                 <a:latin typeface="Calibri"/>
               </a:rPr>
-              <a:t>Casos asignados: </a:t>
-            </a:r>
-            <a:r>
-              <a:rPr sz="1300">
+              <a:t>Dashboard</a:t>
+            </a:r>
+          </a:p>
+        </p:txBody>
+      </p:sp>
+      <p:sp>
+        <p:nvSpPr>
+          <p:cNvPr id="16" name="TextBox 15"/>
+          <p:cNvSpPr txBox="1"/>
+          <p:nvPr/>
+        </p:nvSpPr>
+        <p:spPr>
+          <a:xfrm>
+            <a:off x="5120640" y="2487168"/>
+            <a:ext cx="6400800" cy="640080"/>
+          </a:xfrm>
+          <a:prstGeom prst="rect">
+            <a:avLst/>
+          </a:prstGeom>
+          <a:noFill/>
+        </p:spPr>
+        <p:txBody>
+          <a:bodyPr wrap="square" lIns="45720" rIns="45720" tIns="27432" bIns="27432" anchor="ctr">
+            <a:spAutoFit/>
+          </a:bodyPr>
+          <a:lstStyle/>
+          <a:p>
+            <a:pPr algn="l"/>
+            <a:r>
+              <a:rPr sz="1400" b="0">
                 <a:solidFill>
                   <a:srgbClr val="BCAAA4"/>
                 </a:solidFill>
                 <a:latin typeface="Calibri"/>
               </a:rPr>
-              <a:t>8</a:t>
-            </a:r>
-          </a:p>
-          <a:p>
-            <a:pPr>
-              <a:spcAft>
-                <a:spcPts val="600"/>
-              </a:spcAft>
-            </a:pPr>
-            <a:r>
-              <a:rPr sz="800">
-                <a:solidFill>
-                  <a:srgbClr val="66BB6A"/>
-                </a:solidFill>
-                <a:latin typeface="Calibri"/>
-              </a:rPr>
-              <a:t>● </a:t>
-            </a:r>
-            <a:r>
-              <a:rPr b="1" sz="1300">
-                <a:solidFill>
-                  <a:srgbClr val="F3E9E2"/>
-                </a:solidFill>
-                <a:latin typeface="Calibri"/>
-              </a:rPr>
-              <a:t>De Sprint 1: </a:t>
-            </a:r>
-            <a:r>
-              <a:rPr sz="1300">
-                <a:solidFill>
-                  <a:srgbClr val="BCAAA4"/>
-                </a:solidFill>
-                <a:latin typeface="Calibri"/>
-              </a:rPr>
-              <a:t>7 casos</a:t>
-            </a:r>
-          </a:p>
-          <a:p>
-            <a:pPr>
-              <a:spcAft>
-                <a:spcPts val="600"/>
-              </a:spcAft>
-            </a:pPr>
-            <a:r>
-              <a:rPr sz="800">
-                <a:solidFill>
-                  <a:srgbClr val="66BB6A"/>
-                </a:solidFill>
-                <a:latin typeface="Calibri"/>
-              </a:rPr>
-              <a:t>● </a:t>
-            </a:r>
-            <a:r>
-              <a:rPr b="1" sz="1300">
-                <a:solidFill>
-                  <a:srgbClr val="F3E9E2"/>
-                </a:solidFill>
-                <a:latin typeface="Calibri"/>
-              </a:rPr>
-              <a:t>IDs: </a:t>
-            </a:r>
-            <a:r>
-              <a:rPr sz="1300">
-                <a:solidFill>
-                  <a:srgbClr val="BCAAA4"/>
-                </a:solidFill>
-                <a:latin typeface="Calibri"/>
-              </a:rPr>
-              <a:t>QA001, QA003, QA004, QC001, QC002, QC015, QC019, QC026</a:t>
-            </a:r>
-          </a:p>
-        </p:txBody>
-      </p:sp>
-      <p:sp>
-        <p:nvSpPr>
-          <p:cNvPr id="14" name="Rounded Rectangle 13"/>
+              <a:t>KPIs, exportaciones por país, productos más vendidos, últimas exportaciones</a:t>
+            </a:r>
+          </a:p>
+        </p:txBody>
+      </p:sp>
+      <p:sp>
+        <p:nvSpPr>
+          <p:cNvPr id="17" name="Rounded Rectangle 16"/>
           <p:cNvSpPr/>
           <p:nvPr/>
         </p:nvSpPr>
         <p:spPr>
           <a:xfrm>
-            <a:off x="6126480" y="1463040"/>
-            <a:ext cx="5532120" cy="4754880"/>
+            <a:off x="548640" y="3328416"/>
+            <a:ext cx="11109960" cy="822960"/>
           </a:xfrm>
           <a:prstGeom prst="roundRect">
             <a:avLst>
@@ -18787,14 +14018,58 @@
       </p:sp>
       <p:sp>
         <p:nvSpPr>
-          <p:cNvPr id="15" name="TextBox 14"/>
+          <p:cNvPr id="18" name="Oval 17"/>
+          <p:cNvSpPr/>
+          <p:nvPr/>
+        </p:nvSpPr>
+        <p:spPr>
+          <a:xfrm>
+            <a:off x="685800" y="3465576"/>
+            <a:ext cx="548640" cy="548640"/>
+          </a:xfrm>
+          <a:prstGeom prst="ellipse">
+            <a:avLst/>
+          </a:prstGeom>
+          <a:solidFill>
+            <a:srgbClr val="66BB6A"/>
+          </a:solidFill>
+          <a:ln>
+            <a:noFill/>
+          </a:ln>
+          <a:effectLst/>
+        </p:spPr>
+        <p:style>
+          <a:lnRef idx="1">
+            <a:schemeClr val="accent1"/>
+          </a:lnRef>
+          <a:fillRef idx="3">
+            <a:schemeClr val="accent1"/>
+          </a:fillRef>
+          <a:effectRef idx="2">
+            <a:schemeClr val="accent1"/>
+          </a:effectRef>
+          <a:fontRef idx="minor">
+            <a:schemeClr val="lt1"/>
+          </a:fontRef>
+        </p:style>
+        <p:txBody>
+          <a:bodyPr rtlCol="0" anchor="ctr"/>
+          <a:lstStyle/>
+          <a:p>
+            <a:pPr algn="ctr"/>
+          </a:p>
+        </p:txBody>
+      </p:sp>
+      <p:sp>
+        <p:nvSpPr>
+          <p:cNvPr id="19" name="TextBox 18"/>
           <p:cNvSpPr txBox="1"/>
           <p:nvPr/>
         </p:nvSpPr>
         <p:spPr>
           <a:xfrm>
-            <a:off x="6309360" y="1554480"/>
-            <a:ext cx="5212080" cy="365760"/>
+            <a:off x="685800" y="3465576"/>
+            <a:ext cx="548640" cy="548640"/>
           </a:xfrm>
           <a:prstGeom prst="rect">
             <a:avLst/>
@@ -18802,34 +14077,34 @@
           <a:noFill/>
         </p:spPr>
         <p:txBody>
-          <a:bodyPr wrap="square" lIns="45720" rIns="45720" tIns="27432" bIns="27432" anchor="t">
+          <a:bodyPr wrap="square" lIns="45720" rIns="45720" tIns="27432" bIns="27432" anchor="ctr">
             <a:spAutoFit/>
           </a:bodyPr>
           <a:lstStyle/>
           <a:p>
-            <a:pPr algn="l"/>
-            <a:r>
-              <a:rPr sz="1600" b="1">
-                <a:solidFill>
-                  <a:srgbClr val="66BB6A"/>
-                </a:solidFill>
-                <a:latin typeface="Calibri"/>
-              </a:rPr>
-              <a:t>Compromisos y contribuciones</a:t>
-            </a:r>
-          </a:p>
-        </p:txBody>
-      </p:sp>
-      <p:sp>
-        <p:nvSpPr>
-          <p:cNvPr id="16" name="TextBox 15"/>
+            <a:pPr algn="ctr"/>
+            <a:r>
+              <a:rPr sz="2000" b="1">
+                <a:solidFill>
+                  <a:srgbClr val="15110F"/>
+                </a:solidFill>
+                <a:latin typeface="Calibri"/>
+              </a:rPr>
+              <a:t>3</a:t>
+            </a:r>
+          </a:p>
+        </p:txBody>
+      </p:sp>
+      <p:sp>
+        <p:nvSpPr>
+          <p:cNvPr id="20" name="TextBox 19"/>
           <p:cNvSpPr txBox="1"/>
           <p:nvPr/>
         </p:nvSpPr>
         <p:spPr>
           <a:xfrm>
-            <a:off x="6309360" y="2011680"/>
-            <a:ext cx="5212080" cy="4114800"/>
+            <a:off x="1463040" y="3419856"/>
+            <a:ext cx="3566160" cy="640080"/>
           </a:xfrm>
           <a:prstGeom prst="rect">
             <a:avLst/>
@@ -18837,178 +14112,445 @@
           <a:noFill/>
         </p:spPr>
         <p:txBody>
-          <a:bodyPr wrap="square" lIns="45720">
+          <a:bodyPr wrap="square" lIns="45720" rIns="45720" tIns="27432" bIns="27432" anchor="ctr">
             <a:spAutoFit/>
           </a:bodyPr>
           <a:lstStyle/>
           <a:p>
-            <a:pPr>
-              <a:spcAft>
-                <a:spcPts val="1000"/>
-              </a:spcAft>
-            </a:pPr>
-            <a:r>
-              <a:rPr sz="900">
-                <a:solidFill>
-                  <a:srgbClr val="66BB6A"/>
-                </a:solidFill>
-                <a:latin typeface="Calibri"/>
-              </a:rPr>
-              <a:t>● </a:t>
-            </a:r>
-            <a:r>
-              <a:rPr b="1" sz="1400">
+            <a:pPr algn="l"/>
+            <a:r>
+              <a:rPr sz="1700" b="1">
                 <a:solidFill>
                   <a:srgbClr val="F3E9E2"/>
                 </a:solidFill>
                 <a:latin typeface="Calibri"/>
               </a:rPr>
-              <a:t>HU-05: </a:t>
-            </a:r>
-            <a:r>
-              <a:rPr sz="1400">
+              <a:t>Clientes · Productos · Inventario</a:t>
+            </a:r>
+          </a:p>
+        </p:txBody>
+      </p:sp>
+      <p:sp>
+        <p:nvSpPr>
+          <p:cNvPr id="21" name="TextBox 20"/>
+          <p:cNvSpPr txBox="1"/>
+          <p:nvPr/>
+        </p:nvSpPr>
+        <p:spPr>
+          <a:xfrm>
+            <a:off x="5120640" y="3419856"/>
+            <a:ext cx="6400800" cy="640080"/>
+          </a:xfrm>
+          <a:prstGeom prst="rect">
+            <a:avLst/>
+          </a:prstGeom>
+          <a:noFill/>
+        </p:spPr>
+        <p:txBody>
+          <a:bodyPr wrap="square" lIns="45720" rIns="45720" tIns="27432" bIns="27432" anchor="ctr">
+            <a:spAutoFit/>
+          </a:bodyPr>
+          <a:lstStyle/>
+          <a:p>
+            <a:pPr algn="l"/>
+            <a:r>
+              <a:rPr sz="1400" b="0">
                 <a:solidFill>
                   <a:srgbClr val="BCAAA4"/>
                 </a:solidFill>
                 <a:latin typeface="Calibri"/>
               </a:rPr>
-              <a:t>Gestión de usuarios y roles · 5 pts · Sprint 3</a:t>
-            </a:r>
-          </a:p>
-          <a:p>
-            <a:pPr>
-              <a:spcAft>
-                <a:spcPts val="1000"/>
-              </a:spcAft>
-            </a:pPr>
-            <a:r>
-              <a:rPr sz="900">
-                <a:solidFill>
-                  <a:srgbClr val="66BB6A"/>
-                </a:solidFill>
-                <a:latin typeface="Calibri"/>
-              </a:rPr>
-              <a:t>● </a:t>
-            </a:r>
-            <a:r>
-              <a:rPr b="1" sz="1400">
+              <a:t>Registro de cliente UE, catálogo y stock por bodega</a:t>
+            </a:r>
+          </a:p>
+        </p:txBody>
+      </p:sp>
+      <p:sp>
+        <p:nvSpPr>
+          <p:cNvPr id="22" name="Rounded Rectangle 21"/>
+          <p:cNvSpPr/>
+          <p:nvPr/>
+        </p:nvSpPr>
+        <p:spPr>
+          <a:xfrm>
+            <a:off x="548640" y="4261104"/>
+            <a:ext cx="11109960" cy="822960"/>
+          </a:xfrm>
+          <a:prstGeom prst="roundRect">
+            <a:avLst>
+              <a:gd name="adj" fmla="val 6000"/>
+            </a:avLst>
+          </a:prstGeom>
+          <a:solidFill>
+            <a:srgbClr val="221A16"/>
+          </a:solidFill>
+          <a:ln>
+            <a:noFill/>
+          </a:ln>
+          <a:effectLst/>
+        </p:spPr>
+        <p:style>
+          <a:lnRef idx="1">
+            <a:schemeClr val="accent1"/>
+          </a:lnRef>
+          <a:fillRef idx="3">
+            <a:schemeClr val="accent1"/>
+          </a:fillRef>
+          <a:effectRef idx="2">
+            <a:schemeClr val="accent1"/>
+          </a:effectRef>
+          <a:fontRef idx="minor">
+            <a:schemeClr val="lt1"/>
+          </a:fontRef>
+        </p:style>
+        <p:txBody>
+          <a:bodyPr rtlCol="0" anchor="ctr"/>
+          <a:lstStyle/>
+          <a:p>
+            <a:pPr algn="ctr"/>
+          </a:p>
+        </p:txBody>
+      </p:sp>
+      <p:sp>
+        <p:nvSpPr>
+          <p:cNvPr id="23" name="Oval 22"/>
+          <p:cNvSpPr/>
+          <p:nvPr/>
+        </p:nvSpPr>
+        <p:spPr>
+          <a:xfrm>
+            <a:off x="685800" y="4398264"/>
+            <a:ext cx="548640" cy="548640"/>
+          </a:xfrm>
+          <a:prstGeom prst="ellipse">
+            <a:avLst/>
+          </a:prstGeom>
+          <a:solidFill>
+            <a:srgbClr val="66BB6A"/>
+          </a:solidFill>
+          <a:ln>
+            <a:noFill/>
+          </a:ln>
+          <a:effectLst/>
+        </p:spPr>
+        <p:style>
+          <a:lnRef idx="1">
+            <a:schemeClr val="accent1"/>
+          </a:lnRef>
+          <a:fillRef idx="3">
+            <a:schemeClr val="accent1"/>
+          </a:fillRef>
+          <a:effectRef idx="2">
+            <a:schemeClr val="accent1"/>
+          </a:effectRef>
+          <a:fontRef idx="minor">
+            <a:schemeClr val="lt1"/>
+          </a:fontRef>
+        </p:style>
+        <p:txBody>
+          <a:bodyPr rtlCol="0" anchor="ctr"/>
+          <a:lstStyle/>
+          <a:p>
+            <a:pPr algn="ctr"/>
+          </a:p>
+        </p:txBody>
+      </p:sp>
+      <p:sp>
+        <p:nvSpPr>
+          <p:cNvPr id="24" name="TextBox 23"/>
+          <p:cNvSpPr txBox="1"/>
+          <p:nvPr/>
+        </p:nvSpPr>
+        <p:spPr>
+          <a:xfrm>
+            <a:off x="685800" y="4398264"/>
+            <a:ext cx="548640" cy="548640"/>
+          </a:xfrm>
+          <a:prstGeom prst="rect">
+            <a:avLst/>
+          </a:prstGeom>
+          <a:noFill/>
+        </p:spPr>
+        <p:txBody>
+          <a:bodyPr wrap="square" lIns="45720" rIns="45720" tIns="27432" bIns="27432" anchor="ctr">
+            <a:spAutoFit/>
+          </a:bodyPr>
+          <a:lstStyle/>
+          <a:p>
+            <a:pPr algn="ctr"/>
+            <a:r>
+              <a:rPr sz="2000" b="1">
+                <a:solidFill>
+                  <a:srgbClr val="15110F"/>
+                </a:solidFill>
+                <a:latin typeface="Calibri"/>
+              </a:rPr>
+              <a:t>4</a:t>
+            </a:r>
+          </a:p>
+        </p:txBody>
+      </p:sp>
+      <p:sp>
+        <p:nvSpPr>
+          <p:cNvPr id="25" name="TextBox 24"/>
+          <p:cNvSpPr txBox="1"/>
+          <p:nvPr/>
+        </p:nvSpPr>
+        <p:spPr>
+          <a:xfrm>
+            <a:off x="1463040" y="4352544"/>
+            <a:ext cx="3566160" cy="640080"/>
+          </a:xfrm>
+          <a:prstGeom prst="rect">
+            <a:avLst/>
+          </a:prstGeom>
+          <a:noFill/>
+        </p:spPr>
+        <p:txBody>
+          <a:bodyPr wrap="square" lIns="45720" rIns="45720" tIns="27432" bIns="27432" anchor="ctr">
+            <a:spAutoFit/>
+          </a:bodyPr>
+          <a:lstStyle/>
+          <a:p>
+            <a:pPr algn="l"/>
+            <a:r>
+              <a:rPr sz="1700" b="1">
                 <a:solidFill>
                   <a:srgbClr val="F3E9E2"/>
                 </a:solidFill>
                 <a:latin typeface="Calibri"/>
               </a:rPr>
-              <a:t>HU-06: </a:t>
-            </a:r>
-            <a:r>
-              <a:rPr sz="1400">
+              <a:t>Nueva Exportación</a:t>
+            </a:r>
+          </a:p>
+        </p:txBody>
+      </p:sp>
+      <p:sp>
+        <p:nvSpPr>
+          <p:cNvPr id="26" name="TextBox 25"/>
+          <p:cNvSpPr txBox="1"/>
+          <p:nvPr/>
+        </p:nvSpPr>
+        <p:spPr>
+          <a:xfrm>
+            <a:off x="5120640" y="4352544"/>
+            <a:ext cx="6400800" cy="640080"/>
+          </a:xfrm>
+          <a:prstGeom prst="rect">
+            <a:avLst/>
+          </a:prstGeom>
+          <a:noFill/>
+        </p:spPr>
+        <p:txBody>
+          <a:bodyPr wrap="square" lIns="45720" rIns="45720" tIns="27432" bIns="27432" anchor="ctr">
+            <a:spAutoFit/>
+          </a:bodyPr>
+          <a:lstStyle/>
+          <a:p>
+            <a:pPr algn="l"/>
+            <a:r>
+              <a:rPr sz="1400" b="0">
                 <a:solidFill>
                   <a:srgbClr val="BCAAA4"/>
                 </a:solidFill>
                 <a:latin typeface="Calibri"/>
               </a:rPr>
-              <a:t>Control de acceso por rol · 3 pts · Sprint 3</a:t>
-            </a:r>
-          </a:p>
-          <a:p>
-            <a:pPr>
-              <a:spcAft>
-                <a:spcPts val="1000"/>
-              </a:spcAft>
-            </a:pPr>
-            <a:r>
-              <a:rPr sz="900">
-                <a:solidFill>
-                  <a:srgbClr val="66BB6A"/>
-                </a:solidFill>
-                <a:latin typeface="Calibri"/>
-              </a:rPr>
-              <a:t>● </a:t>
-            </a:r>
-            <a:r>
-              <a:rPr b="1" sz="1400">
+              <a:t>Asistente de 4 pasos: básica, cliente y destino, productos, documentos</a:t>
+            </a:r>
+          </a:p>
+        </p:txBody>
+      </p:sp>
+      <p:sp>
+        <p:nvSpPr>
+          <p:cNvPr id="27" name="Rounded Rectangle 26"/>
+          <p:cNvSpPr/>
+          <p:nvPr/>
+        </p:nvSpPr>
+        <p:spPr>
+          <a:xfrm>
+            <a:off x="548640" y="5193792"/>
+            <a:ext cx="11109960" cy="822960"/>
+          </a:xfrm>
+          <a:prstGeom prst="roundRect">
+            <a:avLst>
+              <a:gd name="adj" fmla="val 6000"/>
+            </a:avLst>
+          </a:prstGeom>
+          <a:solidFill>
+            <a:srgbClr val="221A16"/>
+          </a:solidFill>
+          <a:ln>
+            <a:noFill/>
+          </a:ln>
+          <a:effectLst/>
+        </p:spPr>
+        <p:style>
+          <a:lnRef idx="1">
+            <a:schemeClr val="accent1"/>
+          </a:lnRef>
+          <a:fillRef idx="3">
+            <a:schemeClr val="accent1"/>
+          </a:fillRef>
+          <a:effectRef idx="2">
+            <a:schemeClr val="accent1"/>
+          </a:effectRef>
+          <a:fontRef idx="minor">
+            <a:schemeClr val="lt1"/>
+          </a:fontRef>
+        </p:style>
+        <p:txBody>
+          <a:bodyPr rtlCol="0" anchor="ctr"/>
+          <a:lstStyle/>
+          <a:p>
+            <a:pPr algn="ctr"/>
+          </a:p>
+        </p:txBody>
+      </p:sp>
+      <p:sp>
+        <p:nvSpPr>
+          <p:cNvPr id="28" name="Oval 27"/>
+          <p:cNvSpPr/>
+          <p:nvPr/>
+        </p:nvSpPr>
+        <p:spPr>
+          <a:xfrm>
+            <a:off x="685800" y="5330952"/>
+            <a:ext cx="548640" cy="548640"/>
+          </a:xfrm>
+          <a:prstGeom prst="ellipse">
+            <a:avLst/>
+          </a:prstGeom>
+          <a:solidFill>
+            <a:srgbClr val="66BB6A"/>
+          </a:solidFill>
+          <a:ln>
+            <a:noFill/>
+          </a:ln>
+          <a:effectLst/>
+        </p:spPr>
+        <p:style>
+          <a:lnRef idx="1">
+            <a:schemeClr val="accent1"/>
+          </a:lnRef>
+          <a:fillRef idx="3">
+            <a:schemeClr val="accent1"/>
+          </a:fillRef>
+          <a:effectRef idx="2">
+            <a:schemeClr val="accent1"/>
+          </a:effectRef>
+          <a:fontRef idx="minor">
+            <a:schemeClr val="lt1"/>
+          </a:fontRef>
+        </p:style>
+        <p:txBody>
+          <a:bodyPr rtlCol="0" anchor="ctr"/>
+          <a:lstStyle/>
+          <a:p>
+            <a:pPr algn="ctr"/>
+          </a:p>
+        </p:txBody>
+      </p:sp>
+      <p:sp>
+        <p:nvSpPr>
+          <p:cNvPr id="29" name="TextBox 28"/>
+          <p:cNvSpPr txBox="1"/>
+          <p:nvPr/>
+        </p:nvSpPr>
+        <p:spPr>
+          <a:xfrm>
+            <a:off x="685800" y="5330952"/>
+            <a:ext cx="548640" cy="548640"/>
+          </a:xfrm>
+          <a:prstGeom prst="rect">
+            <a:avLst/>
+          </a:prstGeom>
+          <a:noFill/>
+        </p:spPr>
+        <p:txBody>
+          <a:bodyPr wrap="square" lIns="45720" rIns="45720" tIns="27432" bIns="27432" anchor="ctr">
+            <a:spAutoFit/>
+          </a:bodyPr>
+          <a:lstStyle/>
+          <a:p>
+            <a:pPr algn="ctr"/>
+            <a:r>
+              <a:rPr sz="2000" b="1">
+                <a:solidFill>
+                  <a:srgbClr val="15110F"/>
+                </a:solidFill>
+                <a:latin typeface="Calibri"/>
+              </a:rPr>
+              <a:t>5</a:t>
+            </a:r>
+          </a:p>
+        </p:txBody>
+      </p:sp>
+      <p:sp>
+        <p:nvSpPr>
+          <p:cNvPr id="30" name="TextBox 29"/>
+          <p:cNvSpPr txBox="1"/>
+          <p:nvPr/>
+        </p:nvSpPr>
+        <p:spPr>
+          <a:xfrm>
+            <a:off x="1463040" y="5285231"/>
+            <a:ext cx="3566160" cy="640080"/>
+          </a:xfrm>
+          <a:prstGeom prst="rect">
+            <a:avLst/>
+          </a:prstGeom>
+          <a:noFill/>
+        </p:spPr>
+        <p:txBody>
+          <a:bodyPr wrap="square" lIns="45720" rIns="45720" tIns="27432" bIns="27432" anchor="ctr">
+            <a:spAutoFit/>
+          </a:bodyPr>
+          <a:lstStyle/>
+          <a:p>
+            <a:pPr algn="l"/>
+            <a:r>
+              <a:rPr sz="1700" b="1">
                 <a:solidFill>
                   <a:srgbClr val="F3E9E2"/>
                 </a:solidFill>
                 <a:latin typeface="Calibri"/>
               </a:rPr>
-              <a:t>HU-20: </a:t>
-            </a:r>
-            <a:r>
-              <a:rPr sz="1400">
+              <a:t>Reportes</a:t>
+            </a:r>
+          </a:p>
+        </p:txBody>
+      </p:sp>
+      <p:sp>
+        <p:nvSpPr>
+          <p:cNvPr id="31" name="TextBox 30"/>
+          <p:cNvSpPr txBox="1"/>
+          <p:nvPr/>
+        </p:nvSpPr>
+        <p:spPr>
+          <a:xfrm>
+            <a:off x="5120640" y="5285231"/>
+            <a:ext cx="6400800" cy="640080"/>
+          </a:xfrm>
+          <a:prstGeom prst="rect">
+            <a:avLst/>
+          </a:prstGeom>
+          <a:noFill/>
+        </p:spPr>
+        <p:txBody>
+          <a:bodyPr wrap="square" lIns="45720" rIns="45720" tIns="27432" bIns="27432" anchor="ctr">
+            <a:spAutoFit/>
+          </a:bodyPr>
+          <a:lstStyle/>
+          <a:p>
+            <a:pPr algn="l"/>
+            <a:r>
+              <a:rPr sz="1400" b="0">
                 <a:solidFill>
                   <a:srgbClr val="BCAAA4"/>
                 </a:solidFill>
                 <a:latin typeface="Calibri"/>
               </a:rPr>
-              <a:t>KPIs del dashboard · 5 pts · Sprint 4</a:t>
-            </a:r>
-          </a:p>
-          <a:p>
-            <a:pPr>
-              <a:spcAft>
-                <a:spcPts val="1000"/>
-              </a:spcAft>
-            </a:pPr>
-            <a:r>
-              <a:rPr sz="900">
-                <a:solidFill>
-                  <a:srgbClr val="66BB6A"/>
-                </a:solidFill>
-                <a:latin typeface="Calibri"/>
-              </a:rPr>
-              <a:t>● </a:t>
-            </a:r>
-            <a:r>
-              <a:rPr b="1" sz="1400">
-                <a:solidFill>
-                  <a:srgbClr val="F3E9E2"/>
-                </a:solidFill>
-                <a:latin typeface="Calibri"/>
-              </a:rPr>
-              <a:t>HU-21: </a:t>
-            </a:r>
-            <a:r>
-              <a:rPr sz="1400">
-                <a:solidFill>
-                  <a:srgbClr val="BCAAA4"/>
-                </a:solidFill>
-                <a:latin typeface="Calibri"/>
-              </a:rPr>
-              <a:t>Gráficas y últimas exportaciones · 5 pts · Sprint 4</a:t>
-            </a:r>
-          </a:p>
-          <a:p>
-            <a:pPr>
-              <a:spcAft>
-                <a:spcPts val="1000"/>
-              </a:spcAft>
-            </a:pPr>
-            <a:r>
-              <a:rPr sz="900">
-                <a:solidFill>
-                  <a:srgbClr val="66BB6A"/>
-                </a:solidFill>
-                <a:latin typeface="Calibri"/>
-              </a:rPr>
-              <a:t>● </a:t>
-            </a:r>
-            <a:r>
-              <a:rPr b="1" sz="1400">
-                <a:solidFill>
-                  <a:srgbClr val="F3E9E2"/>
-                </a:solidFill>
-                <a:latin typeface="Calibri"/>
-              </a:rPr>
-              <a:t>Aporte realizado hasta hoy: </a:t>
-            </a:r>
-            <a:r>
-              <a:rPr sz="1400">
-                <a:solidFill>
-                  <a:srgbClr val="BCAAA4"/>
-                </a:solidFill>
-                <a:latin typeface="Calibri"/>
-              </a:rPr>
-              <a:t>[COMPLETAR con Jira/Git]</a:t>
+              <a:t>Filtro por fechas y exportación a PDF y Excel</a:t>
             </a:r>
           </a:p>
         </p:txBody>

--- a/docs/sprint2/CoffeeExport_Manager_Sprint2.pptx
+++ b/docs/sprint2/CoffeeExport_Manager_Sprint2.pptx
@@ -651,7 +651,7 @@
           <a:lstStyle/>
           <a:p>
             <a:r>
-              <a:t>Resumen del estado. LISTO: Sprint 1 con HU-01 a HU-04 (autenticación, clientes, productos e inventario) y los mockups de Login, Dashboard, Nueva Exportación y Reportes. EN PROGRESO: documentación de calidad del Sprint 2 (requerimientos, UML, backlog, modelo de datos) y ejecución del plan de pruebas. SIGUE: implementar Exportaciones y Documentación, completar Usuarios, y luego Pagos, Reportes y Dashboard. Aclarar que el estado del Sprint 1 debe validarse contra el código y Jira [COMPLETAR]. Tiempo: 1 minuto.</a:t>
+              <a:t>Resumen del estado. LISTO: Sprint 1 con HU-01 a HU-04 (autenticación, clientes, productos e inventario) y los mockups de Login, Dashboard, Nueva Exportación y Reportes. EN PROGRESO: documentación de calidad del Sprint 2 (requerimientos, UML, backlog, modelo de datos) y ejecución del plan de pruebas. SIGUE: implementar Exportaciones y Documentación, completar Usuarios, y luego Pagos, Reportes y Dashboard. Aclarar que el estado del Sprint 1 debe validarse contra el código y Jira. Tiempo: 1 minuto.</a:t>
             </a:r>
           </a:p>
         </p:txBody>
@@ -931,7 +931,7 @@
           <a:lstStyle/>
           <a:p>
             <a:r>
-              <a:t>Los cuatro ítems del Sprint 1: HU-01 Autenticación, HU-02 Clientes, HU-03 Productos y HU-04 Inventario. Los responsables mostrados son una propuesta tentativa, marcada [COMPLETAR], pues deben confirmarse con Jira y con el historial de Git; el repositorio estaba vacío al preparar esta presentación. Cada integrante ampliará su aporte en las diapositivas individuales. Tiempo: 45 segundos.</a:t>
+              <a:t>Los cuatro ítems del Sprint 1: HU-01 Autenticación, HU-02 Clientes, HU-03 Productos y HU-04 Inventario. Los responsables mostrados son una propuesta que debe confirmarse con Jira y con el historial de Git; el código del Sprint 1 no estaba en el repositorio al preparar esta presentación. Cada integrante ampliará su aporte en las diapositivas individuales. Tiempo: 45 segundos.</a:t>
             </a:r>
           </a:p>
         </p:txBody>
@@ -1071,7 +1071,7 @@
           <a:lstStyle/>
           <a:p>
             <a:r>
-              <a:t>El plan tiene 44 casos de prueba usando la plantilla de la materia. Mezcla pruebas unitarias sobre servicios y repositorios, de integración sobre controladores REST con MySQL, del sistema sobre los flujos de pantalla, y de seguridad (login fallido, BCrypt, acceso sin rol, inyección SQL básica). 35 casos cubren HU-01 a HU-04, que corresponden al Sprint 1. 9 casos son de módulos aún no implementados y quedan como pendientes. Importante: aún no se han registrado resultados de ejecución; las columnas resultado obtenido, pasa/no y fecha están como [COMPLETAR]. No presentamos porcentajes de éxito porque no se han ejecutado. Los nombres de clases y métodos están marcados [VERIFICAR] hasta contrastarlos con el repositorio. Tiempo: 1 minuto.</a:t>
+              <a:t>El plan tiene 44 casos de prueba usando la plantilla de la materia. Mezcla pruebas unitarias sobre servicios y repositorios, de integración sobre controladores REST con MySQL, del sistema sobre los flujos de pantalla, y de seguridad (login fallido, BCrypt, acceso sin rol, inyección SQL básica). 35 casos cubren HU-01 a HU-04, que corresponden al Sprint 1. 9 casos son de módulos aún no implementados y quedan como pendientes. Importante: aún no se han registrado resultados de ejecución; las columnas resultado obtenido, pasa/no y fecha del plan están pendientes de diligenciar. No presentamos porcentajes de éxito porque no se han ejecutado. Los nombres de clases y métodos están marcados [VERIFICAR] hasta contrastarlos con el repositorio. Tiempo: 1 minuto.</a:t>
             </a:r>
           </a:p>
         </p:txBody>
@@ -9702,7 +9702,7 @@
                           </a:solidFill>
                           <a:latin typeface="Calibri"/>
                         </a:rPr>
-                        <a:t>[COMPLETAR] (propuesta: Brayan Guerrero)</a:t>
+                        <a:t>Brayan Guerrero (propuesta)</a:t>
                       </a:r>
                     </a:p>
                   </a:txBody>
@@ -9814,7 +9814,7 @@
                           </a:solidFill>
                           <a:latin typeface="Calibri"/>
                         </a:rPr>
-                        <a:t>[COMPLETAR] (propuesta: Juan Jurado)</a:t>
+                        <a:t>Juan Jurado (propuesta)</a:t>
                       </a:r>
                     </a:p>
                   </a:txBody>
@@ -9926,7 +9926,7 @@
                           </a:solidFill>
                           <a:latin typeface="Calibri"/>
                         </a:rPr>
-                        <a:t>[COMPLETAR] (propuesta: Nicoll López)</a:t>
+                        <a:t>Nicoll López (propuesta)</a:t>
                       </a:r>
                     </a:p>
                   </a:txBody>
@@ -10038,7 +10038,7 @@
                           </a:solidFill>
                           <a:latin typeface="Calibri"/>
                         </a:rPr>
-                        <a:t>[COMPLETAR] (propuesta: Alexander Rodríguez)</a:t>
+                        <a:t>Alexander Rodríguez (propuesta)</a:t>
                       </a:r>
                     </a:p>
                   </a:txBody>
@@ -10105,7 +10105,7 @@
                 </a:solidFill>
                 <a:latin typeface="Calibri"/>
               </a:rPr>
-              <a:t>Propuesta tentativa de responsables: no proviene de Git ni de Jira. El equipo debe completarla con los datos reales.</a:t>
+              <a:t>Responsables propuestos según el plan por módulo; no provienen de Git ni de Jira y deben confirmarse.</a:t>
             </a:r>
           </a:p>
         </p:txBody>
@@ -13263,7 +13263,7 @@
                 </a:solidFill>
                 <a:latin typeface="Calibri"/>
               </a:rPr>
-              <a:t>0 · resultados [COMPLETAR]</a:t>
+              <a:t>0 · pendiente de ejecución</a:t>
             </a:r>
           </a:p>
           <a:p>
